--- a/propuesta-clt/Estudio_Mercado_CLT_Mexico_Latam_ES.pptx
+++ b/propuesta-clt/Estudio_Mercado_CLT_Mexico_Latam_ES.pptx
@@ -143,20 +143,20 @@
   <p:extLst>
     <p:ext uri="{521415D9-36F7-43E2-AB2F-B90AF26B5E84}">
       <p14:sectionLst xmlns:p14="http://schemas.microsoft.com/office/powerpoint/2010/main">
-        <p14:section name="Inicio" id="{e418f701-0fa8-d667-7094-e434f8b49cb9}">
+        <p14:section name="Inicio" id="{cdd6f909-99aa-446a-694a-647e901c8fa3}">
           <p14:sldIdLst>
             <p14:sldId id="256"/>
             <p14:sldId id="257"/>
             <p14:sldId id="258"/>
           </p14:sldIdLst>
         </p14:section>
-        <p14:section name="Alcance y metodología" id="{e6d738f1-4f82-0e14-cc12-5ea532a3cfe1}">
+        <p14:section name="Alcance y metodología" id="{59635f1f-0f01-adc8-20b1-3565b3767385}">
           <p14:sldIdLst>
             <p14:sldId id="259"/>
             <p14:sldId id="260"/>
           </p14:sldIdLst>
         </p14:section>
-        <p14:section name="El fabricante: CLT" id="{d3d01229-1b08-e28a-11f4-5bc5990490dc}">
+        <p14:section name="El fabricante: CLT" id="{0ce50232-2995-3d0d-1c50-e59d9bc377c6}">
           <p14:sldIdLst>
             <p14:sldId id="261"/>
             <p14:sldId id="262"/>
@@ -168,7 +168,7 @@
             <p14:sldId id="268"/>
           </p14:sldIdLst>
         </p14:section>
-        <p14:section name="Mercado mexicano" id="{cdf7faa1-205d-0e16-ba91-580700b11632}">
+        <p14:section name="Mercado mexicano" id="{18fab30b-8f3a-1260-6f29-82fe4bd169b3}">
           <p14:sldIdLst>
             <p14:sldId id="269"/>
             <p14:sldId id="270"/>
@@ -178,14 +178,14 @@
             <p14:sldId id="274"/>
           </p14:sldIdLst>
         </p14:section>
-        <p14:section name="Clientes prioritarios" id="{9a98a241-ecc9-68c5-9f2b-3f678618c24c}">
+        <p14:section name="Clientes prioritarios" id="{a6588296-2bd0-4af7-786b-a7334245df82}">
           <p14:sldIdLst>
             <p14:sldId id="275"/>
             <p14:sldId id="276"/>
             <p14:sldId id="277"/>
           </p14:sldIdLst>
         </p14:section>
-        <p14:section name="Competencia" id="{45437437-0b23-b5fb-17b2-41b5658215d8}">
+        <p14:section name="Competencia" id="{74ff7dad-2423-687f-6d0f-21af50c0e183}">
           <p14:sldIdLst>
             <p14:sldId id="278"/>
             <p14:sldId id="279"/>
@@ -194,13 +194,13 @@
             <p14:sldId id="282"/>
           </p14:sldIdLst>
         </p14:section>
-        <p14:section name="Comercio exterior" id="{f307d219-ce71-0b28-87df-7671b587c065}">
+        <p14:section name="Comercio exterior" id="{f61edf44-1445-f388-e591-a5de80b8e40e}">
           <p14:sldIdLst>
             <p14:sldId id="283"/>
             <p14:sldId id="284"/>
           </p14:sldIdLst>
         </p14:section>
-        <p14:section name="Latinoamérica y EE. UU." id="{2c16940a-bc66-181c-b0e0-845b95d00c9f}">
+        <p14:section name="Latinoamérica y EE. UU." id="{a418e2a0-2068-f144-6147-e73723bffc4b}">
           <p14:sldIdLst>
             <p14:sldId id="285"/>
             <p14:sldId id="286"/>
@@ -208,7 +208,7 @@
             <p14:sldId id="288"/>
           </p14:sldIdLst>
         </p14:section>
-        <p14:section name="Conclusiones" id="{9a557469-bfaf-1165-e252-0ff37d13db36}">
+        <p14:section name="Conclusiones" id="{9f445820-cc6b-13bf-41e2-dbb32a0aa5b2}">
           <p14:sldIdLst>
             <p14:sldId id="289"/>
             <p14:sldId id="290"/>
@@ -1446,13 +1446,13 @@
                 <c:formatCode>General</c:formatCode>
                 <c:ptCount val="3"/>
                 <c:pt idx="0">
-                  <c:v>13</c:v>
+                  <c:v>11</c:v>
                 </c:pt>
                 <c:pt idx="1">
                   <c:v>6</c:v>
                 </c:pt>
                 <c:pt idx="2">
-                  <c:v>8</c:v>
+                  <c:v>7</c:v>
                 </c:pt>
               </c:numCache>
             </c:numRef>
@@ -1529,13 +1529,13 @@
                 <c:formatCode>General</c:formatCode>
                 <c:ptCount val="3"/>
                 <c:pt idx="0">
-                  <c:v>23</c:v>
+                  <c:v>24</c:v>
                 </c:pt>
                 <c:pt idx="1">
                   <c:v>16</c:v>
                 </c:pt>
                 <c:pt idx="2">
-                  <c:v>16</c:v>
+                  <c:v>17</c:v>
                 </c:pt>
               </c:numCache>
             </c:numRef>
@@ -1615,10 +1615,10 @@
                   <c:v>9</c:v>
                 </c:pt>
                 <c:pt idx="1">
-                  <c:v>12</c:v>
+                  <c:v>11</c:v>
                 </c:pt>
                 <c:pt idx="2">
-                  <c:v>19</c:v>
+                  <c:v>18</c:v>
                 </c:pt>
               </c:numCache>
             </c:numRef>
@@ -11462,7 +11462,7 @@
                   <a:schemeClr val="accent1"/>
                 </a:solidFill>
               </a:rPr>
-              <a:t>16</a:t>
+              <a:t>17</a:t>
             </a:r>
             <a:endParaRPr lang="en-US" sz="3000" dirty="0"/>
           </a:p>
@@ -11534,7 +11534,7 @@
                   <a:schemeClr val="accent2"/>
                 </a:solidFill>
               </a:rPr>
-              <a:t>35</a:t>
+              <a:t>33</a:t>
             </a:r>
             <a:endParaRPr lang="en-US" sz="3000" dirty="0"/>
           </a:p>
@@ -12050,7 +12050,7 @@
                   <a:srgbClr val="B38600"/>
                 </a:solidFill>
               </a:rPr>
-              <a:t>122</a:t>
+              <a:t>119</a:t>
             </a:r>
             <a:endParaRPr lang="en-US" sz="3000" dirty="0"/>
           </a:p>
@@ -16090,7 +16090,7 @@
                             <a:srgbClr val="1B1F3B"/>
                           </a:solidFill>
                         </a:rPr>
-                        <a:t>RMC de México</a:t>
+                        <a:t>Industrias Manufactureras MYR</a:t>
                       </a:r>
                       <a:endParaRPr lang="en-US" sz="900" dirty="0"/>
                     </a:p>
@@ -16151,7 +16151,7 @@
                             <a:srgbClr val="1B1F3B"/>
                           </a:solidFill>
                         </a:rPr>
-                        <a:t>Linares, N.L.</a:t>
+                        <a:t>Irapuato, Gto.</a:t>
                       </a:r>
                       <a:endParaRPr lang="en-US" sz="900" dirty="0"/>
                     </a:p>
@@ -16212,7 +16212,7 @@
                             <a:srgbClr val="1B1F3B"/>
                           </a:solidFill>
                         </a:rPr>
-                        <a:t>Under Armour, Nordstrom</a:t>
+                        <a:t>adidas, Puma</a:t>
                       </a:r>
                       <a:endParaRPr lang="en-US" sz="900" dirty="0"/>
                     </a:p>
@@ -24923,7 +24923,7 @@
                   <a:schemeClr val="tx1"/>
                 </a:solidFill>
               </a:rPr>
-              <a:t>Latinoamérica: 122 prospectos en 16 países</a:t>
+              <a:t>Latinoamérica: 119 prospectos en 16 países</a:t>
             </a:r>
             <a:endParaRPr lang="en-US" sz="2600" dirty="0"/>
           </a:p>
@@ -24975,7 +24975,7 @@
                   <a:schemeClr val="accent1"/>
                 </a:solidFill>
               </a:rPr>
-              <a:t>27</a:t>
+              <a:t>24</a:t>
             </a:r>
             <a:endParaRPr lang="en-US" sz="3000" dirty="0"/>
           </a:p>
@@ -25047,7 +25047,7 @@
                   <a:schemeClr val="accent2"/>
                 </a:solidFill>
               </a:rPr>
-              <a:t>45</a:t>
+              <a:t>44</a:t>
             </a:r>
             <a:endParaRPr lang="en-US" sz="3000" dirty="0"/>
           </a:p>
@@ -25119,7 +25119,7 @@
                   <a:schemeClr val="accent1"/>
                 </a:solidFill>
               </a:rPr>
-              <a:t>19 + 19</a:t>
+              <a:t>19 + 14</a:t>
             </a:r>
             <a:endParaRPr lang="en-US" sz="3000" dirty="0"/>
           </a:p>
@@ -25155,7 +25155,7 @@
                   <a:schemeClr val="tx2"/>
                 </a:solidFill>
               </a:rPr>
-              <a:t>Perú y República Dominicana</a:t>
+              <a:t>Perú y Colombia</a:t>
             </a:r>
             <a:endParaRPr lang="en-US" sz="1200" dirty="0"/>
           </a:p>
@@ -25499,7 +25499,7 @@
                             <a:srgbClr val="1B1F3B"/>
                           </a:solidFill>
                         </a:rPr>
-                        <a:t>Gildan Activewear</a:t>
+                        <a:t>TCPL The Caribbean Print Limitada S.R.L.</a:t>
                       </a:r>
                       <a:endParaRPr lang="en-US" sz="900" dirty="0"/>
                     </a:p>
@@ -25560,7 +25560,7 @@
                             <a:srgbClr val="1B1F3B"/>
                           </a:solidFill>
                         </a:rPr>
-                        <a:t>Honduras</a:t>
+                        <a:t>República Dominicana</a:t>
                       </a:r>
                       <a:endParaRPr lang="en-US" sz="900" dirty="0"/>
                     </a:p>
@@ -25621,7 +25621,7 @@
                             <a:srgbClr val="1B1F3B"/>
                           </a:solidFill>
                         </a:rPr>
-                        <a:t>OEM / maquila de paquete completo</a:t>
+                        <a:t>Estampador por contrato</a:t>
                       </a:r>
                       <a:endParaRPr lang="en-US" sz="900" dirty="0"/>
                     </a:p>
@@ -25684,7 +25684,7 @@
                             <a:srgbClr val="1B1F3B"/>
                           </a:solidFill>
                         </a:rPr>
-                        <a:t>Hanes Ink Honduras</a:t>
+                        <a:t>The Willbes Dominicana Inc.</a:t>
                       </a:r>
                       <a:endParaRPr lang="en-US" sz="900" dirty="0"/>
                     </a:p>
@@ -25745,7 +25745,7 @@
                             <a:srgbClr val="1B1F3B"/>
                           </a:solidFill>
                         </a:rPr>
-                        <a:t>Honduras</a:t>
+                        <a:t>República Dominicana</a:t>
                       </a:r>
                       <a:endParaRPr lang="en-US" sz="900" dirty="0"/>
                     </a:p>
@@ -25869,7 +25869,7 @@
                             <a:srgbClr val="1B1F3B"/>
                           </a:solidFill>
                         </a:rPr>
-                        <a:t>Southern Apparel Contractors</a:t>
+                        <a:t>The Willbes Haitian</a:t>
                       </a:r>
                       <a:endParaRPr lang="en-US" sz="900" dirty="0"/>
                     </a:p>
@@ -25930,377 +25930,7 @@
                             <a:srgbClr val="1B1F3B"/>
                           </a:solidFill>
                         </a:rPr>
-                        <a:t>Honduras</a:t>
-                      </a:r>
-                      <a:endParaRPr lang="en-US" sz="900" dirty="0"/>
-                    </a:p>
-                  </a:txBody>
-                  <a:tcPr marL="45720" marR="45720" marT="45720" marB="45720" anchor="ctr">
-                    <a:lnL w="6350" cap="flat" cmpd="sng" algn="ctr">
-                      <a:solidFill>
-                        <a:srgbClr val="C9D1DC"/>
-                      </a:solidFill>
-                      <a:prstDash val="solid"/>
-                      <a:round/>
-                      <a:headEnd type="none" w="med" len="med"/>
-                      <a:tailEnd type="none" w="med" len="med"/>
-                    </a:lnL>
-                    <a:lnR w="6350" cap="flat" cmpd="sng" algn="ctr">
-                      <a:solidFill>
-                        <a:srgbClr val="C9D1DC"/>
-                      </a:solidFill>
-                      <a:prstDash val="solid"/>
-                      <a:round/>
-                      <a:headEnd type="none" w="med" len="med"/>
-                      <a:tailEnd type="none" w="med" len="med"/>
-                    </a:lnR>
-                    <a:lnT w="6350" cap="flat" cmpd="sng" algn="ctr">
-                      <a:solidFill>
-                        <a:srgbClr val="C9D1DC"/>
-                      </a:solidFill>
-                      <a:prstDash val="solid"/>
-                      <a:round/>
-                      <a:headEnd type="none" w="med" len="med"/>
-                      <a:tailEnd type="none" w="med" len="med"/>
-                    </a:lnT>
-                    <a:lnB w="6350" cap="flat" cmpd="sng" algn="ctr">
-                      <a:solidFill>
-                        <a:srgbClr val="C9D1DC"/>
-                      </a:solidFill>
-                      <a:prstDash val="solid"/>
-                      <a:round/>
-                      <a:headEnd type="none" w="med" len="med"/>
-                      <a:tailEnd type="none" w="med" len="med"/>
-                    </a:lnB>
-                    <a:solidFill>
-                      <a:srgbClr val="EEF2F7"/>
-                    </a:solidFill>
-                  </a:tcPr>
-                </a:tc>
-                <a:tc>
-                  <a:txBody>
-                    <a:bodyPr/>
-                    <a:lstStyle/>
-                    <a:p>
-                      <a:pPr indent="0" marL="0">
-                        <a:buNone/>
-                      </a:pPr>
-                      <a:r>
-                        <a:rPr lang="en-US" sz="900" dirty="0">
-                          <a:solidFill>
-                            <a:srgbClr val="1B1F3B"/>
-                          </a:solidFill>
-                        </a:rPr>
-                        <a:t>OEM / maquila de paquete completo</a:t>
-                      </a:r>
-                      <a:endParaRPr lang="en-US" sz="900" dirty="0"/>
-                    </a:p>
-                  </a:txBody>
-                  <a:tcPr marL="45720" marR="45720" marT="45720" marB="45720" anchor="ctr">
-                    <a:lnL w="6350" cap="flat" cmpd="sng" algn="ctr">
-                      <a:solidFill>
-                        <a:srgbClr val="C9D1DC"/>
-                      </a:solidFill>
-                      <a:prstDash val="solid"/>
-                      <a:round/>
-                      <a:headEnd type="none" w="med" len="med"/>
-                      <a:tailEnd type="none" w="med" len="med"/>
-                    </a:lnL>
-                    <a:lnR w="6350" cap="flat" cmpd="sng" algn="ctr">
-                      <a:solidFill>
-                        <a:srgbClr val="C9D1DC"/>
-                      </a:solidFill>
-                      <a:prstDash val="solid"/>
-                      <a:round/>
-                      <a:headEnd type="none" w="med" len="med"/>
-                      <a:tailEnd type="none" w="med" len="med"/>
-                    </a:lnR>
-                    <a:lnT w="6350" cap="flat" cmpd="sng" algn="ctr">
-                      <a:solidFill>
-                        <a:srgbClr val="C9D1DC"/>
-                      </a:solidFill>
-                      <a:prstDash val="solid"/>
-                      <a:round/>
-                      <a:headEnd type="none" w="med" len="med"/>
-                      <a:tailEnd type="none" w="med" len="med"/>
-                    </a:lnT>
-                    <a:lnB w="6350" cap="flat" cmpd="sng" algn="ctr">
-                      <a:solidFill>
-                        <a:srgbClr val="C9D1DC"/>
-                      </a:solidFill>
-                      <a:prstDash val="solid"/>
-                      <a:round/>
-                      <a:headEnd type="none" w="med" len="med"/>
-                      <a:tailEnd type="none" w="med" len="med"/>
-                    </a:lnB>
-                    <a:solidFill>
-                      <a:srgbClr val="EEF2F7"/>
-                    </a:solidFill>
-                  </a:tcPr>
-                </a:tc>
-              </a:tr>
-              <a:tr h="265176">
-                <a:tc>
-                  <a:txBody>
-                    <a:bodyPr/>
-                    <a:lstStyle/>
-                    <a:p>
-                      <a:pPr indent="0" marL="0">
-                        <a:buNone/>
-                      </a:pPr>
-                      <a:r>
-                        <a:rPr lang="en-US" sz="900" b="1" dirty="0">
-                          <a:solidFill>
-                            <a:srgbClr val="1B1F3B"/>
-                          </a:solidFill>
-                        </a:rPr>
-                        <a:t>Pinehurst Manufacturing</a:t>
-                      </a:r>
-                      <a:endParaRPr lang="en-US" sz="900" dirty="0"/>
-                    </a:p>
-                  </a:txBody>
-                  <a:tcPr marL="45720" marR="45720" marT="45720" marB="45720" anchor="ctr">
-                    <a:lnL w="6350" cap="flat" cmpd="sng" algn="ctr">
-                      <a:solidFill>
-                        <a:srgbClr val="C9D1DC"/>
-                      </a:solidFill>
-                      <a:prstDash val="solid"/>
-                      <a:round/>
-                      <a:headEnd type="none" w="med" len="med"/>
-                      <a:tailEnd type="none" w="med" len="med"/>
-                    </a:lnL>
-                    <a:lnR w="6350" cap="flat" cmpd="sng" algn="ctr">
-                      <a:solidFill>
-                        <a:srgbClr val="C9D1DC"/>
-                      </a:solidFill>
-                      <a:prstDash val="solid"/>
-                      <a:round/>
-                      <a:headEnd type="none" w="med" len="med"/>
-                      <a:tailEnd type="none" w="med" len="med"/>
-                    </a:lnR>
-                    <a:lnT w="6350" cap="flat" cmpd="sng" algn="ctr">
-                      <a:solidFill>
-                        <a:srgbClr val="C9D1DC"/>
-                      </a:solidFill>
-                      <a:prstDash val="solid"/>
-                      <a:round/>
-                      <a:headEnd type="none" w="med" len="med"/>
-                      <a:tailEnd type="none" w="med" len="med"/>
-                    </a:lnT>
-                    <a:lnB w="6350" cap="flat" cmpd="sng" algn="ctr">
-                      <a:solidFill>
-                        <a:srgbClr val="C9D1DC"/>
-                      </a:solidFill>
-                      <a:prstDash val="solid"/>
-                      <a:round/>
-                      <a:headEnd type="none" w="med" len="med"/>
-                      <a:tailEnd type="none" w="med" len="med"/>
-                    </a:lnB>
-                    <a:solidFill>
-                      <a:srgbClr val="FFFFFF"/>
-                    </a:solidFill>
-                  </a:tcPr>
-                </a:tc>
-                <a:tc>
-                  <a:txBody>
-                    <a:bodyPr/>
-                    <a:lstStyle/>
-                    <a:p>
-                      <a:pPr indent="0" marL="0">
-                        <a:buNone/>
-                      </a:pPr>
-                      <a:r>
-                        <a:rPr lang="en-US" sz="900" dirty="0">
-                          <a:solidFill>
-                            <a:srgbClr val="1B1F3B"/>
-                          </a:solidFill>
-                        </a:rPr>
-                        <a:t>Honduras</a:t>
-                      </a:r>
-                      <a:endParaRPr lang="en-US" sz="900" dirty="0"/>
-                    </a:p>
-                  </a:txBody>
-                  <a:tcPr marL="45720" marR="45720" marT="45720" marB="45720" anchor="ctr">
-                    <a:lnL w="6350" cap="flat" cmpd="sng" algn="ctr">
-                      <a:solidFill>
-                        <a:srgbClr val="C9D1DC"/>
-                      </a:solidFill>
-                      <a:prstDash val="solid"/>
-                      <a:round/>
-                      <a:headEnd type="none" w="med" len="med"/>
-                      <a:tailEnd type="none" w="med" len="med"/>
-                    </a:lnL>
-                    <a:lnR w="6350" cap="flat" cmpd="sng" algn="ctr">
-                      <a:solidFill>
-                        <a:srgbClr val="C9D1DC"/>
-                      </a:solidFill>
-                      <a:prstDash val="solid"/>
-                      <a:round/>
-                      <a:headEnd type="none" w="med" len="med"/>
-                      <a:tailEnd type="none" w="med" len="med"/>
-                    </a:lnR>
-                    <a:lnT w="6350" cap="flat" cmpd="sng" algn="ctr">
-                      <a:solidFill>
-                        <a:srgbClr val="C9D1DC"/>
-                      </a:solidFill>
-                      <a:prstDash val="solid"/>
-                      <a:round/>
-                      <a:headEnd type="none" w="med" len="med"/>
-                      <a:tailEnd type="none" w="med" len="med"/>
-                    </a:lnT>
-                    <a:lnB w="6350" cap="flat" cmpd="sng" algn="ctr">
-                      <a:solidFill>
-                        <a:srgbClr val="C9D1DC"/>
-                      </a:solidFill>
-                      <a:prstDash val="solid"/>
-                      <a:round/>
-                      <a:headEnd type="none" w="med" len="med"/>
-                      <a:tailEnd type="none" w="med" len="med"/>
-                    </a:lnB>
-                    <a:solidFill>
-                      <a:srgbClr val="FFFFFF"/>
-                    </a:solidFill>
-                  </a:tcPr>
-                </a:tc>
-                <a:tc>
-                  <a:txBody>
-                    <a:bodyPr/>
-                    <a:lstStyle/>
-                    <a:p>
-                      <a:pPr indent="0" marL="0">
-                        <a:buNone/>
-                      </a:pPr>
-                      <a:r>
-                        <a:rPr lang="en-US" sz="900" dirty="0">
-                          <a:solidFill>
-                            <a:srgbClr val="1B1F3B"/>
-                          </a:solidFill>
-                        </a:rPr>
-                        <a:t>Fabricante de ropa deportiva/uniformes</a:t>
-                      </a:r>
-                      <a:endParaRPr lang="en-US" sz="900" dirty="0"/>
-                    </a:p>
-                  </a:txBody>
-                  <a:tcPr marL="45720" marR="45720" marT="45720" marB="45720" anchor="ctr">
-                    <a:lnL w="6350" cap="flat" cmpd="sng" algn="ctr">
-                      <a:solidFill>
-                        <a:srgbClr val="C9D1DC"/>
-                      </a:solidFill>
-                      <a:prstDash val="solid"/>
-                      <a:round/>
-                      <a:headEnd type="none" w="med" len="med"/>
-                      <a:tailEnd type="none" w="med" len="med"/>
-                    </a:lnL>
-                    <a:lnR w="6350" cap="flat" cmpd="sng" algn="ctr">
-                      <a:solidFill>
-                        <a:srgbClr val="C9D1DC"/>
-                      </a:solidFill>
-                      <a:prstDash val="solid"/>
-                      <a:round/>
-                      <a:headEnd type="none" w="med" len="med"/>
-                      <a:tailEnd type="none" w="med" len="med"/>
-                    </a:lnR>
-                    <a:lnT w="6350" cap="flat" cmpd="sng" algn="ctr">
-                      <a:solidFill>
-                        <a:srgbClr val="C9D1DC"/>
-                      </a:solidFill>
-                      <a:prstDash val="solid"/>
-                      <a:round/>
-                      <a:headEnd type="none" w="med" len="med"/>
-                      <a:tailEnd type="none" w="med" len="med"/>
-                    </a:lnT>
-                    <a:lnB w="6350" cap="flat" cmpd="sng" algn="ctr">
-                      <a:solidFill>
-                        <a:srgbClr val="C9D1DC"/>
-                      </a:solidFill>
-                      <a:prstDash val="solid"/>
-                      <a:round/>
-                      <a:headEnd type="none" w="med" len="med"/>
-                      <a:tailEnd type="none" w="med" len="med"/>
-                    </a:lnB>
-                    <a:solidFill>
-                      <a:srgbClr val="FFFFFF"/>
-                    </a:solidFill>
-                  </a:tcPr>
-                </a:tc>
-              </a:tr>
-              <a:tr h="265176">
-                <a:tc>
-                  <a:txBody>
-                    <a:bodyPr/>
-                    <a:lstStyle/>
-                    <a:p>
-                      <a:pPr indent="0" marL="0">
-                        <a:buNone/>
-                      </a:pPr>
-                      <a:r>
-                        <a:rPr lang="en-US" sz="900" b="1" dirty="0">
-                          <a:solidFill>
-                            <a:srgbClr val="1B1F3B"/>
-                          </a:solidFill>
-                        </a:rPr>
-                        <a:t>DecoTex International</a:t>
-                      </a:r>
-                      <a:endParaRPr lang="en-US" sz="900" dirty="0"/>
-                    </a:p>
-                  </a:txBody>
-                  <a:tcPr marL="45720" marR="45720" marT="45720" marB="45720" anchor="ctr">
-                    <a:lnL w="6350" cap="flat" cmpd="sng" algn="ctr">
-                      <a:solidFill>
-                        <a:srgbClr val="C9D1DC"/>
-                      </a:solidFill>
-                      <a:prstDash val="solid"/>
-                      <a:round/>
-                      <a:headEnd type="none" w="med" len="med"/>
-                      <a:tailEnd type="none" w="med" len="med"/>
-                    </a:lnL>
-                    <a:lnR w="6350" cap="flat" cmpd="sng" algn="ctr">
-                      <a:solidFill>
-                        <a:srgbClr val="C9D1DC"/>
-                      </a:solidFill>
-                      <a:prstDash val="solid"/>
-                      <a:round/>
-                      <a:headEnd type="none" w="med" len="med"/>
-                      <a:tailEnd type="none" w="med" len="med"/>
-                    </a:lnR>
-                    <a:lnT w="6350" cap="flat" cmpd="sng" algn="ctr">
-                      <a:solidFill>
-                        <a:srgbClr val="C9D1DC"/>
-                      </a:solidFill>
-                      <a:prstDash val="solid"/>
-                      <a:round/>
-                      <a:headEnd type="none" w="med" len="med"/>
-                      <a:tailEnd type="none" w="med" len="med"/>
-                    </a:lnT>
-                    <a:lnB w="6350" cap="flat" cmpd="sng" algn="ctr">
-                      <a:solidFill>
-                        <a:srgbClr val="C9D1DC"/>
-                      </a:solidFill>
-                      <a:prstDash val="solid"/>
-                      <a:round/>
-                      <a:headEnd type="none" w="med" len="med"/>
-                      <a:tailEnd type="none" w="med" len="med"/>
-                    </a:lnB>
-                    <a:solidFill>
-                      <a:srgbClr val="EEF2F7"/>
-                    </a:solidFill>
-                  </a:tcPr>
-                </a:tc>
-                <a:tc>
-                  <a:txBody>
-                    <a:bodyPr/>
-                    <a:lstStyle/>
-                    <a:p>
-                      <a:pPr indent="0" marL="0">
-                        <a:buNone/>
-                      </a:pPr>
-                      <a:r>
-                        <a:rPr lang="en-US" sz="900" dirty="0">
-                          <a:solidFill>
-                            <a:srgbClr val="1B1F3B"/>
-                          </a:solidFill>
-                        </a:rPr>
-                        <a:t>El Salvador</a:t>
+                        <a:t>Haití</a:t>
                       </a:r>
                       <a:endParaRPr lang="en-US" sz="900" dirty="0"/>
                     </a:p>
@@ -26794,7 +26424,7 @@
                             <a:srgbClr val="1B1F3B"/>
                           </a:solidFill>
                         </a:rPr>
-                        <a:t>Apple Tree El Salvador</a:t>
+                        <a:t>ACSA Colors Printing</a:t>
                       </a:r>
                       <a:endParaRPr lang="en-US" sz="900" dirty="0"/>
                     </a:p>
@@ -26855,7 +26485,377 @@
                             <a:srgbClr val="1B1F3B"/>
                           </a:solidFill>
                         </a:rPr>
-                        <a:t>El Salvador</a:t>
+                        <a:t>Guatemala</a:t>
+                      </a:r>
+                      <a:endParaRPr lang="en-US" sz="900" dirty="0"/>
+                    </a:p>
+                  </a:txBody>
+                  <a:tcPr marL="45720" marR="45720" marT="45720" marB="45720" anchor="ctr">
+                    <a:lnL w="6350" cap="flat" cmpd="sng" algn="ctr">
+                      <a:solidFill>
+                        <a:srgbClr val="C9D1DC"/>
+                      </a:solidFill>
+                      <a:prstDash val="solid"/>
+                      <a:round/>
+                      <a:headEnd type="none" w="med" len="med"/>
+                      <a:tailEnd type="none" w="med" len="med"/>
+                    </a:lnL>
+                    <a:lnR w="6350" cap="flat" cmpd="sng" algn="ctr">
+                      <a:solidFill>
+                        <a:srgbClr val="C9D1DC"/>
+                      </a:solidFill>
+                      <a:prstDash val="solid"/>
+                      <a:round/>
+                      <a:headEnd type="none" w="med" len="med"/>
+                      <a:tailEnd type="none" w="med" len="med"/>
+                    </a:lnR>
+                    <a:lnT w="6350" cap="flat" cmpd="sng" algn="ctr">
+                      <a:solidFill>
+                        <a:srgbClr val="C9D1DC"/>
+                      </a:solidFill>
+                      <a:prstDash val="solid"/>
+                      <a:round/>
+                      <a:headEnd type="none" w="med" len="med"/>
+                      <a:tailEnd type="none" w="med" len="med"/>
+                    </a:lnT>
+                    <a:lnB w="6350" cap="flat" cmpd="sng" algn="ctr">
+                      <a:solidFill>
+                        <a:srgbClr val="C9D1DC"/>
+                      </a:solidFill>
+                      <a:prstDash val="solid"/>
+                      <a:round/>
+                      <a:headEnd type="none" w="med" len="med"/>
+                      <a:tailEnd type="none" w="med" len="med"/>
+                    </a:lnB>
+                    <a:solidFill>
+                      <a:srgbClr val="FFFFFF"/>
+                    </a:solidFill>
+                  </a:tcPr>
+                </a:tc>
+                <a:tc>
+                  <a:txBody>
+                    <a:bodyPr/>
+                    <a:lstStyle/>
+                    <a:p>
+                      <a:pPr indent="0" marL="0">
+                        <a:buNone/>
+                      </a:pPr>
+                      <a:r>
+                        <a:rPr lang="en-US" sz="900" dirty="0">
+                          <a:solidFill>
+                            <a:srgbClr val="1B1F3B"/>
+                          </a:solidFill>
+                        </a:rPr>
+                        <a:t>Estampador por contrato</a:t>
+                      </a:r>
+                      <a:endParaRPr lang="en-US" sz="900" dirty="0"/>
+                    </a:p>
+                  </a:txBody>
+                  <a:tcPr marL="45720" marR="45720" marT="45720" marB="45720" anchor="ctr">
+                    <a:lnL w="6350" cap="flat" cmpd="sng" algn="ctr">
+                      <a:solidFill>
+                        <a:srgbClr val="C9D1DC"/>
+                      </a:solidFill>
+                      <a:prstDash val="solid"/>
+                      <a:round/>
+                      <a:headEnd type="none" w="med" len="med"/>
+                      <a:tailEnd type="none" w="med" len="med"/>
+                    </a:lnL>
+                    <a:lnR w="6350" cap="flat" cmpd="sng" algn="ctr">
+                      <a:solidFill>
+                        <a:srgbClr val="C9D1DC"/>
+                      </a:solidFill>
+                      <a:prstDash val="solid"/>
+                      <a:round/>
+                      <a:headEnd type="none" w="med" len="med"/>
+                      <a:tailEnd type="none" w="med" len="med"/>
+                    </a:lnR>
+                    <a:lnT w="6350" cap="flat" cmpd="sng" algn="ctr">
+                      <a:solidFill>
+                        <a:srgbClr val="C9D1DC"/>
+                      </a:solidFill>
+                      <a:prstDash val="solid"/>
+                      <a:round/>
+                      <a:headEnd type="none" w="med" len="med"/>
+                      <a:tailEnd type="none" w="med" len="med"/>
+                    </a:lnT>
+                    <a:lnB w="6350" cap="flat" cmpd="sng" algn="ctr">
+                      <a:solidFill>
+                        <a:srgbClr val="C9D1DC"/>
+                      </a:solidFill>
+                      <a:prstDash val="solid"/>
+                      <a:round/>
+                      <a:headEnd type="none" w="med" len="med"/>
+                      <a:tailEnd type="none" w="med" len="med"/>
+                    </a:lnB>
+                    <a:solidFill>
+                      <a:srgbClr val="FFFFFF"/>
+                    </a:solidFill>
+                  </a:tcPr>
+                </a:tc>
+              </a:tr>
+              <a:tr h="265176">
+                <a:tc>
+                  <a:txBody>
+                    <a:bodyPr/>
+                    <a:lstStyle/>
+                    <a:p>
+                      <a:pPr indent="0" marL="0">
+                        <a:buNone/>
+                      </a:pPr>
+                      <a:r>
+                        <a:rPr lang="en-US" sz="900" b="1" dirty="0">
+                          <a:solidFill>
+                            <a:srgbClr val="1B1F3B"/>
+                          </a:solidFill>
+                        </a:rPr>
+                        <a:t>Topy Top</a:t>
+                      </a:r>
+                      <a:endParaRPr lang="en-US" sz="900" dirty="0"/>
+                    </a:p>
+                  </a:txBody>
+                  <a:tcPr marL="45720" marR="45720" marT="45720" marB="45720" anchor="ctr">
+                    <a:lnL w="6350" cap="flat" cmpd="sng" algn="ctr">
+                      <a:solidFill>
+                        <a:srgbClr val="C9D1DC"/>
+                      </a:solidFill>
+                      <a:prstDash val="solid"/>
+                      <a:round/>
+                      <a:headEnd type="none" w="med" len="med"/>
+                      <a:tailEnd type="none" w="med" len="med"/>
+                    </a:lnL>
+                    <a:lnR w="6350" cap="flat" cmpd="sng" algn="ctr">
+                      <a:solidFill>
+                        <a:srgbClr val="C9D1DC"/>
+                      </a:solidFill>
+                      <a:prstDash val="solid"/>
+                      <a:round/>
+                      <a:headEnd type="none" w="med" len="med"/>
+                      <a:tailEnd type="none" w="med" len="med"/>
+                    </a:lnR>
+                    <a:lnT w="6350" cap="flat" cmpd="sng" algn="ctr">
+                      <a:solidFill>
+                        <a:srgbClr val="C9D1DC"/>
+                      </a:solidFill>
+                      <a:prstDash val="solid"/>
+                      <a:round/>
+                      <a:headEnd type="none" w="med" len="med"/>
+                      <a:tailEnd type="none" w="med" len="med"/>
+                    </a:lnT>
+                    <a:lnB w="6350" cap="flat" cmpd="sng" algn="ctr">
+                      <a:solidFill>
+                        <a:srgbClr val="C9D1DC"/>
+                      </a:solidFill>
+                      <a:prstDash val="solid"/>
+                      <a:round/>
+                      <a:headEnd type="none" w="med" len="med"/>
+                      <a:tailEnd type="none" w="med" len="med"/>
+                    </a:lnB>
+                    <a:solidFill>
+                      <a:srgbClr val="EEF2F7"/>
+                    </a:solidFill>
+                  </a:tcPr>
+                </a:tc>
+                <a:tc>
+                  <a:txBody>
+                    <a:bodyPr/>
+                    <a:lstStyle/>
+                    <a:p>
+                      <a:pPr indent="0" marL="0">
+                        <a:buNone/>
+                      </a:pPr>
+                      <a:r>
+                        <a:rPr lang="en-US" sz="900" dirty="0">
+                          <a:solidFill>
+                            <a:srgbClr val="1B1F3B"/>
+                          </a:solidFill>
+                        </a:rPr>
+                        <a:t>Perú</a:t>
+                      </a:r>
+                      <a:endParaRPr lang="en-US" sz="900" dirty="0"/>
+                    </a:p>
+                  </a:txBody>
+                  <a:tcPr marL="45720" marR="45720" marT="45720" marB="45720" anchor="ctr">
+                    <a:lnL w="6350" cap="flat" cmpd="sng" algn="ctr">
+                      <a:solidFill>
+                        <a:srgbClr val="C9D1DC"/>
+                      </a:solidFill>
+                      <a:prstDash val="solid"/>
+                      <a:round/>
+                      <a:headEnd type="none" w="med" len="med"/>
+                      <a:tailEnd type="none" w="med" len="med"/>
+                    </a:lnL>
+                    <a:lnR w="6350" cap="flat" cmpd="sng" algn="ctr">
+                      <a:solidFill>
+                        <a:srgbClr val="C9D1DC"/>
+                      </a:solidFill>
+                      <a:prstDash val="solid"/>
+                      <a:round/>
+                      <a:headEnd type="none" w="med" len="med"/>
+                      <a:tailEnd type="none" w="med" len="med"/>
+                    </a:lnR>
+                    <a:lnT w="6350" cap="flat" cmpd="sng" algn="ctr">
+                      <a:solidFill>
+                        <a:srgbClr val="C9D1DC"/>
+                      </a:solidFill>
+                      <a:prstDash val="solid"/>
+                      <a:round/>
+                      <a:headEnd type="none" w="med" len="med"/>
+                      <a:tailEnd type="none" w="med" len="med"/>
+                    </a:lnT>
+                    <a:lnB w="6350" cap="flat" cmpd="sng" algn="ctr">
+                      <a:solidFill>
+                        <a:srgbClr val="C9D1DC"/>
+                      </a:solidFill>
+                      <a:prstDash val="solid"/>
+                      <a:round/>
+                      <a:headEnd type="none" w="med" len="med"/>
+                      <a:tailEnd type="none" w="med" len="med"/>
+                    </a:lnB>
+                    <a:solidFill>
+                      <a:srgbClr val="EEF2F7"/>
+                    </a:solidFill>
+                  </a:tcPr>
+                </a:tc>
+                <a:tc>
+                  <a:txBody>
+                    <a:bodyPr/>
+                    <a:lstStyle/>
+                    <a:p>
+                      <a:pPr indent="0" marL="0">
+                        <a:buNone/>
+                      </a:pPr>
+                      <a:r>
+                        <a:rPr lang="en-US" sz="900" dirty="0">
+                          <a:solidFill>
+                            <a:srgbClr val="1B1F3B"/>
+                          </a:solidFill>
+                        </a:rPr>
+                        <a:t>OEM / maquila de paquete completo</a:t>
+                      </a:r>
+                      <a:endParaRPr lang="en-US" sz="900" dirty="0"/>
+                    </a:p>
+                  </a:txBody>
+                  <a:tcPr marL="45720" marR="45720" marT="45720" marB="45720" anchor="ctr">
+                    <a:lnL w="6350" cap="flat" cmpd="sng" algn="ctr">
+                      <a:solidFill>
+                        <a:srgbClr val="C9D1DC"/>
+                      </a:solidFill>
+                      <a:prstDash val="solid"/>
+                      <a:round/>
+                      <a:headEnd type="none" w="med" len="med"/>
+                      <a:tailEnd type="none" w="med" len="med"/>
+                    </a:lnL>
+                    <a:lnR w="6350" cap="flat" cmpd="sng" algn="ctr">
+                      <a:solidFill>
+                        <a:srgbClr val="C9D1DC"/>
+                      </a:solidFill>
+                      <a:prstDash val="solid"/>
+                      <a:round/>
+                      <a:headEnd type="none" w="med" len="med"/>
+                      <a:tailEnd type="none" w="med" len="med"/>
+                    </a:lnR>
+                    <a:lnT w="6350" cap="flat" cmpd="sng" algn="ctr">
+                      <a:solidFill>
+                        <a:srgbClr val="C9D1DC"/>
+                      </a:solidFill>
+                      <a:prstDash val="solid"/>
+                      <a:round/>
+                      <a:headEnd type="none" w="med" len="med"/>
+                      <a:tailEnd type="none" w="med" len="med"/>
+                    </a:lnT>
+                    <a:lnB w="6350" cap="flat" cmpd="sng" algn="ctr">
+                      <a:solidFill>
+                        <a:srgbClr val="C9D1DC"/>
+                      </a:solidFill>
+                      <a:prstDash val="solid"/>
+                      <a:round/>
+                      <a:headEnd type="none" w="med" len="med"/>
+                      <a:tailEnd type="none" w="med" len="med"/>
+                    </a:lnB>
+                    <a:solidFill>
+                      <a:srgbClr val="EEF2F7"/>
+                    </a:solidFill>
+                  </a:tcPr>
+                </a:tc>
+              </a:tr>
+              <a:tr h="265176">
+                <a:tc>
+                  <a:txBody>
+                    <a:bodyPr/>
+                    <a:lstStyle/>
+                    <a:p>
+                      <a:pPr indent="0" marL="0">
+                        <a:buNone/>
+                      </a:pPr>
+                      <a:r>
+                        <a:rPr lang="en-US" sz="900" b="1" dirty="0">
+                          <a:solidFill>
+                            <a:srgbClr val="1B1F3B"/>
+                          </a:solidFill>
+                        </a:rPr>
+                        <a:t>Industrias Nettalco</a:t>
+                      </a:r>
+                      <a:endParaRPr lang="en-US" sz="900" dirty="0"/>
+                    </a:p>
+                  </a:txBody>
+                  <a:tcPr marL="45720" marR="45720" marT="45720" marB="45720" anchor="ctr">
+                    <a:lnL w="6350" cap="flat" cmpd="sng" algn="ctr">
+                      <a:solidFill>
+                        <a:srgbClr val="C9D1DC"/>
+                      </a:solidFill>
+                      <a:prstDash val="solid"/>
+                      <a:round/>
+                      <a:headEnd type="none" w="med" len="med"/>
+                      <a:tailEnd type="none" w="med" len="med"/>
+                    </a:lnL>
+                    <a:lnR w="6350" cap="flat" cmpd="sng" algn="ctr">
+                      <a:solidFill>
+                        <a:srgbClr val="C9D1DC"/>
+                      </a:solidFill>
+                      <a:prstDash val="solid"/>
+                      <a:round/>
+                      <a:headEnd type="none" w="med" len="med"/>
+                      <a:tailEnd type="none" w="med" len="med"/>
+                    </a:lnR>
+                    <a:lnT w="6350" cap="flat" cmpd="sng" algn="ctr">
+                      <a:solidFill>
+                        <a:srgbClr val="C9D1DC"/>
+                      </a:solidFill>
+                      <a:prstDash val="solid"/>
+                      <a:round/>
+                      <a:headEnd type="none" w="med" len="med"/>
+                      <a:tailEnd type="none" w="med" len="med"/>
+                    </a:lnT>
+                    <a:lnB w="6350" cap="flat" cmpd="sng" algn="ctr">
+                      <a:solidFill>
+                        <a:srgbClr val="C9D1DC"/>
+                      </a:solidFill>
+                      <a:prstDash val="solid"/>
+                      <a:round/>
+                      <a:headEnd type="none" w="med" len="med"/>
+                      <a:tailEnd type="none" w="med" len="med"/>
+                    </a:lnB>
+                    <a:solidFill>
+                      <a:srgbClr val="FFFFFF"/>
+                    </a:solidFill>
+                  </a:tcPr>
+                </a:tc>
+                <a:tc>
+                  <a:txBody>
+                    <a:bodyPr/>
+                    <a:lstStyle/>
+                    <a:p>
+                      <a:pPr indent="0" marL="0">
+                        <a:buNone/>
+                      </a:pPr>
+                      <a:r>
+                        <a:rPr lang="en-US" sz="900" dirty="0">
+                          <a:solidFill>
+                            <a:srgbClr val="1B1F3B"/>
+                          </a:solidFill>
+                        </a:rPr>
+                        <a:t>Perú</a:t>
                       </a:r>
                       <a:endParaRPr lang="en-US" sz="900" dirty="0"/>
                     </a:p>
@@ -26979,7 +26979,7 @@
                             <a:srgbClr val="1B1F3B"/>
                           </a:solidFill>
                         </a:rPr>
-                        <a:t>OA</a:t>
+                        <a:t>Serigrafía Moderna</a:t>
                       </a:r>
                       <a:endParaRPr lang="en-US" sz="900" dirty="0"/>
                     </a:p>
@@ -27040,7 +27040,7 @@
                             <a:srgbClr val="1B1F3B"/>
                           </a:solidFill>
                         </a:rPr>
-                        <a:t>El Salvador</a:t>
+                        <a:t>República Dominicana</a:t>
                       </a:r>
                       <a:endParaRPr lang="en-US" sz="900" dirty="0"/>
                     </a:p>
@@ -27101,7 +27101,7 @@
                             <a:srgbClr val="1B1F3B"/>
                           </a:solidFill>
                         </a:rPr>
-                        <a:t>OEM / maquila de paquete completo</a:t>
+                        <a:t>Estampador por contrato</a:t>
                       </a:r>
                       <a:endParaRPr lang="en-US" sz="900" dirty="0"/>
                     </a:p>
@@ -27164,7 +27164,7 @@
                             <a:srgbClr val="1B1F3B"/>
                           </a:solidFill>
                         </a:rPr>
-                        <a:t>Intradeco</a:t>
+                        <a:t>Uniwell Apparel</a:t>
                       </a:r>
                       <a:endParaRPr lang="en-US" sz="900" dirty="0"/>
                     </a:p>
@@ -27225,7 +27225,7 @@
                             <a:srgbClr val="1B1F3B"/>
                           </a:solidFill>
                         </a:rPr>
-                        <a:t>El Salvador</a:t>
+                        <a:t>Haití</a:t>
                       </a:r>
                       <a:endParaRPr lang="en-US" sz="900" dirty="0"/>
                     </a:p>
@@ -27349,7 +27349,7 @@
                             <a:srgbClr val="1B1F3B"/>
                           </a:solidFill>
                         </a:rPr>
-                        <a:t>ACSA Colors Printing</a:t>
+                        <a:t>Sun Island Jamaica Ltd.</a:t>
                       </a:r>
                       <a:endParaRPr lang="en-US" sz="900" dirty="0"/>
                     </a:p>
@@ -27410,7 +27410,7 @@
                             <a:srgbClr val="1B1F3B"/>
                           </a:solidFill>
                         </a:rPr>
-                        <a:t>Guatemala</a:t>
+                        <a:t>Jamaica</a:t>
                       </a:r>
                       <a:endParaRPr lang="en-US" sz="900" dirty="0"/>
                     </a:p>
@@ -27454,191 +27454,6 @@
                     </a:lnB>
                     <a:solidFill>
                       <a:srgbClr val="EEF2F7"/>
-                    </a:solidFill>
-                  </a:tcPr>
-                </a:tc>
-                <a:tc>
-                  <a:txBody>
-                    <a:bodyPr/>
-                    <a:lstStyle/>
-                    <a:p>
-                      <a:pPr indent="0" marL="0">
-                        <a:buNone/>
-                      </a:pPr>
-                      <a:r>
-                        <a:rPr lang="en-US" sz="900" dirty="0">
-                          <a:solidFill>
-                            <a:srgbClr val="1B1F3B"/>
-                          </a:solidFill>
-                        </a:rPr>
-                        <a:t>Estampador por contrato</a:t>
-                      </a:r>
-                      <a:endParaRPr lang="en-US" sz="900" dirty="0"/>
-                    </a:p>
-                  </a:txBody>
-                  <a:tcPr marL="45720" marR="45720" marT="45720" marB="45720" anchor="ctr">
-                    <a:lnL w="6350" cap="flat" cmpd="sng" algn="ctr">
-                      <a:solidFill>
-                        <a:srgbClr val="C9D1DC"/>
-                      </a:solidFill>
-                      <a:prstDash val="solid"/>
-                      <a:round/>
-                      <a:headEnd type="none" w="med" len="med"/>
-                      <a:tailEnd type="none" w="med" len="med"/>
-                    </a:lnL>
-                    <a:lnR w="6350" cap="flat" cmpd="sng" algn="ctr">
-                      <a:solidFill>
-                        <a:srgbClr val="C9D1DC"/>
-                      </a:solidFill>
-                      <a:prstDash val="solid"/>
-                      <a:round/>
-                      <a:headEnd type="none" w="med" len="med"/>
-                      <a:tailEnd type="none" w="med" len="med"/>
-                    </a:lnR>
-                    <a:lnT w="6350" cap="flat" cmpd="sng" algn="ctr">
-                      <a:solidFill>
-                        <a:srgbClr val="C9D1DC"/>
-                      </a:solidFill>
-                      <a:prstDash val="solid"/>
-                      <a:round/>
-                      <a:headEnd type="none" w="med" len="med"/>
-                      <a:tailEnd type="none" w="med" len="med"/>
-                    </a:lnT>
-                    <a:lnB w="6350" cap="flat" cmpd="sng" algn="ctr">
-                      <a:solidFill>
-                        <a:srgbClr val="C9D1DC"/>
-                      </a:solidFill>
-                      <a:prstDash val="solid"/>
-                      <a:round/>
-                      <a:headEnd type="none" w="med" len="med"/>
-                      <a:tailEnd type="none" w="med" len="med"/>
-                    </a:lnB>
-                    <a:solidFill>
-                      <a:srgbClr val="EEF2F7"/>
-                    </a:solidFill>
-                  </a:tcPr>
-                </a:tc>
-              </a:tr>
-              <a:tr h="265176">
-                <a:tc>
-                  <a:txBody>
-                    <a:bodyPr/>
-                    <a:lstStyle/>
-                    <a:p>
-                      <a:pPr indent="0" marL="0">
-                        <a:buNone/>
-                      </a:pPr>
-                      <a:r>
-                        <a:rPr lang="en-US" sz="900" b="1" dirty="0">
-                          <a:solidFill>
-                            <a:srgbClr val="1B1F3B"/>
-                          </a:solidFill>
-                        </a:rPr>
-                        <a:t>Romatextil</a:t>
-                      </a:r>
-                      <a:endParaRPr lang="en-US" sz="900" dirty="0"/>
-                    </a:p>
-                  </a:txBody>
-                  <a:tcPr marL="45720" marR="45720" marT="45720" marB="45720" anchor="ctr">
-                    <a:lnL w="6350" cap="flat" cmpd="sng" algn="ctr">
-                      <a:solidFill>
-                        <a:srgbClr val="C9D1DC"/>
-                      </a:solidFill>
-                      <a:prstDash val="solid"/>
-                      <a:round/>
-                      <a:headEnd type="none" w="med" len="med"/>
-                      <a:tailEnd type="none" w="med" len="med"/>
-                    </a:lnL>
-                    <a:lnR w="6350" cap="flat" cmpd="sng" algn="ctr">
-                      <a:solidFill>
-                        <a:srgbClr val="C9D1DC"/>
-                      </a:solidFill>
-                      <a:prstDash val="solid"/>
-                      <a:round/>
-                      <a:headEnd type="none" w="med" len="med"/>
-                      <a:tailEnd type="none" w="med" len="med"/>
-                    </a:lnR>
-                    <a:lnT w="6350" cap="flat" cmpd="sng" algn="ctr">
-                      <a:solidFill>
-                        <a:srgbClr val="C9D1DC"/>
-                      </a:solidFill>
-                      <a:prstDash val="solid"/>
-                      <a:round/>
-                      <a:headEnd type="none" w="med" len="med"/>
-                      <a:tailEnd type="none" w="med" len="med"/>
-                    </a:lnT>
-                    <a:lnB w="6350" cap="flat" cmpd="sng" algn="ctr">
-                      <a:solidFill>
-                        <a:srgbClr val="C9D1DC"/>
-                      </a:solidFill>
-                      <a:prstDash val="solid"/>
-                      <a:round/>
-                      <a:headEnd type="none" w="med" len="med"/>
-                      <a:tailEnd type="none" w="med" len="med"/>
-                    </a:lnB>
-                    <a:solidFill>
-                      <a:srgbClr val="FFFFFF"/>
-                    </a:solidFill>
-                  </a:tcPr>
-                </a:tc>
-                <a:tc>
-                  <a:txBody>
-                    <a:bodyPr/>
-                    <a:lstStyle/>
-                    <a:p>
-                      <a:pPr indent="0" marL="0">
-                        <a:buNone/>
-                      </a:pPr>
-                      <a:r>
-                        <a:rPr lang="en-US" sz="900" dirty="0">
-                          <a:solidFill>
-                            <a:srgbClr val="1B1F3B"/>
-                          </a:solidFill>
-                        </a:rPr>
-                        <a:t>Guatemala</a:t>
-                      </a:r>
-                      <a:endParaRPr lang="en-US" sz="900" dirty="0"/>
-                    </a:p>
-                  </a:txBody>
-                  <a:tcPr marL="45720" marR="45720" marT="45720" marB="45720" anchor="ctr">
-                    <a:lnL w="6350" cap="flat" cmpd="sng" algn="ctr">
-                      <a:solidFill>
-                        <a:srgbClr val="C9D1DC"/>
-                      </a:solidFill>
-                      <a:prstDash val="solid"/>
-                      <a:round/>
-                      <a:headEnd type="none" w="med" len="med"/>
-                      <a:tailEnd type="none" w="med" len="med"/>
-                    </a:lnL>
-                    <a:lnR w="6350" cap="flat" cmpd="sng" algn="ctr">
-                      <a:solidFill>
-                        <a:srgbClr val="C9D1DC"/>
-                      </a:solidFill>
-                      <a:prstDash val="solid"/>
-                      <a:round/>
-                      <a:headEnd type="none" w="med" len="med"/>
-                      <a:tailEnd type="none" w="med" len="med"/>
-                    </a:lnR>
-                    <a:lnT w="6350" cap="flat" cmpd="sng" algn="ctr">
-                      <a:solidFill>
-                        <a:srgbClr val="C9D1DC"/>
-                      </a:solidFill>
-                      <a:prstDash val="solid"/>
-                      <a:round/>
-                      <a:headEnd type="none" w="med" len="med"/>
-                      <a:tailEnd type="none" w="med" len="med"/>
-                    </a:lnT>
-                    <a:lnB w="6350" cap="flat" cmpd="sng" algn="ctr">
-                      <a:solidFill>
-                        <a:srgbClr val="C9D1DC"/>
-                      </a:solidFill>
-                      <a:prstDash val="solid"/>
-                      <a:round/>
-                      <a:headEnd type="none" w="med" len="med"/>
-                      <a:tailEnd type="none" w="med" len="med"/>
-                    </a:lnB>
-                    <a:solidFill>
-                      <a:srgbClr val="FFFFFF"/>
                     </a:solidFill>
                   </a:tcPr>
                 </a:tc>
@@ -27699,6 +27514,191 @@
                       <a:tailEnd type="none" w="med" len="med"/>
                     </a:lnB>
                     <a:solidFill>
+                      <a:srgbClr val="EEF2F7"/>
+                    </a:solidFill>
+                  </a:tcPr>
+                </a:tc>
+              </a:tr>
+              <a:tr h="265176">
+                <a:tc>
+                  <a:txBody>
+                    <a:bodyPr/>
+                    <a:lstStyle/>
+                    <a:p>
+                      <a:pPr indent="0" marL="0">
+                        <a:buNone/>
+                      </a:pPr>
+                      <a:r>
+                        <a:rPr lang="en-US" sz="900" b="1" dirty="0">
+                          <a:solidFill>
+                            <a:srgbClr val="1B1F3B"/>
+                          </a:solidFill>
+                        </a:rPr>
+                        <a:t>Gildan Activewear</a:t>
+                      </a:r>
+                      <a:endParaRPr lang="en-US" sz="900" dirty="0"/>
+                    </a:p>
+                  </a:txBody>
+                  <a:tcPr marL="45720" marR="45720" marT="45720" marB="45720" anchor="ctr">
+                    <a:lnL w="6350" cap="flat" cmpd="sng" algn="ctr">
+                      <a:solidFill>
+                        <a:srgbClr val="C9D1DC"/>
+                      </a:solidFill>
+                      <a:prstDash val="solid"/>
+                      <a:round/>
+                      <a:headEnd type="none" w="med" len="med"/>
+                      <a:tailEnd type="none" w="med" len="med"/>
+                    </a:lnL>
+                    <a:lnR w="6350" cap="flat" cmpd="sng" algn="ctr">
+                      <a:solidFill>
+                        <a:srgbClr val="C9D1DC"/>
+                      </a:solidFill>
+                      <a:prstDash val="solid"/>
+                      <a:round/>
+                      <a:headEnd type="none" w="med" len="med"/>
+                      <a:tailEnd type="none" w="med" len="med"/>
+                    </a:lnR>
+                    <a:lnT w="6350" cap="flat" cmpd="sng" algn="ctr">
+                      <a:solidFill>
+                        <a:srgbClr val="C9D1DC"/>
+                      </a:solidFill>
+                      <a:prstDash val="solid"/>
+                      <a:round/>
+                      <a:headEnd type="none" w="med" len="med"/>
+                      <a:tailEnd type="none" w="med" len="med"/>
+                    </a:lnT>
+                    <a:lnB w="6350" cap="flat" cmpd="sng" algn="ctr">
+                      <a:solidFill>
+                        <a:srgbClr val="C9D1DC"/>
+                      </a:solidFill>
+                      <a:prstDash val="solid"/>
+                      <a:round/>
+                      <a:headEnd type="none" w="med" len="med"/>
+                      <a:tailEnd type="none" w="med" len="med"/>
+                    </a:lnB>
+                    <a:solidFill>
+                      <a:srgbClr val="FFFFFF"/>
+                    </a:solidFill>
+                  </a:tcPr>
+                </a:tc>
+                <a:tc>
+                  <a:txBody>
+                    <a:bodyPr/>
+                    <a:lstStyle/>
+                    <a:p>
+                      <a:pPr indent="0" marL="0">
+                        <a:buNone/>
+                      </a:pPr>
+                      <a:r>
+                        <a:rPr lang="en-US" sz="900" dirty="0">
+                          <a:solidFill>
+                            <a:srgbClr val="1B1F3B"/>
+                          </a:solidFill>
+                        </a:rPr>
+                        <a:t>Honduras</a:t>
+                      </a:r>
+                      <a:endParaRPr lang="en-US" sz="900" dirty="0"/>
+                    </a:p>
+                  </a:txBody>
+                  <a:tcPr marL="45720" marR="45720" marT="45720" marB="45720" anchor="ctr">
+                    <a:lnL w="6350" cap="flat" cmpd="sng" algn="ctr">
+                      <a:solidFill>
+                        <a:srgbClr val="C9D1DC"/>
+                      </a:solidFill>
+                      <a:prstDash val="solid"/>
+                      <a:round/>
+                      <a:headEnd type="none" w="med" len="med"/>
+                      <a:tailEnd type="none" w="med" len="med"/>
+                    </a:lnL>
+                    <a:lnR w="6350" cap="flat" cmpd="sng" algn="ctr">
+                      <a:solidFill>
+                        <a:srgbClr val="C9D1DC"/>
+                      </a:solidFill>
+                      <a:prstDash val="solid"/>
+                      <a:round/>
+                      <a:headEnd type="none" w="med" len="med"/>
+                      <a:tailEnd type="none" w="med" len="med"/>
+                    </a:lnR>
+                    <a:lnT w="6350" cap="flat" cmpd="sng" algn="ctr">
+                      <a:solidFill>
+                        <a:srgbClr val="C9D1DC"/>
+                      </a:solidFill>
+                      <a:prstDash val="solid"/>
+                      <a:round/>
+                      <a:headEnd type="none" w="med" len="med"/>
+                      <a:tailEnd type="none" w="med" len="med"/>
+                    </a:lnT>
+                    <a:lnB w="6350" cap="flat" cmpd="sng" algn="ctr">
+                      <a:solidFill>
+                        <a:srgbClr val="C9D1DC"/>
+                      </a:solidFill>
+                      <a:prstDash val="solid"/>
+                      <a:round/>
+                      <a:headEnd type="none" w="med" len="med"/>
+                      <a:tailEnd type="none" w="med" len="med"/>
+                    </a:lnB>
+                    <a:solidFill>
+                      <a:srgbClr val="FFFFFF"/>
+                    </a:solidFill>
+                  </a:tcPr>
+                </a:tc>
+                <a:tc>
+                  <a:txBody>
+                    <a:bodyPr/>
+                    <a:lstStyle/>
+                    <a:p>
+                      <a:pPr indent="0" marL="0">
+                        <a:buNone/>
+                      </a:pPr>
+                      <a:r>
+                        <a:rPr lang="en-US" sz="900" dirty="0">
+                          <a:solidFill>
+                            <a:srgbClr val="1B1F3B"/>
+                          </a:solidFill>
+                        </a:rPr>
+                        <a:t>OEM / maquila de paquete completo</a:t>
+                      </a:r>
+                      <a:endParaRPr lang="en-US" sz="900" dirty="0"/>
+                    </a:p>
+                  </a:txBody>
+                  <a:tcPr marL="45720" marR="45720" marT="45720" marB="45720" anchor="ctr">
+                    <a:lnL w="6350" cap="flat" cmpd="sng" algn="ctr">
+                      <a:solidFill>
+                        <a:srgbClr val="C9D1DC"/>
+                      </a:solidFill>
+                      <a:prstDash val="solid"/>
+                      <a:round/>
+                      <a:headEnd type="none" w="med" len="med"/>
+                      <a:tailEnd type="none" w="med" len="med"/>
+                    </a:lnL>
+                    <a:lnR w="6350" cap="flat" cmpd="sng" algn="ctr">
+                      <a:solidFill>
+                        <a:srgbClr val="C9D1DC"/>
+                      </a:solidFill>
+                      <a:prstDash val="solid"/>
+                      <a:round/>
+                      <a:headEnd type="none" w="med" len="med"/>
+                      <a:tailEnd type="none" w="med" len="med"/>
+                    </a:lnR>
+                    <a:lnT w="6350" cap="flat" cmpd="sng" algn="ctr">
+                      <a:solidFill>
+                        <a:srgbClr val="C9D1DC"/>
+                      </a:solidFill>
+                      <a:prstDash val="solid"/>
+                      <a:round/>
+                      <a:headEnd type="none" w="med" len="med"/>
+                      <a:tailEnd type="none" w="med" len="med"/>
+                    </a:lnT>
+                    <a:lnB w="6350" cap="flat" cmpd="sng" algn="ctr">
+                      <a:solidFill>
+                        <a:srgbClr val="C9D1DC"/>
+                      </a:solidFill>
+                      <a:prstDash val="solid"/>
+                      <a:round/>
+                      <a:headEnd type="none" w="med" len="med"/>
+                      <a:tailEnd type="none" w="med" len="med"/>
+                    </a:lnB>
+                    <a:solidFill>
                       <a:srgbClr val="FFFFFF"/>
                     </a:solidFill>
                   </a:tcPr>
@@ -27738,7 +27738,7 @@
                   <a:schemeClr val="accent5"/>
                 </a:solidFill>
               </a:rPr>
-              <a:t>Caribe: Gildan RD, The Caribbean Print, Serigrafía Moderna, Willbes Haitian, Uniwell, Sun Island Jamaica.</a:t>
+              <a:t>Primero las 8 cuentas foco (estampado en volumen o equipo M&amp;R / híbrido); el resto de prioridad A está en el Excel.</a:t>
             </a:r>
             <a:endParaRPr lang="en-US" sz="1000" dirty="0"/>
           </a:p>

--- a/propuesta-clt/Estudio_Mercado_CLT_Mexico_Latam_ES.pptx
+++ b/propuesta-clt/Estudio_Mercado_CLT_Mexico_Latam_ES.pptx
@@ -143,20 +143,20 @@
   <p:extLst>
     <p:ext uri="{521415D9-36F7-43E2-AB2F-B90AF26B5E84}">
       <p14:sectionLst xmlns:p14="http://schemas.microsoft.com/office/powerpoint/2010/main">
-        <p14:section name="Inicio" id="{cdd6f909-99aa-446a-694a-647e901c8fa3}">
+        <p14:section name="Inicio" id="{3b2e2911-5f95-766d-a2f1-6ced80a75e6c}">
           <p14:sldIdLst>
             <p14:sldId id="256"/>
             <p14:sldId id="257"/>
             <p14:sldId id="258"/>
           </p14:sldIdLst>
         </p14:section>
-        <p14:section name="Alcance y metodología" id="{59635f1f-0f01-adc8-20b1-3565b3767385}">
+        <p14:section name="Alcance y metodología" id="{d5135b3a-6aee-29de-6bea-803d054b0d44}">
           <p14:sldIdLst>
             <p14:sldId id="259"/>
             <p14:sldId id="260"/>
           </p14:sldIdLst>
         </p14:section>
-        <p14:section name="El fabricante: CLT" id="{0ce50232-2995-3d0d-1c50-e59d9bc377c6}">
+        <p14:section name="El fabricante: CLT" id="{c4615699-7da7-307c-d36c-6f0ed442a8d4}">
           <p14:sldIdLst>
             <p14:sldId id="261"/>
             <p14:sldId id="262"/>
@@ -168,7 +168,7 @@
             <p14:sldId id="268"/>
           </p14:sldIdLst>
         </p14:section>
-        <p14:section name="Mercado mexicano" id="{18fab30b-8f3a-1260-6f29-82fe4bd169b3}">
+        <p14:section name="Mercado mexicano" id="{e1c54e75-c445-abff-1e36-fe314196c27c}">
           <p14:sldIdLst>
             <p14:sldId id="269"/>
             <p14:sldId id="270"/>
@@ -178,14 +178,14 @@
             <p14:sldId id="274"/>
           </p14:sldIdLst>
         </p14:section>
-        <p14:section name="Clientes prioritarios" id="{a6588296-2bd0-4af7-786b-a7334245df82}">
+        <p14:section name="Clientes prioritarios" id="{e013d2e2-9b95-fae3-b4a4-507ff91ee72f}">
           <p14:sldIdLst>
             <p14:sldId id="275"/>
             <p14:sldId id="276"/>
             <p14:sldId id="277"/>
           </p14:sldIdLst>
         </p14:section>
-        <p14:section name="Competencia" id="{74ff7dad-2423-687f-6d0f-21af50c0e183}">
+        <p14:section name="Competencia" id="{5a0e1eca-6a73-44db-fc12-e16f8d4a9611}">
           <p14:sldIdLst>
             <p14:sldId id="278"/>
             <p14:sldId id="279"/>
@@ -194,13 +194,13 @@
             <p14:sldId id="282"/>
           </p14:sldIdLst>
         </p14:section>
-        <p14:section name="Comercio exterior" id="{f61edf44-1445-f388-e591-a5de80b8e40e}">
+        <p14:section name="Comercio exterior" id="{d9002ec2-99a4-c40a-5b83-0613d34f657c}">
           <p14:sldIdLst>
             <p14:sldId id="283"/>
             <p14:sldId id="284"/>
           </p14:sldIdLst>
         </p14:section>
-        <p14:section name="Latinoamérica y EE. UU." id="{a418e2a0-2068-f144-6147-e73723bffc4b}">
+        <p14:section name="Latinoamérica y EE. UU." id="{b34e54fc-b82a-4ff8-a8a9-4ce5ed84f0d4}">
           <p14:sldIdLst>
             <p14:sldId id="285"/>
             <p14:sldId id="286"/>
@@ -208,7 +208,7 @@
             <p14:sldId id="288"/>
           </p14:sldIdLst>
         </p14:section>
-        <p14:section name="Conclusiones" id="{9f445820-cc6b-13bf-41e2-dbb32a0aa5b2}">
+        <p14:section name="Conclusiones" id="{cc954dee-673d-2866-7011-a4160f274536}">
           <p14:sldIdLst>
             <p14:sldId id="289"/>
             <p14:sldId id="290"/>
@@ -1452,7 +1452,7 @@
                   <c:v>6</c:v>
                 </c:pt>
                 <c:pt idx="2">
-                  <c:v>7</c:v>
+                  <c:v>25</c:v>
                 </c:pt>
               </c:numCache>
             </c:numRef>
@@ -1535,7 +1535,7 @@
                   <c:v>16</c:v>
                 </c:pt>
                 <c:pt idx="2">
-                  <c:v>17</c:v>
+                  <c:v>40</c:v>
                 </c:pt>
               </c:numCache>
             </c:numRef>
@@ -1618,7 +1618,7 @@
                   <c:v>11</c:v>
                 </c:pt>
                 <c:pt idx="2">
-                  <c:v>18</c:v>
+                  <c:v>38</c:v>
                 </c:pt>
               </c:numCache>
             </c:numRef>
@@ -12050,7 +12050,7 @@
                   <a:srgbClr val="B38600"/>
                 </a:solidFill>
               </a:rPr>
-              <a:t>119</a:t>
+              <a:t>180</a:t>
             </a:r>
             <a:endParaRPr lang="en-US" sz="3000" dirty="0"/>
           </a:p>
@@ -24923,7 +24923,7 @@
                   <a:schemeClr val="tx1"/>
                 </a:solidFill>
               </a:rPr>
-              <a:t>Latinoamérica: 119 prospectos en 16 países</a:t>
+              <a:t>Latinoamérica: 180 prospectos en 16 países</a:t>
             </a:r>
             <a:endParaRPr lang="en-US" sz="2600" dirty="0"/>
           </a:p>
@@ -24975,7 +24975,7 @@
                   <a:schemeClr val="accent1"/>
                 </a:solidFill>
               </a:rPr>
-              <a:t>24</a:t>
+              <a:t>42</a:t>
             </a:r>
             <a:endParaRPr lang="en-US" sz="3000" dirty="0"/>
           </a:p>
@@ -25119,7 +25119,7 @@
                   <a:schemeClr val="accent1"/>
                 </a:solidFill>
               </a:rPr>
-              <a:t>19 + 14</a:t>
+              <a:t>41 + 35</a:t>
             </a:r>
             <a:endParaRPr lang="en-US" sz="3000" dirty="0"/>
           </a:p>
@@ -25155,7 +25155,7 @@
                   <a:schemeClr val="tx2"/>
                 </a:solidFill>
               </a:rPr>
-              <a:t>Perú y Colombia</a:t>
+              <a:t>Colombia y Brasil</a:t>
             </a:r>
             <a:endParaRPr lang="en-US" sz="1200" dirty="0"/>
           </a:p>
@@ -26979,7 +26979,7 @@
                             <a:srgbClr val="1B1F3B"/>
                           </a:solidFill>
                         </a:rPr>
-                        <a:t>Serigrafía Moderna</a:t>
+                        <a:t>Grupo Malwee</a:t>
                       </a:r>
                       <a:endParaRPr lang="en-US" sz="900" dirty="0"/>
                     </a:p>
@@ -27040,7 +27040,7 @@
                             <a:srgbClr val="1B1F3B"/>
                           </a:solidFill>
                         </a:rPr>
-                        <a:t>República Dominicana</a:t>
+                        <a:t>Brasil</a:t>
                       </a:r>
                       <a:endParaRPr lang="en-US" sz="900" dirty="0"/>
                     </a:p>
@@ -27101,7 +27101,7 @@
                             <a:srgbClr val="1B1F3B"/>
                           </a:solidFill>
                         </a:rPr>
-                        <a:t>Estampador por contrato</a:t>
+                        <a:t>Marca de moda</a:t>
                       </a:r>
                       <a:endParaRPr lang="en-US" sz="900" dirty="0"/>
                     </a:p>
@@ -27164,7 +27164,7 @@
                             <a:srgbClr val="1B1F3B"/>
                           </a:solidFill>
                         </a:rPr>
-                        <a:t>Uniwell Apparel</a:t>
+                        <a:t>Lunelli</a:t>
                       </a:r>
                       <a:endParaRPr lang="en-US" sz="900" dirty="0"/>
                     </a:p>
@@ -27225,7 +27225,7 @@
                             <a:srgbClr val="1B1F3B"/>
                           </a:solidFill>
                         </a:rPr>
-                        <a:t>Haití</a:t>
+                        <a:t>Brasil</a:t>
                       </a:r>
                       <a:endParaRPr lang="en-US" sz="900" dirty="0"/>
                     </a:p>
@@ -27286,7 +27286,7 @@
                             <a:srgbClr val="1B1F3B"/>
                           </a:solidFill>
                         </a:rPr>
-                        <a:t>OEM / maquila de paquete completo</a:t>
+                        <a:t>Marca de moda</a:t>
                       </a:r>
                       <a:endParaRPr lang="en-US" sz="900" dirty="0"/>
                     </a:p>
@@ -27349,7 +27349,7 @@
                             <a:srgbClr val="1B1F3B"/>
                           </a:solidFill>
                         </a:rPr>
-                        <a:t>Sun Island Jamaica Ltd.</a:t>
+                        <a:t>Grupo Kyly</a:t>
                       </a:r>
                       <a:endParaRPr lang="en-US" sz="900" dirty="0"/>
                     </a:p>
@@ -27410,7 +27410,7 @@
                             <a:srgbClr val="1B1F3B"/>
                           </a:solidFill>
                         </a:rPr>
-                        <a:t>Jamaica</a:t>
+                        <a:t>Brasil</a:t>
                       </a:r>
                       <a:endParaRPr lang="en-US" sz="900" dirty="0"/>
                     </a:p>
@@ -27471,7 +27471,7 @@
                             <a:srgbClr val="1B1F3B"/>
                           </a:solidFill>
                         </a:rPr>
-                        <a:t>Fabricante de ropa deportiva/uniformes</a:t>
+                        <a:t>Marca de moda</a:t>
                       </a:r>
                       <a:endParaRPr lang="en-US" sz="900" dirty="0"/>
                     </a:p>
@@ -27534,7 +27534,7 @@
                             <a:srgbClr val="1B1F3B"/>
                           </a:solidFill>
                         </a:rPr>
-                        <a:t>Gildan Activewear</a:t>
+                        <a:t>Brandili Têxtil</a:t>
                       </a:r>
                       <a:endParaRPr lang="en-US" sz="900" dirty="0"/>
                     </a:p>
@@ -27595,7 +27595,7 @@
                             <a:srgbClr val="1B1F3B"/>
                           </a:solidFill>
                         </a:rPr>
-                        <a:t>Honduras</a:t>
+                        <a:t>Brasil</a:t>
                       </a:r>
                       <a:endParaRPr lang="en-US" sz="900" dirty="0"/>
                     </a:p>
@@ -27656,7 +27656,7 @@
                             <a:srgbClr val="1B1F3B"/>
                           </a:solidFill>
                         </a:rPr>
-                        <a:t>OEM / maquila de paquete completo</a:t>
+                        <a:t>Marca de moda</a:t>
                       </a:r>
                       <a:endParaRPr lang="en-US" sz="900" dirty="0"/>
                     </a:p>

--- a/propuesta-clt/Estudio_Mercado_CLT_Mexico_Latam_ES.pptx
+++ b/propuesta-clt/Estudio_Mercado_CLT_Mexico_Latam_ES.pptx
@@ -42,9 +42,11 @@
     <p:sldId id="290" r:id="rId36"/>
     <p:sldId id="291" r:id="rId37"/>
     <p:sldId id="292" r:id="rId38"/>
+    <p:sldId id="293" r:id="rId39"/>
+    <p:sldId id="294" r:id="rId40"/>
   </p:sldIdLst>
   <p:notesMasterIdLst>
-    <p:notesMasterId r:id="rId39"/>
+    <p:notesMasterId r:id="rId41"/>
   </p:notesMasterIdLst>
   <p:sldSz cx="9144000" cy="5143500"/>
   <p:notesSz cx="5143500" cy="9144000"/>
@@ -143,20 +145,20 @@
   <p:extLst>
     <p:ext uri="{521415D9-36F7-43E2-AB2F-B90AF26B5E84}">
       <p14:sectionLst xmlns:p14="http://schemas.microsoft.com/office/powerpoint/2010/main">
-        <p14:section name="Inicio" id="{3b2e2911-5f95-766d-a2f1-6ced80a75e6c}">
+        <p14:section name="Inicio" id="{bbda5e5d-13a2-5641-bdc0-f03de0b18bf8}">
           <p14:sldIdLst>
             <p14:sldId id="256"/>
             <p14:sldId id="257"/>
             <p14:sldId id="258"/>
           </p14:sldIdLst>
         </p14:section>
-        <p14:section name="Alcance y metodología" id="{d5135b3a-6aee-29de-6bea-803d054b0d44}">
+        <p14:section name="Alcance y metodología" id="{55f2b188-1219-26aa-7ac0-c0764e5f73e5}">
           <p14:sldIdLst>
             <p14:sldId id="259"/>
             <p14:sldId id="260"/>
           </p14:sldIdLst>
         </p14:section>
-        <p14:section name="El fabricante: CLT" id="{c4615699-7da7-307c-d36c-6f0ed442a8d4}">
+        <p14:section name="El fabricante: CLT" id="{e69773a9-6532-1bc0-60d2-4e895f30590f}">
           <p14:sldIdLst>
             <p14:sldId id="261"/>
             <p14:sldId id="262"/>
@@ -168,7 +170,7 @@
             <p14:sldId id="268"/>
           </p14:sldIdLst>
         </p14:section>
-        <p14:section name="Mercado mexicano" id="{e1c54e75-c445-abff-1e36-fe314196c27c}">
+        <p14:section name="Mercado mexicano" id="{d6473e78-126b-56b4-5922-a0d346ded792}">
           <p14:sldIdLst>
             <p14:sldId id="269"/>
             <p14:sldId id="270"/>
@@ -178,14 +180,14 @@
             <p14:sldId id="274"/>
           </p14:sldIdLst>
         </p14:section>
-        <p14:section name="Clientes prioritarios" id="{e013d2e2-9b95-fae3-b4a4-507ff91ee72f}">
+        <p14:section name="Clientes prioritarios" id="{44b50488-f04b-1de5-fc77-7835aaf92606}">
           <p14:sldIdLst>
             <p14:sldId id="275"/>
             <p14:sldId id="276"/>
             <p14:sldId id="277"/>
           </p14:sldIdLst>
         </p14:section>
-        <p14:section name="Competencia" id="{5a0e1eca-6a73-44db-fc12-e16f8d4a9611}">
+        <p14:section name="Competencia" id="{1dabede5-628a-d221-4794-84cdc7998b4e}">
           <p14:sldIdLst>
             <p14:sldId id="278"/>
             <p14:sldId id="279"/>
@@ -194,26 +196,28 @@
             <p14:sldId id="282"/>
           </p14:sldIdLst>
         </p14:section>
-        <p14:section name="Comercio exterior" id="{d9002ec2-99a4-c40a-5b83-0613d34f657c}">
+        <p14:section name="Comercio exterior" id="{3bd79511-2901-a1ab-0a94-d8dd3fe7921d}">
           <p14:sldIdLst>
             <p14:sldId id="283"/>
             <p14:sldId id="284"/>
           </p14:sldIdLst>
         </p14:section>
-        <p14:section name="Latinoamérica y EE. UU." id="{b34e54fc-b82a-4ff8-a8a9-4ce5ed84f0d4}">
+        <p14:section name="Latinoamérica y EE. UU." id="{1b7210e7-144d-a513-ec60-7aef13a18394}">
           <p14:sldIdLst>
             <p14:sldId id="285"/>
             <p14:sldId id="286"/>
             <p14:sldId id="287"/>
             <p14:sldId id="288"/>
+            <p14:sldId id="289"/>
+            <p14:sldId id="290"/>
           </p14:sldIdLst>
         </p14:section>
-        <p14:section name="Conclusiones" id="{cc954dee-673d-2866-7011-a4160f274536}">
+        <p14:section name="Conclusiones" id="{fb6860f0-e751-07d0-7331-9009fb722274}">
           <p14:sldIdLst>
-            <p14:sldId id="289"/>
-            <p14:sldId id="290"/>
             <p14:sldId id="291"/>
             <p14:sldId id="292"/>
+            <p14:sldId id="293"/>
+            <p14:sldId id="294"/>
           </p14:sldIdLst>
         </p14:section>
       </p14:sectionLst>
@@ -4863,6 +4867,182 @@
 </p:notes>
 </file>
 
+<file path=ppt/notesSlides/notesSlide38.xml><?xml version="1.0" encoding="utf-8"?>
+<p:notes xmlns:a="http://schemas.openxmlformats.org/drawingml/2006/main" xmlns:r="http://schemas.openxmlformats.org/officeDocument/2006/relationships" xmlns:p="http://schemas.openxmlformats.org/presentationml/2006/main">
+  <p:cSld>
+    <p:spTree>
+      <p:nvGrpSpPr>
+        <p:cNvPr id="1" name=""/>
+        <p:cNvGrpSpPr/>
+        <p:nvPr/>
+      </p:nvGrpSpPr>
+      <p:grpSpPr>
+        <a:xfrm>
+          <a:off x="0" y="0"/>
+          <a:ext cx="0" cy="0"/>
+          <a:chOff x="0" y="0"/>
+          <a:chExt cx="0" cy="0"/>
+        </a:xfrm>
+      </p:grpSpPr>
+      <p:sp>
+        <p:nvSpPr>
+          <p:cNvPr id="2" name="Slide Image Placeholder 1"/>
+          <p:cNvSpPr>
+            <a:spLocks noGrp="1" noRot="1" noChangeAspect="1"/>
+          </p:cNvSpPr>
+          <p:nvPr>
+            <p:ph type="sldImg"/>
+          </p:nvPr>
+        </p:nvSpPr>
+        <p:spPr/>
+      </p:sp>
+      <p:sp>
+        <p:nvSpPr>
+          <p:cNvPr id="3" name="Notes Placeholder 2"/>
+          <p:cNvSpPr>
+            <a:spLocks noGrp="1"/>
+          </p:cNvSpPr>
+          <p:nvPr>
+            <p:ph type="body" idx="1"/>
+          </p:nvPr>
+        </p:nvSpPr>
+        <p:spPr/>
+        <p:txBody>
+          <a:bodyPr/>
+          <a:lstStyle/>
+          <a:p>
+            <a:r>
+              <a:rPr lang="en-US" dirty="0"/>
+              <a:t/>
+            </a:r>
+            <a:endParaRPr lang="en-US" dirty="0"/>
+          </a:p>
+        </p:txBody>
+      </p:sp>
+      <p:sp>
+        <p:nvSpPr>
+          <p:cNvPr id="4" name="Slide Number Placeholder 3"/>
+          <p:cNvSpPr>
+            <a:spLocks noGrp="1"/>
+          </p:cNvSpPr>
+          <p:nvPr>
+            <p:ph type="sldNum" sz="quarter" idx="10"/>
+          </p:nvPr>
+        </p:nvSpPr>
+        <p:spPr/>
+        <p:txBody>
+          <a:bodyPr/>
+          <a:lstStyle/>
+          <a:p>
+            <a:fld id="{F7021451-1387-4CA6-816F-3879F97B5CBC}" type="slidenum">
+              <a:rPr lang="en-US"/>
+              <a:t>38</a:t>
+            </a:fld>
+            <a:endParaRPr lang="en-US"/>
+          </a:p>
+        </p:txBody>
+      </p:sp>
+    </p:spTree>
+    <p:extLst>
+      <p:ext uri="{BB962C8B-B14F-4D97-AF65-F5344CB8AC3E}">
+        <p14:creationId xmlns:p14="http://schemas.microsoft.com/office/powerpoint/2010/main" val="1024086991"/>
+      </p:ext>
+    </p:extLst>
+  </p:cSld>
+  <p:clrMapOvr>
+    <a:masterClrMapping/>
+  </p:clrMapOvr>
+</p:notes>
+</file>
+
+<file path=ppt/notesSlides/notesSlide39.xml><?xml version="1.0" encoding="utf-8"?>
+<p:notes xmlns:a="http://schemas.openxmlformats.org/drawingml/2006/main" xmlns:r="http://schemas.openxmlformats.org/officeDocument/2006/relationships" xmlns:p="http://schemas.openxmlformats.org/presentationml/2006/main">
+  <p:cSld>
+    <p:spTree>
+      <p:nvGrpSpPr>
+        <p:cNvPr id="1" name=""/>
+        <p:cNvGrpSpPr/>
+        <p:nvPr/>
+      </p:nvGrpSpPr>
+      <p:grpSpPr>
+        <a:xfrm>
+          <a:off x="0" y="0"/>
+          <a:ext cx="0" cy="0"/>
+          <a:chOff x="0" y="0"/>
+          <a:chExt cx="0" cy="0"/>
+        </a:xfrm>
+      </p:grpSpPr>
+      <p:sp>
+        <p:nvSpPr>
+          <p:cNvPr id="2" name="Slide Image Placeholder 1"/>
+          <p:cNvSpPr>
+            <a:spLocks noGrp="1" noRot="1" noChangeAspect="1"/>
+          </p:cNvSpPr>
+          <p:nvPr>
+            <p:ph type="sldImg"/>
+          </p:nvPr>
+        </p:nvSpPr>
+        <p:spPr/>
+      </p:sp>
+      <p:sp>
+        <p:nvSpPr>
+          <p:cNvPr id="3" name="Notes Placeholder 2"/>
+          <p:cNvSpPr>
+            <a:spLocks noGrp="1"/>
+          </p:cNvSpPr>
+          <p:nvPr>
+            <p:ph type="body" idx="1"/>
+          </p:nvPr>
+        </p:nvSpPr>
+        <p:spPr/>
+        <p:txBody>
+          <a:bodyPr/>
+          <a:lstStyle/>
+          <a:p>
+            <a:r>
+              <a:rPr lang="en-US" dirty="0"/>
+              <a:t/>
+            </a:r>
+            <a:endParaRPr lang="en-US" dirty="0"/>
+          </a:p>
+        </p:txBody>
+      </p:sp>
+      <p:sp>
+        <p:nvSpPr>
+          <p:cNvPr id="4" name="Slide Number Placeholder 3"/>
+          <p:cNvSpPr>
+            <a:spLocks noGrp="1"/>
+          </p:cNvSpPr>
+          <p:nvPr>
+            <p:ph type="sldNum" sz="quarter" idx="10"/>
+          </p:nvPr>
+        </p:nvSpPr>
+        <p:spPr/>
+        <p:txBody>
+          <a:bodyPr/>
+          <a:lstStyle/>
+          <a:p>
+            <a:fld id="{F7021451-1387-4CA6-816F-3879F97B5CBC}" type="slidenum">
+              <a:rPr lang="en-US"/>
+              <a:t>39</a:t>
+            </a:fld>
+            <a:endParaRPr lang="en-US"/>
+          </a:p>
+        </p:txBody>
+      </p:sp>
+    </p:spTree>
+    <p:extLst>
+      <p:ext uri="{BB962C8B-B14F-4D97-AF65-F5344CB8AC3E}">
+        <p14:creationId xmlns:p14="http://schemas.microsoft.com/office/powerpoint/2010/main" val="1024086991"/>
+      </p:ext>
+    </p:extLst>
+  </p:cSld>
+  <p:clrMapOvr>
+    <a:masterClrMapping/>
+  </p:clrMapOvr>
+</p:notes>
+</file>
+
 <file path=ppt/notesSlides/notesSlide4.xml><?xml version="1.0" encoding="utf-8"?>
 <p:notes xmlns:a="http://schemas.openxmlformats.org/drawingml/2006/main" xmlns:r="http://schemas.openxmlformats.org/officeDocument/2006/relationships" xmlns:p="http://schemas.openxmlformats.org/presentationml/2006/main">
   <p:cSld>
@@ -27849,110 +28029,46 @@
                   <a:schemeClr val="tx1"/>
                 </a:solidFill>
               </a:rPr>
-              <a:t>Ruta de expansión</a:t>
+              <a:t>Mapa LATAM: prospectos OEM (maquila de exportación)</a:t>
             </a:r>
             <a:endParaRPr lang="en-US" sz="2600" dirty="0"/>
           </a:p>
         </p:txBody>
       </p:sp>
-      <p:sp>
-        <p:nvSpPr>
-          <p:cNvPr id="3" name="Shape 1"/>
-          <p:cNvSpPr/>
-          <p:nvPr/>
-        </p:nvSpPr>
-        <p:spPr>
-          <a:xfrm>
-            <a:off x="457200" y="1097280"/>
-            <a:ext cx="2606040" cy="2377440"/>
-          </a:xfrm>
-          <a:prstGeom prst="roundRect">
-            <a:avLst>
-              <a:gd name="adj" fmla="val 3077"/>
-            </a:avLst>
-          </a:prstGeom>
-          <a:solidFill>
-            <a:srgbClr val="EEF2F7"/>
-          </a:solidFill>
-          <a:ln w="12700">
-            <a:solidFill>
-              <a:srgbClr val="EEF2F7"/>
-            </a:solidFill>
-            <a:prstDash val="solid"/>
-          </a:ln>
-        </p:spPr>
-      </p:sp>
-      <p:sp>
-        <p:nvSpPr>
-          <p:cNvPr id="4" name="Shape 2"/>
-          <p:cNvSpPr/>
-          <p:nvPr/>
-        </p:nvSpPr>
-        <p:spPr>
-          <a:xfrm>
-            <a:off x="640080" y="1261872"/>
-            <a:ext cx="384048" cy="384048"/>
-          </a:xfrm>
-          <a:prstGeom prst="ellipse">
-            <a:avLst/>
-          </a:prstGeom>
-          <a:solidFill>
-            <a:srgbClr val="0089C2"/>
-          </a:solidFill>
-          <a:ln w="12700">
-            <a:solidFill>
-              <a:srgbClr val="0089C2"/>
-            </a:solidFill>
-            <a:prstDash val="solid"/>
-          </a:ln>
-        </p:spPr>
-      </p:sp>
-      <p:sp>
-        <p:nvSpPr>
-          <p:cNvPr id="5" name="Text 3"/>
+      <p:pic>
+        <p:nvPicPr>
+          <p:cNvPr id="3" name="Image 0" descr="Mapa LATAM: prospectos OEM (maquila de exportación)">    </p:cNvPr>
+          <p:cNvPicPr>
+            <a:picLocks noChangeAspect="1"/>
+          </p:cNvPicPr>
+          <p:nvPr/>
+        </p:nvPicPr>
+        <p:blipFill>
+          <a:blip r:embed="rId1"/>
+          <a:stretch>
+            <a:fillRect/>
+          </a:stretch>
+        </p:blipFill>
+        <p:spPr>
+          <a:xfrm>
+            <a:off x="1252728" y="914400"/>
+            <a:ext cx="6638544" cy="3429000"/>
+          </a:xfrm>
+          <a:prstGeom prst="rect">
+            <a:avLst/>
+          </a:prstGeom>
+        </p:spPr>
+      </p:pic>
+      <p:sp>
+        <p:nvSpPr>
+          <p:cNvPr id="4" name="Text 1"/>
           <p:cNvSpPr txBox="1"/>
           <p:nvPr/>
         </p:nvSpPr>
         <p:spPr>
           <a:xfrm>
-            <a:off x="640080" y="1261872"/>
-            <a:ext cx="384048" cy="384048"/>
-          </a:xfrm>
-          <a:prstGeom prst="rect">
-            <a:avLst/>
-          </a:prstGeom>
-          <a:noFill/>
-          <a:ln/>
-        </p:spPr>
-        <p:txBody>
-          <a:bodyPr wrap="square" lIns="0" tIns="0" rIns="0" bIns="0" rtlCol="0" anchor="ctr"/>
-          <a:lstStyle/>
-          <a:p>
-            <a:pPr algn="ctr" indent="0" marL="0">
-              <a:buNone/>
-            </a:pPr>
-            <a:r>
-              <a:rPr lang="en-US" sz="1300" b="1" dirty="0">
-                <a:solidFill>
-                  <a:srgbClr val="FFFFFF"/>
-                </a:solidFill>
-              </a:rPr>
-              <a:t>1</a:t>
-            </a:r>
-            <a:endParaRPr lang="en-US" sz="1300" dirty="0"/>
-          </a:p>
-        </p:txBody>
-      </p:sp>
-      <p:sp>
-        <p:nvSpPr>
-          <p:cNvPr id="6" name="Text 4"/>
-          <p:cNvSpPr txBox="1"/>
-          <p:nvPr/>
-        </p:nvSpPr>
-        <p:spPr>
-          <a:xfrm>
-            <a:off x="1143000" y="1261872"/>
-            <a:ext cx="1828800" cy="384048"/>
+            <a:off x="457200" y="4480560"/>
+            <a:ext cx="8229600" cy="274320"/>
           </a:xfrm>
           <a:prstGeom prst="rect">
             <a:avLst/>
@@ -27968,541 +28084,14 @@
               <a:buNone/>
             </a:pPr>
             <a:r>
-              <a:rPr lang="en-US" sz="1300" b="1" dirty="0">
+              <a:rPr lang="en-US" sz="1000" i="1" dirty="0">
                 <a:solidFill>
-                  <a:schemeClr val="accent1"/>
+                  <a:schemeClr val="accent5"/>
                 </a:solidFill>
               </a:rPr>
-              <a:t>Ola 1 · años 2–3</a:t>
+              <a:t>Estrella dorada: cuenta 80/20 en México o prioridad A en el resto de LATAM. Lista numerada por cuenta en mapas/ y en el Excel de prospectos.</a:t>
             </a:r>
-            <a:endParaRPr lang="en-US" sz="1300" dirty="0"/>
-          </a:p>
-        </p:txBody>
-      </p:sp>
-      <p:sp>
-        <p:nvSpPr>
-          <p:cNvPr id="7" name="Text 5"/>
-          <p:cNvSpPr txBox="1"/>
-          <p:nvPr/>
-        </p:nvSpPr>
-        <p:spPr>
-          <a:xfrm>
-            <a:off x="640080" y="1783080"/>
-            <a:ext cx="2286000" cy="548640"/>
-          </a:xfrm>
-          <a:prstGeom prst="rect">
-            <a:avLst/>
-          </a:prstGeom>
-          <a:noFill/>
-          <a:ln/>
-        </p:spPr>
-        <p:txBody>
-          <a:bodyPr wrap="square" lIns="0" tIns="0" rIns="0" bIns="0" rtlCol="0" anchor="t"/>
-          <a:lstStyle/>
-          <a:p>
-            <a:pPr indent="0" marL="0">
-              <a:buNone/>
-            </a:pPr>
-            <a:r>
-              <a:rPr lang="en-US" sz="1500" b="1" dirty="0">
-                <a:solidFill>
-                  <a:schemeClr val="tx1"/>
-                </a:solidFill>
-              </a:rPr>
-              <a:t>El Salvador, Honduras, Guatemala</a:t>
-            </a:r>
-            <a:endParaRPr lang="en-US" sz="1500" dirty="0"/>
-          </a:p>
-        </p:txBody>
-      </p:sp>
-      <p:sp>
-        <p:nvSpPr>
-          <p:cNvPr id="8" name="Text 6"/>
-          <p:cNvSpPr txBox="1"/>
-          <p:nvPr/>
-        </p:nvSpPr>
-        <p:spPr>
-          <a:xfrm>
-            <a:off x="640080" y="2377440"/>
-            <a:ext cx="2286000" cy="1005840"/>
-          </a:xfrm>
-          <a:prstGeom prst="rect">
-            <a:avLst/>
-          </a:prstGeom>
-          <a:noFill/>
-          <a:ln/>
-        </p:spPr>
-        <p:txBody>
-          <a:bodyPr wrap="square" lIns="0" tIns="0" rIns="0" bIns="0" rtlCol="0" anchor="t"/>
-          <a:lstStyle/>
-          <a:p>
-            <a:pPr indent="0" marL="0">
-              <a:buNone/>
-            </a:pPr>
-            <a:r>
-              <a:rPr lang="en-US" sz="1200" dirty="0">
-                <a:solidFill>
-                  <a:schemeClr val="tx2"/>
-                </a:solidFill>
-              </a:rPr>
-              <a:t>Maquila con serigrafía para Hanes, Gildan, Tegra; venta desde México</a:t>
-            </a:r>
-            <a:endParaRPr lang="en-US" sz="1200" dirty="0"/>
-          </a:p>
-        </p:txBody>
-      </p:sp>
-      <p:sp>
-        <p:nvSpPr>
-          <p:cNvPr id="9" name="Shape 7"/>
-          <p:cNvSpPr/>
-          <p:nvPr/>
-        </p:nvSpPr>
-        <p:spPr>
-          <a:xfrm>
-            <a:off x="3246120" y="1097280"/>
-            <a:ext cx="2606040" cy="2377440"/>
-          </a:xfrm>
-          <a:prstGeom prst="roundRect">
-            <a:avLst>
-              <a:gd name="adj" fmla="val 3077"/>
-            </a:avLst>
-          </a:prstGeom>
-          <a:solidFill>
-            <a:srgbClr val="EEF2F7"/>
-          </a:solidFill>
-          <a:ln w="12700">
-            <a:solidFill>
-              <a:srgbClr val="EEF2F7"/>
-            </a:solidFill>
-            <a:prstDash val="solid"/>
-          </a:ln>
-        </p:spPr>
-      </p:sp>
-      <p:sp>
-        <p:nvSpPr>
-          <p:cNvPr id="10" name="Shape 8"/>
-          <p:cNvSpPr/>
-          <p:nvPr/>
-        </p:nvSpPr>
-        <p:spPr>
-          <a:xfrm>
-            <a:off x="3429000" y="1261872"/>
-            <a:ext cx="384048" cy="384048"/>
-          </a:xfrm>
-          <a:prstGeom prst="ellipse">
-            <a:avLst/>
-          </a:prstGeom>
-          <a:solidFill>
-            <a:srgbClr val="C2185B"/>
-          </a:solidFill>
-          <a:ln w="12700">
-            <a:solidFill>
-              <a:srgbClr val="C2185B"/>
-            </a:solidFill>
-            <a:prstDash val="solid"/>
-          </a:ln>
-        </p:spPr>
-      </p:sp>
-      <p:sp>
-        <p:nvSpPr>
-          <p:cNvPr id="11" name="Text 9"/>
-          <p:cNvSpPr txBox="1"/>
-          <p:nvPr/>
-        </p:nvSpPr>
-        <p:spPr>
-          <a:xfrm>
-            <a:off x="3429000" y="1261872"/>
-            <a:ext cx="384048" cy="384048"/>
-          </a:xfrm>
-          <a:prstGeom prst="rect">
-            <a:avLst/>
-          </a:prstGeom>
-          <a:noFill/>
-          <a:ln/>
-        </p:spPr>
-        <p:txBody>
-          <a:bodyPr wrap="square" lIns="0" tIns="0" rIns="0" bIns="0" rtlCol="0" anchor="ctr"/>
-          <a:lstStyle/>
-          <a:p>
-            <a:pPr algn="ctr" indent="0" marL="0">
-              <a:buNone/>
-            </a:pPr>
-            <a:r>
-              <a:rPr lang="en-US" sz="1300" b="1" dirty="0">
-                <a:solidFill>
-                  <a:srgbClr val="FFFFFF"/>
-                </a:solidFill>
-              </a:rPr>
-              <a:t>2</a:t>
-            </a:r>
-            <a:endParaRPr lang="en-US" sz="1300" dirty="0"/>
-          </a:p>
-        </p:txBody>
-      </p:sp>
-      <p:sp>
-        <p:nvSpPr>
-          <p:cNvPr id="12" name="Text 10"/>
-          <p:cNvSpPr txBox="1"/>
-          <p:nvPr/>
-        </p:nvSpPr>
-        <p:spPr>
-          <a:xfrm>
-            <a:off x="3931920" y="1261872"/>
-            <a:ext cx="1828800" cy="384048"/>
-          </a:xfrm>
-          <a:prstGeom prst="rect">
-            <a:avLst/>
-          </a:prstGeom>
-          <a:noFill/>
-          <a:ln/>
-        </p:spPr>
-        <p:txBody>
-          <a:bodyPr wrap="square" lIns="0" tIns="0" rIns="0" bIns="0" rtlCol="0" anchor="ctr"/>
-          <a:lstStyle/>
-          <a:p>
-            <a:pPr indent="0" marL="0">
-              <a:buNone/>
-            </a:pPr>
-            <a:r>
-              <a:rPr lang="en-US" sz="1300" b="1" dirty="0">
-                <a:solidFill>
-                  <a:schemeClr val="accent1"/>
-                </a:solidFill>
-              </a:rPr>
-              <a:t>Ola 2 · año 3</a:t>
-            </a:r>
-            <a:endParaRPr lang="en-US" sz="1300" dirty="0"/>
-          </a:p>
-        </p:txBody>
-      </p:sp>
-      <p:sp>
-        <p:nvSpPr>
-          <p:cNvPr id="13" name="Text 11"/>
-          <p:cNvSpPr txBox="1"/>
-          <p:nvPr/>
-        </p:nvSpPr>
-        <p:spPr>
-          <a:xfrm>
-            <a:off x="3429000" y="1783080"/>
-            <a:ext cx="2286000" cy="548640"/>
-          </a:xfrm>
-          <a:prstGeom prst="rect">
-            <a:avLst/>
-          </a:prstGeom>
-          <a:noFill/>
-          <a:ln/>
-        </p:spPr>
-        <p:txBody>
-          <a:bodyPr wrap="square" lIns="0" tIns="0" rIns="0" bIns="0" rtlCol="0" anchor="t"/>
-          <a:lstStyle/>
-          <a:p>
-            <a:pPr indent="0" marL="0">
-              <a:buNone/>
-            </a:pPr>
-            <a:r>
-              <a:rPr lang="en-US" sz="1500" b="1" dirty="0">
-                <a:solidFill>
-                  <a:schemeClr val="tx1"/>
-                </a:solidFill>
-              </a:rPr>
-              <a:t>Perú y Colombia</a:t>
-            </a:r>
-            <a:endParaRPr lang="en-US" sz="1500" dirty="0"/>
-          </a:p>
-        </p:txBody>
-      </p:sp>
-      <p:sp>
-        <p:nvSpPr>
-          <p:cNvPr id="14" name="Text 12"/>
-          <p:cNvSpPr txBox="1"/>
-          <p:nvPr/>
-        </p:nvSpPr>
-        <p:spPr>
-          <a:xfrm>
-            <a:off x="3429000" y="2377440"/>
-            <a:ext cx="2286000" cy="1005840"/>
-          </a:xfrm>
-          <a:prstGeom prst="rect">
-            <a:avLst/>
-          </a:prstGeom>
-          <a:noFill/>
-          <a:ln/>
-        </p:spPr>
-        <p:txBody>
-          <a:bodyPr wrap="square" lIns="0" tIns="0" rIns="0" bIns="0" rtlCol="0" anchor="t"/>
-          <a:lstStyle/>
-          <a:p>
-            <a:pPr indent="0" marL="0">
-              <a:buNone/>
-            </a:pPr>
-            <a:r>
-              <a:rPr lang="en-US" sz="1200" dirty="0">
-                <a:solidFill>
-                  <a:schemeClr val="tx2"/>
-                </a:solidFill>
-              </a:rPr>
-              <a:t>Algodón y punto de exportación; agente local con soporte de TID</a:t>
-            </a:r>
-            <a:endParaRPr lang="en-US" sz="1200" dirty="0"/>
-          </a:p>
-        </p:txBody>
-      </p:sp>
-      <p:sp>
-        <p:nvSpPr>
-          <p:cNvPr id="15" name="Shape 13"/>
-          <p:cNvSpPr/>
-          <p:nvPr/>
-        </p:nvSpPr>
-        <p:spPr>
-          <a:xfrm>
-            <a:off x="6035040" y="1097280"/>
-            <a:ext cx="2606040" cy="2377440"/>
-          </a:xfrm>
-          <a:prstGeom prst="roundRect">
-            <a:avLst>
-              <a:gd name="adj" fmla="val 3077"/>
-            </a:avLst>
-          </a:prstGeom>
-          <a:solidFill>
-            <a:srgbClr val="EEF2F7"/>
-          </a:solidFill>
-          <a:ln w="12700">
-            <a:solidFill>
-              <a:srgbClr val="EEF2F7"/>
-            </a:solidFill>
-            <a:prstDash val="solid"/>
-          </a:ln>
-        </p:spPr>
-      </p:sp>
-      <p:sp>
-        <p:nvSpPr>
-          <p:cNvPr id="16" name="Shape 14"/>
-          <p:cNvSpPr/>
-          <p:nvPr/>
-        </p:nvSpPr>
-        <p:spPr>
-          <a:xfrm>
-            <a:off x="6217920" y="1261872"/>
-            <a:ext cx="384048" cy="384048"/>
-          </a:xfrm>
-          <a:prstGeom prst="ellipse">
-            <a:avLst/>
-          </a:prstGeom>
-          <a:solidFill>
-            <a:srgbClr val="F2B705"/>
-          </a:solidFill>
-          <a:ln w="12700">
-            <a:solidFill>
-              <a:srgbClr val="F2B705"/>
-            </a:solidFill>
-            <a:prstDash val="solid"/>
-          </a:ln>
-        </p:spPr>
-      </p:sp>
-      <p:sp>
-        <p:nvSpPr>
-          <p:cNvPr id="17" name="Text 15"/>
-          <p:cNvSpPr txBox="1"/>
-          <p:nvPr/>
-        </p:nvSpPr>
-        <p:spPr>
-          <a:xfrm>
-            <a:off x="6217920" y="1261872"/>
-            <a:ext cx="384048" cy="384048"/>
-          </a:xfrm>
-          <a:prstGeom prst="rect">
-            <a:avLst/>
-          </a:prstGeom>
-          <a:noFill/>
-          <a:ln/>
-        </p:spPr>
-        <p:txBody>
-          <a:bodyPr wrap="square" lIns="0" tIns="0" rIns="0" bIns="0" rtlCol="0" anchor="ctr"/>
-          <a:lstStyle/>
-          <a:p>
-            <a:pPr algn="ctr" indent="0" marL="0">
-              <a:buNone/>
-            </a:pPr>
-            <a:r>
-              <a:rPr lang="en-US" sz="1300" b="1" dirty="0">
-                <a:solidFill>
-                  <a:srgbClr val="1B1F3B"/>
-                </a:solidFill>
-              </a:rPr>
-              <a:t>3</a:t>
-            </a:r>
-            <a:endParaRPr lang="en-US" sz="1300" dirty="0"/>
-          </a:p>
-        </p:txBody>
-      </p:sp>
-      <p:sp>
-        <p:nvSpPr>
-          <p:cNvPr id="18" name="Text 16"/>
-          <p:cNvSpPr txBox="1"/>
-          <p:nvPr/>
-        </p:nvSpPr>
-        <p:spPr>
-          <a:xfrm>
-            <a:off x="6720840" y="1261872"/>
-            <a:ext cx="1828800" cy="384048"/>
-          </a:xfrm>
-          <a:prstGeom prst="rect">
-            <a:avLst/>
-          </a:prstGeom>
-          <a:noFill/>
-          <a:ln/>
-        </p:spPr>
-        <p:txBody>
-          <a:bodyPr wrap="square" lIns="0" tIns="0" rIns="0" bIns="0" rtlCol="0" anchor="ctr"/>
-          <a:lstStyle/>
-          <a:p>
-            <a:pPr indent="0" marL="0">
-              <a:buNone/>
-            </a:pPr>
-            <a:r>
-              <a:rPr lang="en-US" sz="1300" b="1" dirty="0">
-                <a:solidFill>
-                  <a:schemeClr val="accent1"/>
-                </a:solidFill>
-              </a:rPr>
-              <a:t>Ola 3 · años 3–4</a:t>
-            </a:r>
-            <a:endParaRPr lang="en-US" sz="1300" dirty="0"/>
-          </a:p>
-        </p:txBody>
-      </p:sp>
-      <p:sp>
-        <p:nvSpPr>
-          <p:cNvPr id="19" name="Text 17"/>
-          <p:cNvSpPr txBox="1"/>
-          <p:nvPr/>
-        </p:nvSpPr>
-        <p:spPr>
-          <a:xfrm>
-            <a:off x="6217920" y="1783080"/>
-            <a:ext cx="2286000" cy="548640"/>
-          </a:xfrm>
-          <a:prstGeom prst="rect">
-            <a:avLst/>
-          </a:prstGeom>
-          <a:noFill/>
-          <a:ln/>
-        </p:spPr>
-        <p:txBody>
-          <a:bodyPr wrap="square" lIns="0" tIns="0" rIns="0" bIns="0" rtlCol="0" anchor="t"/>
-          <a:lstStyle/>
-          <a:p>
-            <a:pPr indent="0" marL="0">
-              <a:buNone/>
-            </a:pPr>
-            <a:r>
-              <a:rPr lang="en-US" sz="1500" b="1" dirty="0">
-                <a:solidFill>
-                  <a:schemeClr val="tx1"/>
-                </a:solidFill>
-              </a:rPr>
-              <a:t>Rep. Dominicana, Haití y resto</a:t>
-            </a:r>
-            <a:endParaRPr lang="en-US" sz="1500" dirty="0"/>
-          </a:p>
-        </p:txBody>
-      </p:sp>
-      <p:sp>
-        <p:nvSpPr>
-          <p:cNvPr id="20" name="Text 18"/>
-          <p:cNvSpPr txBox="1"/>
-          <p:nvPr/>
-        </p:nvSpPr>
-        <p:spPr>
-          <a:xfrm>
-            <a:off x="6217920" y="2377440"/>
-            <a:ext cx="2286000" cy="1005840"/>
-          </a:xfrm>
-          <a:prstGeom prst="rect">
-            <a:avLst/>
-          </a:prstGeom>
-          <a:noFill/>
-          <a:ln/>
-        </p:spPr>
-        <p:txBody>
-          <a:bodyPr wrap="square" lIns="0" tIns="0" rIns="0" bIns="0" rtlCol="0" anchor="t"/>
-          <a:lstStyle/>
-          <a:p>
-            <a:pPr indent="0" marL="0">
-              <a:buNone/>
-            </a:pPr>
-            <a:r>
-              <a:rPr lang="en-US" sz="1200" dirty="0">
-                <a:solidFill>
-                  <a:schemeClr val="tx2"/>
-                </a:solidFill>
-              </a:rPr>
-              <a:t>Zonas francas con serigrafía (Gildan, Hansae)</a:t>
-            </a:r>
-            <a:endParaRPr lang="en-US" sz="1200" dirty="0"/>
-          </a:p>
-        </p:txBody>
-      </p:sp>
-      <p:sp>
-        <p:nvSpPr>
-          <p:cNvPr id="21" name="Shape 19"/>
-          <p:cNvSpPr/>
-          <p:nvPr/>
-        </p:nvSpPr>
-        <p:spPr>
-          <a:xfrm>
-            <a:off x="457200" y="3657600"/>
-            <a:ext cx="8229600" cy="731520"/>
-          </a:xfrm>
-          <a:prstGeom prst="roundRect">
-            <a:avLst>
-              <a:gd name="adj" fmla="val 10000"/>
-            </a:avLst>
-          </a:prstGeom>
-          <a:solidFill>
-            <a:srgbClr val="1B1F3B"/>
-          </a:solidFill>
-          <a:ln w="12700">
-            <a:solidFill>
-              <a:srgbClr val="1B1F3B"/>
-            </a:solidFill>
-            <a:prstDash val="solid"/>
-          </a:ln>
-        </p:spPr>
-      </p:sp>
-      <p:sp>
-        <p:nvSpPr>
-          <p:cNvPr id="22" name="Text 20"/>
-          <p:cNvSpPr txBox="1"/>
-          <p:nvPr/>
-        </p:nvSpPr>
-        <p:spPr>
-          <a:xfrm>
-            <a:off x="640080" y="3657600"/>
-            <a:ext cx="7863840" cy="731520"/>
-          </a:xfrm>
-          <a:prstGeom prst="rect">
-            <a:avLst/>
-          </a:prstGeom>
-          <a:noFill/>
-          <a:ln/>
-        </p:spPr>
-        <p:txBody>
-          <a:bodyPr wrap="square" lIns="0" tIns="0" rIns="0" bIns="0" rtlCol="0" anchor="ctr"/>
-          <a:lstStyle/>
-          <a:p>
-            <a:pPr indent="0" marL="0">
-              <a:buNone/>
-            </a:pPr>
-            <a:r>
-              <a:rPr lang="en-US" sz="1300" b="1" dirty="0">
-                <a:solidFill>
-                  <a:srgbClr val="FFFFFF"/>
-                </a:solidFill>
-              </a:rPr>
-              <a:t>EE. UU.: VSP Printing (California) da servicio local y atiende a las matrices de las OEM; CLT ya participa en PRINTING United.</a:t>
-            </a:r>
-            <a:endParaRPr lang="en-US" sz="1300" dirty="0"/>
+            <a:endParaRPr lang="en-US" sz="1000" dirty="0"/>
           </a:p>
         </p:txBody>
       </p:sp>
@@ -28582,13 +28171,15 @@
       <p:sp>
         <p:nvSpPr>
           <p:cNvPr id="2" name="Text 0"/>
-          <p:cNvSpPr txBox="1"/>
-          <p:nvPr/>
-        </p:nvSpPr>
-        <p:spPr>
-          <a:xfrm>
-            <a:off x="548640" y="1097280"/>
-            <a:ext cx="2743200" cy="914400"/>
+          <p:cNvSpPr/>
+          <p:nvPr>
+            <p:ph idx="100" type="title" hasCustomPrompt="1"/>
+          </p:nvPr>
+        </p:nvSpPr>
+        <p:spPr>
+          <a:xfrm>
+            <a:off x="457200" y="274320"/>
+            <a:ext cx="8229600" cy="640080"/>
           </a:xfrm>
           <a:prstGeom prst="rect">
             <a:avLst/>
@@ -28597,36 +28188,58 @@
           <a:ln/>
         </p:spPr>
         <p:txBody>
-          <a:bodyPr wrap="square" lIns="0" tIns="0" rIns="0" bIns="0" rtlCol="0" anchor="ctr"/>
+          <a:bodyPr wrap="square" rtlCol="0" anchor="ctr"/>
           <a:lstStyle/>
           <a:p>
             <a:pPr indent="0" marL="0">
               <a:buNone/>
             </a:pPr>
             <a:r>
-              <a:rPr lang="en-US" sz="6000" b="1" dirty="0">
+              <a:rPr lang="en-US" sz="2600" b="1" dirty="0">
                 <a:solidFill>
-                  <a:schemeClr val="accent3"/>
+                  <a:schemeClr val="tx1"/>
                 </a:solidFill>
               </a:rPr>
-              <a:t>08</a:t>
+              <a:t>Mapa LATAM: estampadores y fabricantes</a:t>
             </a:r>
-            <a:endParaRPr lang="en-US" sz="6000" dirty="0"/>
-          </a:p>
-        </p:txBody>
-      </p:sp>
-      <p:sp>
-        <p:nvSpPr>
-          <p:cNvPr id="3" name="Text 0"/>
-          <p:cNvSpPr/>
-          <p:nvPr>
-            <p:ph idx="100" type="title" hasCustomPrompt="1"/>
-          </p:nvPr>
-        </p:nvSpPr>
-        <p:spPr>
-          <a:xfrm>
-            <a:off x="548640" y="2103120"/>
-            <a:ext cx="8046720" cy="914400"/>
+            <a:endParaRPr lang="en-US" sz="2600" dirty="0"/>
+          </a:p>
+        </p:txBody>
+      </p:sp>
+      <p:pic>
+        <p:nvPicPr>
+          <p:cNvPr id="3" name="Image 0" descr="Mapa LATAM: estampadores y fabricantes">    </p:cNvPr>
+          <p:cNvPicPr>
+            <a:picLocks noChangeAspect="1"/>
+          </p:cNvPicPr>
+          <p:nvPr/>
+        </p:nvPicPr>
+        <p:blipFill>
+          <a:blip r:embed="rId1"/>
+          <a:stretch>
+            <a:fillRect/>
+          </a:stretch>
+        </p:blipFill>
+        <p:spPr>
+          <a:xfrm>
+            <a:off x="1252728" y="914400"/>
+            <a:ext cx="6638544" cy="3429000"/>
+          </a:xfrm>
+          <a:prstGeom prst="rect">
+            <a:avLst/>
+          </a:prstGeom>
+        </p:spPr>
+      </p:pic>
+      <p:sp>
+        <p:nvSpPr>
+          <p:cNvPr id="4" name="Text 1"/>
+          <p:cNvSpPr txBox="1"/>
+          <p:nvPr/>
+        </p:nvSpPr>
+        <p:spPr>
+          <a:xfrm>
+            <a:off x="457200" y="4480560"/>
+            <a:ext cx="8229600" cy="274320"/>
           </a:xfrm>
           <a:prstGeom prst="rect">
             <a:avLst/>
@@ -28635,123 +28248,68 @@
           <a:ln/>
         </p:spPr>
         <p:txBody>
-          <a:bodyPr wrap="square" rtlCol="0"/>
-          <a:lstStyle/>
-          <a:p>
-            <a:pPr algn="l" indent="0" marL="0">
+          <a:bodyPr wrap="square" lIns="0" tIns="0" rIns="0" bIns="0" rtlCol="0" anchor="ctr"/>
+          <a:lstStyle/>
+          <a:p>
+            <a:pPr indent="0" marL="0">
               <a:buNone/>
             </a:pPr>
             <a:r>
-              <a:rPr lang="en-US" sz="3600" b="1" dirty="0">
+              <a:rPr lang="en-US" sz="1000" i="1" dirty="0">
                 <a:solidFill>
-                  <a:schemeClr val="bg1"/>
+                  <a:schemeClr val="accent5"/>
                 </a:solidFill>
               </a:rPr>
-              <a:t>Conclusiones</a:t>
+              <a:t>Estrella dorada: cuenta 80/20 en México o prioridad A en el resto de LATAM. Lista numerada por cuenta en mapas/ y en el Excel de prospectos.</a:t>
             </a:r>
-            <a:endParaRPr lang="en-US" sz="3600" dirty="0"/>
-          </a:p>
-        </p:txBody>
-      </p:sp>
-      <p:sp>
-        <p:nvSpPr>
-          <p:cNvPr id="4" name="cmyk-dot"/>
-          <p:cNvSpPr/>
-          <p:nvPr/>
-        </p:nvSpPr>
-        <p:spPr>
-          <a:xfrm>
-            <a:off x="594360" y="3246120"/>
-            <a:ext cx="164592" cy="164592"/>
-          </a:xfrm>
-          <a:prstGeom prst="ellipse">
-            <a:avLst/>
-          </a:prstGeom>
-          <a:solidFill>
-            <a:srgbClr val="0089C2"/>
-          </a:solidFill>
-          <a:ln w="12700">
-            <a:solidFill>
-              <a:srgbClr val="0089C2"/>
-            </a:solidFill>
-            <a:prstDash val="solid"/>
-          </a:ln>
-        </p:spPr>
-      </p:sp>
-      <p:sp>
-        <p:nvSpPr>
-          <p:cNvPr id="5" name="cmyk-dot"/>
-          <p:cNvSpPr/>
-          <p:nvPr/>
-        </p:nvSpPr>
-        <p:spPr>
-          <a:xfrm>
-            <a:off x="832104" y="3246120"/>
-            <a:ext cx="164592" cy="164592"/>
-          </a:xfrm>
-          <a:prstGeom prst="ellipse">
-            <a:avLst/>
-          </a:prstGeom>
-          <a:solidFill>
-            <a:srgbClr val="C2185B"/>
-          </a:solidFill>
-          <a:ln w="12700">
-            <a:solidFill>
-              <a:srgbClr val="C2185B"/>
-            </a:solidFill>
-            <a:prstDash val="solid"/>
-          </a:ln>
-        </p:spPr>
-      </p:sp>
-      <p:sp>
-        <p:nvSpPr>
-          <p:cNvPr id="6" name="cmyk-dot"/>
-          <p:cNvSpPr/>
-          <p:nvPr/>
-        </p:nvSpPr>
-        <p:spPr>
-          <a:xfrm>
-            <a:off x="1069848" y="3246120"/>
-            <a:ext cx="164592" cy="164592"/>
-          </a:xfrm>
-          <a:prstGeom prst="ellipse">
-            <a:avLst/>
-          </a:prstGeom>
-          <a:solidFill>
-            <a:srgbClr val="F2B705"/>
-          </a:solidFill>
-          <a:ln w="12700">
-            <a:solidFill>
-              <a:srgbClr val="F2B705"/>
-            </a:solidFill>
-            <a:prstDash val="solid"/>
-          </a:ln>
-        </p:spPr>
-      </p:sp>
-      <p:sp>
-        <p:nvSpPr>
-          <p:cNvPr id="7" name="cmyk-dot"/>
-          <p:cNvSpPr/>
-          <p:nvPr/>
-        </p:nvSpPr>
-        <p:spPr>
-          <a:xfrm>
-            <a:off x="1307592" y="3246120"/>
-            <a:ext cx="164592" cy="164592"/>
-          </a:xfrm>
-          <a:prstGeom prst="ellipse">
-            <a:avLst/>
-          </a:prstGeom>
-          <a:solidFill>
-            <a:srgbClr val="FFFFFF"/>
-          </a:solidFill>
-          <a:ln w="12700">
-            <a:solidFill>
-              <a:srgbClr val="FFFFFF"/>
-            </a:solidFill>
-            <a:prstDash val="solid"/>
-          </a:ln>
-        </p:spPr>
+            <a:endParaRPr lang="en-US" sz="1000" dirty="0"/>
+          </a:p>
+        </p:txBody>
+      </p:sp>
+      <p:sp>
+        <p:nvSpPr>
+          <p:cNvPr id="25" name="Slide Number Placeholder 0"/>
+          <p:cNvSpPr>
+            <a:spLocks noGrp="1"/>
+          </p:cNvSpPr>
+          <p:nvPr>
+            <p:ph type="sldNum" sz="quarter" idx="4294967295"/>
+          </p:nvPr>
+        </p:nvSpPr>
+        <p:spPr>
+          <a:xfrm>
+            <a:off x="8229600" y="4800600"/>
+            <a:ext cx="457200" cy="228600"/>
+          </a:xfrm>
+          <a:prstGeom prst="rect">
+            <a:avLst/>
+          </a:prstGeom>
+          <a:extLst>
+            <a:ext uri="{C572A759-6A51-4108-AA02-DFA0A04FC94B}">
+              <ma14:wrappingTextBoxFlag xmlns:ma14="http://schemas.microsoft.com/office/mac/drawingml/2011/main" val="0"/>
+            </a:ext>
+          </a:extLst>
+        </p:spPr>
+        <p:txBody>
+          <a:bodyPr/>
+          <a:lstStyle>
+            <a:lvl1pPr>
+              <a:defRPr sz="900">
+                <a:solidFill>
+                  <a:srgbClr val="7A8299"/>
+                </a:solidFill>
+              </a:defRPr>
+            </a:lvl1pPr>
+          </a:lstStyle>
+          <a:p>
+            <a:pPr algn="r"/>
+            <a:fld id="{F7021451-1387-4CA6-816F-3879F97B5CBC}" type="slidenum">
+              <a:rPr b="0" lang="en-US"/>
+              <a:t>34</a:t>
+            </a:fld>
+            <a:endParaRPr lang="en-US"/>
+          </a:p>
+        </p:txBody>
       </p:sp>
     </p:spTree>
   </p:cSld>
@@ -28813,7 +28371,7 @@
                   <a:schemeClr val="tx1"/>
                 </a:solidFill>
               </a:rPr>
-              <a:t>Conclusiones</a:t>
+              <a:t>Ruta de expansión</a:t>
             </a:r>
             <a:endParaRPr lang="en-US" sz="2600" dirty="0"/>
           </a:p>
@@ -28827,8 +28385,35 @@
         </p:nvSpPr>
         <p:spPr>
           <a:xfrm>
-            <a:off x="457200" y="1069848"/>
-            <a:ext cx="411480" cy="411480"/>
+            <a:off x="457200" y="1097280"/>
+            <a:ext cx="2606040" cy="2377440"/>
+          </a:xfrm>
+          <a:prstGeom prst="roundRect">
+            <a:avLst>
+              <a:gd name="adj" fmla="val 3077"/>
+            </a:avLst>
+          </a:prstGeom>
+          <a:solidFill>
+            <a:srgbClr val="EEF2F7"/>
+          </a:solidFill>
+          <a:ln w="12700">
+            <a:solidFill>
+              <a:srgbClr val="EEF2F7"/>
+            </a:solidFill>
+            <a:prstDash val="solid"/>
+          </a:ln>
+        </p:spPr>
+      </p:sp>
+      <p:sp>
+        <p:nvSpPr>
+          <p:cNvPr id="4" name="Shape 2"/>
+          <p:cNvSpPr/>
+          <p:nvPr/>
+        </p:nvSpPr>
+        <p:spPr>
+          <a:xfrm>
+            <a:off x="640080" y="1261872"/>
+            <a:ext cx="384048" cy="384048"/>
           </a:xfrm>
           <a:prstGeom prst="ellipse">
             <a:avLst/>
@@ -28846,14 +28431,14 @@
       </p:sp>
       <p:sp>
         <p:nvSpPr>
-          <p:cNvPr id="4" name="Text 2"/>
+          <p:cNvPr id="5" name="Text 3"/>
           <p:cNvSpPr txBox="1"/>
           <p:nvPr/>
         </p:nvSpPr>
         <p:spPr>
           <a:xfrm>
-            <a:off x="457200" y="1069848"/>
-            <a:ext cx="411480" cy="411480"/>
+            <a:off x="640080" y="1261872"/>
+            <a:ext cx="384048" cy="384048"/>
           </a:xfrm>
           <a:prstGeom prst="rect">
             <a:avLst/>
@@ -28882,14 +28467,14 @@
       </p:sp>
       <p:sp>
         <p:nvSpPr>
-          <p:cNvPr id="5" name="Text 3"/>
+          <p:cNvPr id="6" name="Text 4"/>
           <p:cNvSpPr txBox="1"/>
           <p:nvPr/>
         </p:nvSpPr>
         <p:spPr>
           <a:xfrm>
-            <a:off x="1051560" y="1005840"/>
-            <a:ext cx="7589520" cy="548640"/>
+            <a:off x="1143000" y="1261872"/>
+            <a:ext cx="1828800" cy="384048"/>
           </a:xfrm>
           <a:prstGeom prst="rect">
             <a:avLst/>
@@ -28905,27 +28490,126 @@
               <a:buNone/>
             </a:pPr>
             <a:r>
-              <a:rPr lang="en-US" sz="1400" dirty="0">
+              <a:rPr lang="en-US" sz="1300" b="1" dirty="0">
+                <a:solidFill>
+                  <a:schemeClr val="accent1"/>
+                </a:solidFill>
+              </a:rPr>
+              <a:t>Ola 1 · años 2–3</a:t>
+            </a:r>
+            <a:endParaRPr lang="en-US" sz="1300" dirty="0"/>
+          </a:p>
+        </p:txBody>
+      </p:sp>
+      <p:sp>
+        <p:nvSpPr>
+          <p:cNvPr id="7" name="Text 5"/>
+          <p:cNvSpPr txBox="1"/>
+          <p:nvPr/>
+        </p:nvSpPr>
+        <p:spPr>
+          <a:xfrm>
+            <a:off x="640080" y="1783080"/>
+            <a:ext cx="2286000" cy="548640"/>
+          </a:xfrm>
+          <a:prstGeom prst="rect">
+            <a:avLst/>
+          </a:prstGeom>
+          <a:noFill/>
+          <a:ln/>
+        </p:spPr>
+        <p:txBody>
+          <a:bodyPr wrap="square" lIns="0" tIns="0" rIns="0" bIns="0" rtlCol="0" anchor="t"/>
+          <a:lstStyle/>
+          <a:p>
+            <a:pPr indent="0" marL="0">
+              <a:buNone/>
+            </a:pPr>
+            <a:r>
+              <a:rPr lang="en-US" sz="1500" b="1" dirty="0">
                 <a:solidFill>
                   <a:schemeClr val="tx1"/>
                 </a:solidFill>
               </a:rPr>
-              <a:t>La industria mexicana necesita diferenciarse frente a la importación: la impresión híbrida responde a esa necesidad.</a:t>
+              <a:t>El Salvador, Honduras, Guatemala</a:t>
             </a:r>
-            <a:endParaRPr lang="en-US" sz="1400" dirty="0"/>
-          </a:p>
-        </p:txBody>
-      </p:sp>
-      <p:sp>
-        <p:nvSpPr>
-          <p:cNvPr id="6" name="Shape 4"/>
+            <a:endParaRPr lang="en-US" sz="1500" dirty="0"/>
+          </a:p>
+        </p:txBody>
+      </p:sp>
+      <p:sp>
+        <p:nvSpPr>
+          <p:cNvPr id="8" name="Text 6"/>
+          <p:cNvSpPr txBox="1"/>
+          <p:nvPr/>
+        </p:nvSpPr>
+        <p:spPr>
+          <a:xfrm>
+            <a:off x="640080" y="2377440"/>
+            <a:ext cx="2286000" cy="1005840"/>
+          </a:xfrm>
+          <a:prstGeom prst="rect">
+            <a:avLst/>
+          </a:prstGeom>
+          <a:noFill/>
+          <a:ln/>
+        </p:spPr>
+        <p:txBody>
+          <a:bodyPr wrap="square" lIns="0" tIns="0" rIns="0" bIns="0" rtlCol="0" anchor="t"/>
+          <a:lstStyle/>
+          <a:p>
+            <a:pPr indent="0" marL="0">
+              <a:buNone/>
+            </a:pPr>
+            <a:r>
+              <a:rPr lang="en-US" sz="1200" dirty="0">
+                <a:solidFill>
+                  <a:schemeClr val="tx2"/>
+                </a:solidFill>
+              </a:rPr>
+              <a:t>Maquila con serigrafía para Hanes, Gildan, Tegra; venta desde México</a:t>
+            </a:r>
+            <a:endParaRPr lang="en-US" sz="1200" dirty="0"/>
+          </a:p>
+        </p:txBody>
+      </p:sp>
+      <p:sp>
+        <p:nvSpPr>
+          <p:cNvPr id="9" name="Shape 7"/>
           <p:cNvSpPr/>
           <p:nvPr/>
         </p:nvSpPr>
         <p:spPr>
           <a:xfrm>
-            <a:off x="457200" y="1755648"/>
-            <a:ext cx="411480" cy="411480"/>
+            <a:off x="3246120" y="1097280"/>
+            <a:ext cx="2606040" cy="2377440"/>
+          </a:xfrm>
+          <a:prstGeom prst="roundRect">
+            <a:avLst>
+              <a:gd name="adj" fmla="val 3077"/>
+            </a:avLst>
+          </a:prstGeom>
+          <a:solidFill>
+            <a:srgbClr val="EEF2F7"/>
+          </a:solidFill>
+          <a:ln w="12700">
+            <a:solidFill>
+              <a:srgbClr val="EEF2F7"/>
+            </a:solidFill>
+            <a:prstDash val="solid"/>
+          </a:ln>
+        </p:spPr>
+      </p:sp>
+      <p:sp>
+        <p:nvSpPr>
+          <p:cNvPr id="10" name="Shape 8"/>
+          <p:cNvSpPr/>
+          <p:nvPr/>
+        </p:nvSpPr>
+        <p:spPr>
+          <a:xfrm>
+            <a:off x="3429000" y="1261872"/>
+            <a:ext cx="384048" cy="384048"/>
           </a:xfrm>
           <a:prstGeom prst="ellipse">
             <a:avLst/>
@@ -28943,14 +28627,14 @@
       </p:sp>
       <p:sp>
         <p:nvSpPr>
-          <p:cNvPr id="7" name="Text 5"/>
+          <p:cNvPr id="11" name="Text 9"/>
           <p:cNvSpPr txBox="1"/>
           <p:nvPr/>
         </p:nvSpPr>
         <p:spPr>
           <a:xfrm>
-            <a:off x="457200" y="1755648"/>
-            <a:ext cx="411480" cy="411480"/>
+            <a:off x="3429000" y="1261872"/>
+            <a:ext cx="384048" cy="384048"/>
           </a:xfrm>
           <a:prstGeom prst="rect">
             <a:avLst/>
@@ -28979,14 +28663,14 @@
       </p:sp>
       <p:sp>
         <p:nvSpPr>
-          <p:cNvPr id="8" name="Text 6"/>
+          <p:cNvPr id="12" name="Text 10"/>
           <p:cNvSpPr txBox="1"/>
           <p:nvPr/>
         </p:nvSpPr>
         <p:spPr>
           <a:xfrm>
-            <a:off x="1051560" y="1691640"/>
-            <a:ext cx="7589520" cy="548640"/>
+            <a:off x="3931920" y="1261872"/>
+            <a:ext cx="1828800" cy="384048"/>
           </a:xfrm>
           <a:prstGeom prst="rect">
             <a:avLst/>
@@ -29002,27 +28686,126 @@
               <a:buNone/>
             </a:pPr>
             <a:r>
-              <a:rPr lang="en-US" sz="1400" dirty="0">
+              <a:rPr lang="en-US" sz="1300" b="1" dirty="0">
+                <a:solidFill>
+                  <a:schemeClr val="accent1"/>
+                </a:solidFill>
+              </a:rPr>
+              <a:t>Ola 2 · año 3</a:t>
+            </a:r>
+            <a:endParaRPr lang="en-US" sz="1300" dirty="0"/>
+          </a:p>
+        </p:txBody>
+      </p:sp>
+      <p:sp>
+        <p:nvSpPr>
+          <p:cNvPr id="13" name="Text 11"/>
+          <p:cNvSpPr txBox="1"/>
+          <p:nvPr/>
+        </p:nvSpPr>
+        <p:spPr>
+          <a:xfrm>
+            <a:off x="3429000" y="1783080"/>
+            <a:ext cx="2286000" cy="548640"/>
+          </a:xfrm>
+          <a:prstGeom prst="rect">
+            <a:avLst/>
+          </a:prstGeom>
+          <a:noFill/>
+          <a:ln/>
+        </p:spPr>
+        <p:txBody>
+          <a:bodyPr wrap="square" lIns="0" tIns="0" rIns="0" bIns="0" rtlCol="0" anchor="t"/>
+          <a:lstStyle/>
+          <a:p>
+            <a:pPr indent="0" marL="0">
+              <a:buNone/>
+            </a:pPr>
+            <a:r>
+              <a:rPr lang="en-US" sz="1500" b="1" dirty="0">
                 <a:solidFill>
                   <a:schemeClr val="tx1"/>
                 </a:solidFill>
               </a:rPr>
-              <a:t>El mercado alcanzable es concentrado (~1,900 empresas): se gana con venta consultiva a pocas cuentas grandes.</a:t>
+              <a:t>Perú y Colombia</a:t>
             </a:r>
-            <a:endParaRPr lang="en-US" sz="1400" dirty="0"/>
-          </a:p>
-        </p:txBody>
-      </p:sp>
-      <p:sp>
-        <p:nvSpPr>
-          <p:cNvPr id="9" name="Shape 7"/>
+            <a:endParaRPr lang="en-US" sz="1500" dirty="0"/>
+          </a:p>
+        </p:txBody>
+      </p:sp>
+      <p:sp>
+        <p:nvSpPr>
+          <p:cNvPr id="14" name="Text 12"/>
+          <p:cNvSpPr txBox="1"/>
+          <p:nvPr/>
+        </p:nvSpPr>
+        <p:spPr>
+          <a:xfrm>
+            <a:off x="3429000" y="2377440"/>
+            <a:ext cx="2286000" cy="1005840"/>
+          </a:xfrm>
+          <a:prstGeom prst="rect">
+            <a:avLst/>
+          </a:prstGeom>
+          <a:noFill/>
+          <a:ln/>
+        </p:spPr>
+        <p:txBody>
+          <a:bodyPr wrap="square" lIns="0" tIns="0" rIns="0" bIns="0" rtlCol="0" anchor="t"/>
+          <a:lstStyle/>
+          <a:p>
+            <a:pPr indent="0" marL="0">
+              <a:buNone/>
+            </a:pPr>
+            <a:r>
+              <a:rPr lang="en-US" sz="1200" dirty="0">
+                <a:solidFill>
+                  <a:schemeClr val="tx2"/>
+                </a:solidFill>
+              </a:rPr>
+              <a:t>Algodón y punto de exportación; agente local con soporte de TID</a:t>
+            </a:r>
+            <a:endParaRPr lang="en-US" sz="1200" dirty="0"/>
+          </a:p>
+        </p:txBody>
+      </p:sp>
+      <p:sp>
+        <p:nvSpPr>
+          <p:cNvPr id="15" name="Shape 13"/>
           <p:cNvSpPr/>
           <p:nvPr/>
         </p:nvSpPr>
         <p:spPr>
           <a:xfrm>
-            <a:off x="457200" y="2441448"/>
-            <a:ext cx="411480" cy="411480"/>
+            <a:off x="6035040" y="1097280"/>
+            <a:ext cx="2606040" cy="2377440"/>
+          </a:xfrm>
+          <a:prstGeom prst="roundRect">
+            <a:avLst>
+              <a:gd name="adj" fmla="val 3077"/>
+            </a:avLst>
+          </a:prstGeom>
+          <a:solidFill>
+            <a:srgbClr val="EEF2F7"/>
+          </a:solidFill>
+          <a:ln w="12700">
+            <a:solidFill>
+              <a:srgbClr val="EEF2F7"/>
+            </a:solidFill>
+            <a:prstDash val="solid"/>
+          </a:ln>
+        </p:spPr>
+      </p:sp>
+      <p:sp>
+        <p:nvSpPr>
+          <p:cNvPr id="16" name="Shape 14"/>
+          <p:cNvSpPr/>
+          <p:nvPr/>
+        </p:nvSpPr>
+        <p:spPr>
+          <a:xfrm>
+            <a:off x="6217920" y="1261872"/>
+            <a:ext cx="384048" cy="384048"/>
           </a:xfrm>
           <a:prstGeom prst="ellipse">
             <a:avLst/>
@@ -29040,14 +28823,14 @@
       </p:sp>
       <p:sp>
         <p:nvSpPr>
-          <p:cNvPr id="10" name="Text 8"/>
+          <p:cNvPr id="17" name="Text 15"/>
           <p:cNvSpPr txBox="1"/>
           <p:nvPr/>
         </p:nvSpPr>
         <p:spPr>
           <a:xfrm>
-            <a:off x="457200" y="2441448"/>
-            <a:ext cx="411480" cy="411480"/>
+            <a:off x="6217920" y="1261872"/>
+            <a:ext cx="384048" cy="384048"/>
           </a:xfrm>
           <a:prstGeom prst="rect">
             <a:avLst/>
@@ -29076,14 +28859,14 @@
       </p:sp>
       <p:sp>
         <p:nvSpPr>
-          <p:cNvPr id="11" name="Text 9"/>
+          <p:cNvPr id="18" name="Text 16"/>
           <p:cNvSpPr txBox="1"/>
           <p:nvPr/>
         </p:nvSpPr>
         <p:spPr>
           <a:xfrm>
-            <a:off x="1051560" y="2377440"/>
-            <a:ext cx="7589520" cy="548640"/>
+            <a:off x="6720840" y="1261872"/>
+            <a:ext cx="1828800" cy="384048"/>
           </a:xfrm>
           <a:prstGeom prst="rect">
             <a:avLst/>
@@ -29099,30 +28882,104 @@
               <a:buNone/>
             </a:pPr>
             <a:r>
-              <a:rPr lang="en-US" sz="1400" dirty="0">
+              <a:rPr lang="en-US" sz="1300" b="1" dirty="0">
+                <a:solidFill>
+                  <a:schemeClr val="accent1"/>
+                </a:solidFill>
+              </a:rPr>
+              <a:t>Ola 3 · años 3–4</a:t>
+            </a:r>
+            <a:endParaRPr lang="en-US" sz="1300" dirty="0"/>
+          </a:p>
+        </p:txBody>
+      </p:sp>
+      <p:sp>
+        <p:nvSpPr>
+          <p:cNvPr id="19" name="Text 17"/>
+          <p:cNvSpPr txBox="1"/>
+          <p:nvPr/>
+        </p:nvSpPr>
+        <p:spPr>
+          <a:xfrm>
+            <a:off x="6217920" y="1783080"/>
+            <a:ext cx="2286000" cy="548640"/>
+          </a:xfrm>
+          <a:prstGeom prst="rect">
+            <a:avLst/>
+          </a:prstGeom>
+          <a:noFill/>
+          <a:ln/>
+        </p:spPr>
+        <p:txBody>
+          <a:bodyPr wrap="square" lIns="0" tIns="0" rIns="0" bIns="0" rtlCol="0" anchor="t"/>
+          <a:lstStyle/>
+          <a:p>
+            <a:pPr indent="0" marL="0">
+              <a:buNone/>
+            </a:pPr>
+            <a:r>
+              <a:rPr lang="en-US" sz="1500" b="1" dirty="0">
                 <a:solidFill>
                   <a:schemeClr val="tx1"/>
                 </a:solidFill>
               </a:rPr>
-              <a:t>Nadie es dueño de la categoría: no hay distribuidor formal de híbridos chinos ni oferta llave en mano con servicio local.</a:t>
+              <a:t>Rep. Dominicana, Haití y resto</a:t>
             </a:r>
-            <a:endParaRPr lang="en-US" sz="1400" dirty="0"/>
-          </a:p>
-        </p:txBody>
-      </p:sp>
-      <p:sp>
-        <p:nvSpPr>
-          <p:cNvPr id="12" name="Shape 10"/>
+            <a:endParaRPr lang="en-US" sz="1500" dirty="0"/>
+          </a:p>
+        </p:txBody>
+      </p:sp>
+      <p:sp>
+        <p:nvSpPr>
+          <p:cNvPr id="20" name="Text 18"/>
+          <p:cNvSpPr txBox="1"/>
+          <p:nvPr/>
+        </p:nvSpPr>
+        <p:spPr>
+          <a:xfrm>
+            <a:off x="6217920" y="2377440"/>
+            <a:ext cx="2286000" cy="1005840"/>
+          </a:xfrm>
+          <a:prstGeom prst="rect">
+            <a:avLst/>
+          </a:prstGeom>
+          <a:noFill/>
+          <a:ln/>
+        </p:spPr>
+        <p:txBody>
+          <a:bodyPr wrap="square" lIns="0" tIns="0" rIns="0" bIns="0" rtlCol="0" anchor="t"/>
+          <a:lstStyle/>
+          <a:p>
+            <a:pPr indent="0" marL="0">
+              <a:buNone/>
+            </a:pPr>
+            <a:r>
+              <a:rPr lang="en-US" sz="1200" dirty="0">
+                <a:solidFill>
+                  <a:schemeClr val="tx2"/>
+                </a:solidFill>
+              </a:rPr>
+              <a:t>Zonas francas con serigrafía (Gildan, Hansae)</a:t>
+            </a:r>
+            <a:endParaRPr lang="en-US" sz="1200" dirty="0"/>
+          </a:p>
+        </p:txBody>
+      </p:sp>
+      <p:sp>
+        <p:nvSpPr>
+          <p:cNvPr id="21" name="Shape 19"/>
           <p:cNvSpPr/>
           <p:nvPr/>
         </p:nvSpPr>
         <p:spPr>
           <a:xfrm>
-            <a:off x="457200" y="3127248"/>
-            <a:ext cx="411480" cy="411480"/>
-          </a:xfrm>
-          <a:prstGeom prst="ellipse">
-            <a:avLst/>
+            <a:off x="457200" y="3657600"/>
+            <a:ext cx="8229600" cy="731520"/>
+          </a:xfrm>
+          <a:prstGeom prst="roundRect">
+            <a:avLst>
+              <a:gd name="adj" fmla="val 10000"/>
+            </a:avLst>
           </a:prstGeom>
           <a:solidFill>
             <a:srgbClr val="1B1F3B"/>
@@ -29137,14 +28994,14 @@
       </p:sp>
       <p:sp>
         <p:nvSpPr>
-          <p:cNvPr id="13" name="Text 11"/>
+          <p:cNvPr id="22" name="Text 20"/>
           <p:cNvSpPr txBox="1"/>
           <p:nvPr/>
         </p:nvSpPr>
         <p:spPr>
           <a:xfrm>
-            <a:off x="457200" y="3127248"/>
-            <a:ext cx="411480" cy="411480"/>
+            <a:off x="640080" y="3657600"/>
+            <a:ext cx="7863840" cy="731520"/>
           </a:xfrm>
           <a:prstGeom prst="rect">
             <a:avLst/>
@@ -29156,7 +29013,7 @@
           <a:bodyPr wrap="square" lIns="0" tIns="0" rIns="0" bIns="0" rtlCol="0" anchor="ctr"/>
           <a:lstStyle/>
           <a:p>
-            <a:pPr algn="ctr" indent="0" marL="0">
+            <a:pPr indent="0" marL="0">
               <a:buNone/>
             </a:pPr>
             <a:r>
@@ -29165,142 +29022,9 @@
                   <a:srgbClr val="FFFFFF"/>
                 </a:solidFill>
               </a:rPr>
-              <a:t>4</a:t>
+              <a:t>EE. UU.: VSP Printing (California) da servicio local y atiende a las matrices de las OEM; CLT ya participa en PRINTING United.</a:t>
             </a:r>
             <a:endParaRPr lang="en-US" sz="1300" dirty="0"/>
-          </a:p>
-        </p:txBody>
-      </p:sp>
-      <p:sp>
-        <p:nvSpPr>
-          <p:cNvPr id="14" name="Text 12"/>
-          <p:cNvSpPr txBox="1"/>
-          <p:nvPr/>
-        </p:nvSpPr>
-        <p:spPr>
-          <a:xfrm>
-            <a:off x="1051560" y="3063240"/>
-            <a:ext cx="7589520" cy="548640"/>
-          </a:xfrm>
-          <a:prstGeom prst="rect">
-            <a:avLst/>
-          </a:prstGeom>
-          <a:noFill/>
-          <a:ln/>
-        </p:spPr>
-        <p:txBody>
-          <a:bodyPr wrap="square" lIns="0" tIns="0" rIns="0" bIns="0" rtlCol="0" anchor="ctr"/>
-          <a:lstStyle/>
-          <a:p>
-            <a:pPr indent="0" marL="0">
-              <a:buNone/>
-            </a:pPr>
-            <a:r>
-              <a:rPr lang="en-US" sz="1400" dirty="0">
-                <a:solidFill>
-                  <a:schemeClr val="tx1"/>
-                </a:solidFill>
-              </a:rPr>
-              <a:t>La competencia en tintas es premium (Avient, Matsui) o barata (ScreenTec, marcas nacionales): CLT compite con paquete y servicio.</a:t>
-            </a:r>
-            <a:endParaRPr lang="en-US" sz="1400" dirty="0"/>
-          </a:p>
-        </p:txBody>
-      </p:sp>
-      <p:sp>
-        <p:nvSpPr>
-          <p:cNvPr id="15" name="Shape 13"/>
-          <p:cNvSpPr/>
-          <p:nvPr/>
-        </p:nvSpPr>
-        <p:spPr>
-          <a:xfrm>
-            <a:off x="457200" y="3813048"/>
-            <a:ext cx="411480" cy="411480"/>
-          </a:xfrm>
-          <a:prstGeom prst="ellipse">
-            <a:avLst/>
-          </a:prstGeom>
-          <a:solidFill>
-            <a:srgbClr val="0089C2"/>
-          </a:solidFill>
-          <a:ln w="12700">
-            <a:solidFill>
-              <a:srgbClr val="0089C2"/>
-            </a:solidFill>
-            <a:prstDash val="solid"/>
-          </a:ln>
-        </p:spPr>
-      </p:sp>
-      <p:sp>
-        <p:nvSpPr>
-          <p:cNvPr id="16" name="Text 14"/>
-          <p:cNvSpPr txBox="1"/>
-          <p:nvPr/>
-        </p:nvSpPr>
-        <p:spPr>
-          <a:xfrm>
-            <a:off x="457200" y="3813048"/>
-            <a:ext cx="411480" cy="411480"/>
-          </a:xfrm>
-          <a:prstGeom prst="rect">
-            <a:avLst/>
-          </a:prstGeom>
-          <a:noFill/>
-          <a:ln/>
-        </p:spPr>
-        <p:txBody>
-          <a:bodyPr wrap="square" lIns="0" tIns="0" rIns="0" bIns="0" rtlCol="0" anchor="ctr"/>
-          <a:lstStyle/>
-          <a:p>
-            <a:pPr algn="ctr" indent="0" marL="0">
-              <a:buNone/>
-            </a:pPr>
-            <a:r>
-              <a:rPr lang="en-US" sz="1300" b="1" dirty="0">
-                <a:solidFill>
-                  <a:srgbClr val="FFFFFF"/>
-                </a:solidFill>
-              </a:rPr>
-              <a:t>5</a:t>
-            </a:r>
-            <a:endParaRPr lang="en-US" sz="1300" dirty="0"/>
-          </a:p>
-        </p:txBody>
-      </p:sp>
-      <p:sp>
-        <p:nvSpPr>
-          <p:cNvPr id="17" name="Text 15"/>
-          <p:cNvSpPr txBox="1"/>
-          <p:nvPr/>
-        </p:nvSpPr>
-        <p:spPr>
-          <a:xfrm>
-            <a:off x="1051560" y="3749040"/>
-            <a:ext cx="7589520" cy="548640"/>
-          </a:xfrm>
-          <a:prstGeom prst="rect">
-            <a:avLst/>
-          </a:prstGeom>
-          <a:noFill/>
-          <a:ln/>
-        </p:spPr>
-        <p:txBody>
-          <a:bodyPr wrap="square" lIns="0" tIns="0" rIns="0" bIns="0" rtlCol="0" anchor="ctr"/>
-          <a:lstStyle/>
-          <a:p>
-            <a:pPr indent="0" marL="0">
-              <a:buNone/>
-            </a:pPr>
-            <a:r>
-              <a:rPr lang="en-US" sz="1400" dirty="0">
-                <a:solidFill>
-                  <a:schemeClr val="tx1"/>
-                </a:solidFill>
-              </a:rPr>
-              <a:t>Los aranceles 2026 y el T-MEC favorecen producir en México; Centroamérica y Perú son la siguiente ola.</a:t>
-            </a:r>
-            <a:endParaRPr lang="en-US" sz="1400" dirty="0"/>
           </a:p>
         </p:txBody>
       </p:sp>
@@ -29380,6 +29104,42 @@
       <p:sp>
         <p:nvSpPr>
           <p:cNvPr id="2" name="Text 0"/>
+          <p:cNvSpPr txBox="1"/>
+          <p:nvPr/>
+        </p:nvSpPr>
+        <p:spPr>
+          <a:xfrm>
+            <a:off x="548640" y="1097280"/>
+            <a:ext cx="2743200" cy="914400"/>
+          </a:xfrm>
+          <a:prstGeom prst="rect">
+            <a:avLst/>
+          </a:prstGeom>
+          <a:noFill/>
+          <a:ln/>
+        </p:spPr>
+        <p:txBody>
+          <a:bodyPr wrap="square" lIns="0" tIns="0" rIns="0" bIns="0" rtlCol="0" anchor="ctr"/>
+          <a:lstStyle/>
+          <a:p>
+            <a:pPr indent="0" marL="0">
+              <a:buNone/>
+            </a:pPr>
+            <a:r>
+              <a:rPr lang="en-US" sz="6000" b="1" dirty="0">
+                <a:solidFill>
+                  <a:schemeClr val="accent3"/>
+                </a:solidFill>
+              </a:rPr>
+              <a:t>08</a:t>
+            </a:r>
+            <a:endParaRPr lang="en-US" sz="6000" dirty="0"/>
+          </a:p>
+        </p:txBody>
+      </p:sp>
+      <p:sp>
+        <p:nvSpPr>
+          <p:cNvPr id="3" name="Text 0"/>
           <p:cNvSpPr/>
           <p:nvPr>
             <p:ph idx="100" type="title" hasCustomPrompt="1"/>
@@ -29387,8 +29147,8 @@
         </p:nvSpPr>
         <p:spPr>
           <a:xfrm>
-            <a:off x="457200" y="274320"/>
-            <a:ext cx="8229600" cy="640080"/>
+            <a:off x="548640" y="2103120"/>
+            <a:ext cx="8046720" cy="914400"/>
           </a:xfrm>
           <a:prstGeom prst="rect">
             <a:avLst/>
@@ -29397,34 +29157,34 @@
           <a:ln/>
         </p:spPr>
         <p:txBody>
-          <a:bodyPr wrap="square" rtlCol="0" anchor="ctr"/>
-          <a:lstStyle/>
-          <a:p>
-            <a:pPr indent="0" marL="0">
+          <a:bodyPr wrap="square" rtlCol="0"/>
+          <a:lstStyle/>
+          <a:p>
+            <a:pPr algn="l" indent="0" marL="0">
               <a:buNone/>
             </a:pPr>
             <a:r>
-              <a:rPr lang="en-US" sz="2600" b="1" dirty="0">
+              <a:rPr lang="en-US" sz="3600" b="1" dirty="0">
                 <a:solidFill>
-                  <a:schemeClr val="tx1"/>
+                  <a:schemeClr val="bg1"/>
                 </a:solidFill>
               </a:rPr>
-              <a:t>Recomendaciones y próximos pasos</a:t>
+              <a:t>Conclusiones</a:t>
             </a:r>
-            <a:endParaRPr lang="en-US" sz="2600" dirty="0"/>
-          </a:p>
-        </p:txBody>
-      </p:sp>
-      <p:sp>
-        <p:nvSpPr>
-          <p:cNvPr id="3" name="Shape 1"/>
+            <a:endParaRPr lang="en-US" sz="3600" dirty="0"/>
+          </a:p>
+        </p:txBody>
+      </p:sp>
+      <p:sp>
+        <p:nvSpPr>
+          <p:cNvPr id="4" name="cmyk-dot"/>
           <p:cNvSpPr/>
           <p:nvPr/>
         </p:nvSpPr>
         <p:spPr>
           <a:xfrm>
-            <a:off x="457200" y="1097280"/>
-            <a:ext cx="411480" cy="411480"/>
+            <a:off x="594360" y="3246120"/>
+            <a:ext cx="164592" cy="164592"/>
           </a:xfrm>
           <a:prstGeom prst="ellipse">
             <a:avLst/>
@@ -29442,86 +29202,14 @@
       </p:sp>
       <p:sp>
         <p:nvSpPr>
-          <p:cNvPr id="4" name="Text 2"/>
-          <p:cNvSpPr txBox="1"/>
-          <p:nvPr/>
-        </p:nvSpPr>
-        <p:spPr>
-          <a:xfrm>
-            <a:off x="457200" y="1097280"/>
-            <a:ext cx="411480" cy="411480"/>
-          </a:xfrm>
-          <a:prstGeom prst="rect">
-            <a:avLst/>
-          </a:prstGeom>
-          <a:noFill/>
-          <a:ln/>
-        </p:spPr>
-        <p:txBody>
-          <a:bodyPr wrap="square" lIns="0" tIns="0" rIns="0" bIns="0" rtlCol="0" anchor="ctr"/>
-          <a:lstStyle/>
-          <a:p>
-            <a:pPr algn="ctr" indent="0" marL="0">
-              <a:buNone/>
-            </a:pPr>
-            <a:r>
-              <a:rPr lang="en-US" sz="1300" b="1" dirty="0">
-                <a:solidFill>
-                  <a:srgbClr val="FFFFFF"/>
-                </a:solidFill>
-              </a:rPr>
-              <a:t>1</a:t>
-            </a:r>
-            <a:endParaRPr lang="en-US" sz="1300" dirty="0"/>
-          </a:p>
-        </p:txBody>
-      </p:sp>
-      <p:sp>
-        <p:nvSpPr>
-          <p:cNvPr id="5" name="Text 3"/>
-          <p:cNvSpPr txBox="1"/>
-          <p:nvPr/>
-        </p:nvSpPr>
-        <p:spPr>
-          <a:xfrm>
-            <a:off x="1051560" y="1051560"/>
-            <a:ext cx="7589520" cy="502920"/>
-          </a:xfrm>
-          <a:prstGeom prst="rect">
-            <a:avLst/>
-          </a:prstGeom>
-          <a:noFill/>
-          <a:ln/>
-        </p:spPr>
-        <p:txBody>
-          <a:bodyPr wrap="square" lIns="0" tIns="0" rIns="0" bIns="0" rtlCol="0" anchor="ctr"/>
-          <a:lstStyle/>
-          <a:p>
-            <a:pPr indent="0" marL="0">
-              <a:buNone/>
-            </a:pPr>
-            <a:r>
-              <a:rPr lang="en-US" sz="1500" dirty="0">
-                <a:solidFill>
-                  <a:schemeClr val="tx1"/>
-                </a:solidFill>
-              </a:rPr>
-              <a:t>Cotización formal de CLT para sustituir estimaciones</a:t>
-            </a:r>
-            <a:endParaRPr lang="en-US" sz="1500" dirty="0"/>
-          </a:p>
-        </p:txBody>
-      </p:sp>
-      <p:sp>
-        <p:nvSpPr>
-          <p:cNvPr id="6" name="Shape 4"/>
+          <p:cNvPr id="5" name="cmyk-dot"/>
           <p:cNvSpPr/>
           <p:nvPr/>
         </p:nvSpPr>
         <p:spPr>
           <a:xfrm>
-            <a:off x="457200" y="1737360"/>
-            <a:ext cx="411480" cy="411480"/>
+            <a:off x="832104" y="3246120"/>
+            <a:ext cx="164592" cy="164592"/>
           </a:xfrm>
           <a:prstGeom prst="ellipse">
             <a:avLst/>
@@ -29539,86 +29227,14 @@
       </p:sp>
       <p:sp>
         <p:nvSpPr>
-          <p:cNvPr id="7" name="Text 5"/>
-          <p:cNvSpPr txBox="1"/>
-          <p:nvPr/>
-        </p:nvSpPr>
-        <p:spPr>
-          <a:xfrm>
-            <a:off x="457200" y="1737360"/>
-            <a:ext cx="411480" cy="411480"/>
-          </a:xfrm>
-          <a:prstGeom prst="rect">
-            <a:avLst/>
-          </a:prstGeom>
-          <a:noFill/>
-          <a:ln/>
-        </p:spPr>
-        <p:txBody>
-          <a:bodyPr wrap="square" lIns="0" tIns="0" rIns="0" bIns="0" rtlCol="0" anchor="ctr"/>
-          <a:lstStyle/>
-          <a:p>
-            <a:pPr algn="ctr" indent="0" marL="0">
-              <a:buNone/>
-            </a:pPr>
-            <a:r>
-              <a:rPr lang="en-US" sz="1300" b="1" dirty="0">
-                <a:solidFill>
-                  <a:srgbClr val="FFFFFF"/>
-                </a:solidFill>
-              </a:rPr>
-              <a:t>2</a:t>
-            </a:r>
-            <a:endParaRPr lang="en-US" sz="1300" dirty="0"/>
-          </a:p>
-        </p:txBody>
-      </p:sp>
-      <p:sp>
-        <p:nvSpPr>
-          <p:cNvPr id="8" name="Text 6"/>
-          <p:cNvSpPr txBox="1"/>
-          <p:nvPr/>
-        </p:nvSpPr>
-        <p:spPr>
-          <a:xfrm>
-            <a:off x="1051560" y="1691640"/>
-            <a:ext cx="7589520" cy="502920"/>
-          </a:xfrm>
-          <a:prstGeom prst="rect">
-            <a:avLst/>
-          </a:prstGeom>
-          <a:noFill/>
-          <a:ln/>
-        </p:spPr>
-        <p:txBody>
-          <a:bodyPr wrap="square" lIns="0" tIns="0" rIns="0" bIns="0" rtlCol="0" anchor="ctr"/>
-          <a:lstStyle/>
-          <a:p>
-            <a:pPr indent="0" marL="0">
-              <a:buNone/>
-            </a:pPr>
-            <a:r>
-              <a:rPr lang="en-US" sz="1500" dirty="0">
-                <a:solidFill>
-                  <a:schemeClr val="tx1"/>
-                </a:solidFill>
-              </a:rPr>
-              <a:t>Validar consumos y precios con 10–15 talleres</a:t>
-            </a:r>
-            <a:endParaRPr lang="en-US" sz="1500" dirty="0"/>
-          </a:p>
-        </p:txBody>
-      </p:sp>
-      <p:sp>
-        <p:nvSpPr>
-          <p:cNvPr id="9" name="Shape 7"/>
+          <p:cNvPr id="6" name="cmyk-dot"/>
           <p:cNvSpPr/>
           <p:nvPr/>
         </p:nvSpPr>
         <p:spPr>
           <a:xfrm>
-            <a:off x="457200" y="2377440"/>
-            <a:ext cx="411480" cy="411480"/>
+            <a:off x="1069848" y="3246120"/>
+            <a:ext cx="164592" cy="164592"/>
           </a:xfrm>
           <a:prstGeom prst="ellipse">
             <a:avLst/>
@@ -29636,314 +29252,28 @@
       </p:sp>
       <p:sp>
         <p:nvSpPr>
-          <p:cNvPr id="10" name="Text 8"/>
-          <p:cNvSpPr txBox="1"/>
-          <p:nvPr/>
-        </p:nvSpPr>
-        <p:spPr>
-          <a:xfrm>
-            <a:off x="457200" y="2377440"/>
-            <a:ext cx="411480" cy="411480"/>
-          </a:xfrm>
-          <a:prstGeom prst="rect">
-            <a:avLst/>
-          </a:prstGeom>
-          <a:noFill/>
-          <a:ln/>
-        </p:spPr>
-        <p:txBody>
-          <a:bodyPr wrap="square" lIns="0" tIns="0" rIns="0" bIns="0" rtlCol="0" anchor="ctr"/>
-          <a:lstStyle/>
-          <a:p>
-            <a:pPr algn="ctr" indent="0" marL="0">
-              <a:buNone/>
-            </a:pPr>
-            <a:r>
-              <a:rPr lang="en-US" sz="1300" b="1" dirty="0">
-                <a:solidFill>
-                  <a:srgbClr val="1B1F3B"/>
-                </a:solidFill>
-              </a:rPr>
-              <a:t>3</a:t>
-            </a:r>
-            <a:endParaRPr lang="en-US" sz="1300" dirty="0"/>
-          </a:p>
-        </p:txBody>
-      </p:sp>
-      <p:sp>
-        <p:nvSpPr>
-          <p:cNvPr id="11" name="Text 9"/>
-          <p:cNvSpPr txBox="1"/>
-          <p:nvPr/>
-        </p:nvSpPr>
-        <p:spPr>
-          <a:xfrm>
-            <a:off x="1051560" y="2331720"/>
-            <a:ext cx="7589520" cy="502920"/>
-          </a:xfrm>
-          <a:prstGeom prst="rect">
-            <a:avLst/>
-          </a:prstGeom>
-          <a:noFill/>
-          <a:ln/>
-        </p:spPr>
-        <p:txBody>
-          <a:bodyPr wrap="square" lIns="0" tIns="0" rIns="0" bIns="0" rtlCol="0" anchor="ctr"/>
-          <a:lstStyle/>
-          <a:p>
-            <a:pPr indent="0" marL="0">
-              <a:buNone/>
-            </a:pPr>
-            <a:r>
-              <a:rPr lang="en-US" sz="1500" dirty="0">
-                <a:solidFill>
-                  <a:schemeClr val="tx1"/>
-                </a:solidFill>
-              </a:rPr>
-              <a:t>Abrir la sala demo y trabajar las 17 cuentas 80/20</a:t>
-            </a:r>
-            <a:endParaRPr lang="en-US" sz="1500" dirty="0"/>
-          </a:p>
-        </p:txBody>
-      </p:sp>
-      <p:sp>
-        <p:nvSpPr>
-          <p:cNvPr id="12" name="Shape 10"/>
+          <p:cNvPr id="7" name="cmyk-dot"/>
           <p:cNvSpPr/>
           <p:nvPr/>
         </p:nvSpPr>
         <p:spPr>
           <a:xfrm>
-            <a:off x="457200" y="3017520"/>
-            <a:ext cx="411480" cy="411480"/>
+            <a:off x="1307592" y="3246120"/>
+            <a:ext cx="164592" cy="164592"/>
           </a:xfrm>
           <a:prstGeom prst="ellipse">
             <a:avLst/>
           </a:prstGeom>
           <a:solidFill>
-            <a:srgbClr val="1B1F3B"/>
+            <a:srgbClr val="FFFFFF"/>
           </a:solidFill>
           <a:ln w="12700">
             <a:solidFill>
-              <a:srgbClr val="1B1F3B"/>
+              <a:srgbClr val="FFFFFF"/>
             </a:solidFill>
             <a:prstDash val="solid"/>
           </a:ln>
         </p:spPr>
-      </p:sp>
-      <p:sp>
-        <p:nvSpPr>
-          <p:cNvPr id="13" name="Text 11"/>
-          <p:cNvSpPr txBox="1"/>
-          <p:nvPr/>
-        </p:nvSpPr>
-        <p:spPr>
-          <a:xfrm>
-            <a:off x="457200" y="3017520"/>
-            <a:ext cx="411480" cy="411480"/>
-          </a:xfrm>
-          <a:prstGeom prst="rect">
-            <a:avLst/>
-          </a:prstGeom>
-          <a:noFill/>
-          <a:ln/>
-        </p:spPr>
-        <p:txBody>
-          <a:bodyPr wrap="square" lIns="0" tIns="0" rIns="0" bIns="0" rtlCol="0" anchor="ctr"/>
-          <a:lstStyle/>
-          <a:p>
-            <a:pPr algn="ctr" indent="0" marL="0">
-              <a:buNone/>
-            </a:pPr>
-            <a:r>
-              <a:rPr lang="en-US" sz="1300" b="1" dirty="0">
-                <a:solidFill>
-                  <a:srgbClr val="FFFFFF"/>
-                </a:solidFill>
-              </a:rPr>
-              <a:t>4</a:t>
-            </a:r>
-            <a:endParaRPr lang="en-US" sz="1300" dirty="0"/>
-          </a:p>
-        </p:txBody>
-      </p:sp>
-      <p:sp>
-        <p:nvSpPr>
-          <p:cNvPr id="14" name="Text 12"/>
-          <p:cNvSpPr txBox="1"/>
-          <p:nvPr/>
-        </p:nvSpPr>
-        <p:spPr>
-          <a:xfrm>
-            <a:off x="1051560" y="2971800"/>
-            <a:ext cx="7589520" cy="502920"/>
-          </a:xfrm>
-          <a:prstGeom prst="rect">
-            <a:avLst/>
-          </a:prstGeom>
-          <a:noFill/>
-          <a:ln/>
-        </p:spPr>
-        <p:txBody>
-          <a:bodyPr wrap="square" lIns="0" tIns="0" rIns="0" bIns="0" rtlCol="0" anchor="ctr"/>
-          <a:lstStyle/>
-          <a:p>
-            <a:pPr indent="0" marL="0">
-              <a:buNone/>
-            </a:pPr>
-            <a:r>
-              <a:rPr lang="en-US" sz="1500" dirty="0">
-                <a:solidFill>
-                  <a:schemeClr val="tx1"/>
-                </a:solidFill>
-              </a:rPr>
-              <a:t>Confirmar aranceles y fracciones con agente aduanal</a:t>
-            </a:r>
-            <a:endParaRPr lang="en-US" sz="1500" dirty="0"/>
-          </a:p>
-        </p:txBody>
-      </p:sp>
-      <p:sp>
-        <p:nvSpPr>
-          <p:cNvPr id="15" name="Shape 13"/>
-          <p:cNvSpPr/>
-          <p:nvPr/>
-        </p:nvSpPr>
-        <p:spPr>
-          <a:xfrm>
-            <a:off x="457200" y="3657600"/>
-            <a:ext cx="411480" cy="411480"/>
-          </a:xfrm>
-          <a:prstGeom prst="ellipse">
-            <a:avLst/>
-          </a:prstGeom>
-          <a:solidFill>
-            <a:srgbClr val="0089C2"/>
-          </a:solidFill>
-          <a:ln w="12700">
-            <a:solidFill>
-              <a:srgbClr val="0089C2"/>
-            </a:solidFill>
-            <a:prstDash val="solid"/>
-          </a:ln>
-        </p:spPr>
-      </p:sp>
-      <p:sp>
-        <p:nvSpPr>
-          <p:cNvPr id="16" name="Text 14"/>
-          <p:cNvSpPr txBox="1"/>
-          <p:nvPr/>
-        </p:nvSpPr>
-        <p:spPr>
-          <a:xfrm>
-            <a:off x="457200" y="3657600"/>
-            <a:ext cx="411480" cy="411480"/>
-          </a:xfrm>
-          <a:prstGeom prst="rect">
-            <a:avLst/>
-          </a:prstGeom>
-          <a:noFill/>
-          <a:ln/>
-        </p:spPr>
-        <p:txBody>
-          <a:bodyPr wrap="square" lIns="0" tIns="0" rIns="0" bIns="0" rtlCol="0" anchor="ctr"/>
-          <a:lstStyle/>
-          <a:p>
-            <a:pPr algn="ctr" indent="0" marL="0">
-              <a:buNone/>
-            </a:pPr>
-            <a:r>
-              <a:rPr lang="en-US" sz="1300" b="1" dirty="0">
-                <a:solidFill>
-                  <a:srgbClr val="FFFFFF"/>
-                </a:solidFill>
-              </a:rPr>
-              <a:t>5</a:t>
-            </a:r>
-            <a:endParaRPr lang="en-US" sz="1300" dirty="0"/>
-          </a:p>
-        </p:txBody>
-      </p:sp>
-      <p:sp>
-        <p:nvSpPr>
-          <p:cNvPr id="17" name="Text 15"/>
-          <p:cNvSpPr txBox="1"/>
-          <p:nvPr/>
-        </p:nvSpPr>
-        <p:spPr>
-          <a:xfrm>
-            <a:off x="1051560" y="3611880"/>
-            <a:ext cx="7589520" cy="502920"/>
-          </a:xfrm>
-          <a:prstGeom prst="rect">
-            <a:avLst/>
-          </a:prstGeom>
-          <a:noFill/>
-          <a:ln/>
-        </p:spPr>
-        <p:txBody>
-          <a:bodyPr wrap="square" lIns="0" tIns="0" rIns="0" bIns="0" rtlCol="0" anchor="ctr"/>
-          <a:lstStyle/>
-          <a:p>
-            <a:pPr indent="0" marL="0">
-              <a:buNone/>
-            </a:pPr>
-            <a:r>
-              <a:rPr lang="en-US" sz="1500" dirty="0">
-                <a:solidFill>
-                  <a:schemeClr val="tx1"/>
-                </a:solidFill>
-              </a:rPr>
-              <a:t>Preparar la entrada a Centroamérica (año 2)</a:t>
-            </a:r>
-            <a:endParaRPr lang="en-US" sz="1500" dirty="0"/>
-          </a:p>
-        </p:txBody>
-      </p:sp>
-      <p:sp>
-        <p:nvSpPr>
-          <p:cNvPr id="25" name="Slide Number Placeholder 0"/>
-          <p:cNvSpPr>
-            <a:spLocks noGrp="1"/>
-          </p:cNvSpPr>
-          <p:nvPr>
-            <p:ph type="sldNum" sz="quarter" idx="4294967295"/>
-          </p:nvPr>
-        </p:nvSpPr>
-        <p:spPr>
-          <a:xfrm>
-            <a:off x="8229600" y="4800600"/>
-            <a:ext cx="457200" cy="228600"/>
-          </a:xfrm>
-          <a:prstGeom prst="rect">
-            <a:avLst/>
-          </a:prstGeom>
-          <a:extLst>
-            <a:ext uri="{C572A759-6A51-4108-AA02-DFA0A04FC94B}">
-              <ma14:wrappingTextBoxFlag xmlns:ma14="http://schemas.microsoft.com/office/mac/drawingml/2011/main" val="0"/>
-            </a:ext>
-          </a:extLst>
-        </p:spPr>
-        <p:txBody>
-          <a:bodyPr/>
-          <a:lstStyle>
-            <a:lvl1pPr>
-              <a:defRPr sz="900">
-                <a:solidFill>
-                  <a:srgbClr val="7A8299"/>
-                </a:solidFill>
-              </a:defRPr>
-            </a:lvl1pPr>
-          </a:lstStyle>
-          <a:p>
-            <a:pPr algn="r"/>
-            <a:fld id="{F7021451-1387-4CA6-816F-3879F97B5CBC}" type="slidenum">
-              <a:rPr b="0" lang="en-US"/>
-              <a:t>36</a:t>
-            </a:fld>
-            <a:endParaRPr lang="en-US"/>
-          </a:p>
-        </p:txBody>
       </p:sp>
     </p:spTree>
   </p:cSld>
@@ -29959,6 +29289,1198 @@
 <file path=ppt/slides/slide37.xml><?xml version="1.0" encoding="utf-8"?>
 <p:sld xmlns:a="http://schemas.openxmlformats.org/drawingml/2006/main" xmlns:r="http://schemas.openxmlformats.org/officeDocument/2006/relationships" xmlns:p="http://schemas.openxmlformats.org/presentationml/2006/main">
   <p:cSld name="Slide 37">
+    <p:spTree>
+      <p:nvGrpSpPr>
+        <p:cNvPr id="1" name=""/>
+        <p:cNvGrpSpPr/>
+        <p:nvPr/>
+      </p:nvGrpSpPr>
+      <p:grpSpPr>
+        <a:xfrm>
+          <a:off x="0" y="0"/>
+          <a:ext cx="0" cy="0"/>
+          <a:chOff x="0" y="0"/>
+          <a:chExt cx="0" cy="0"/>
+        </a:xfrm>
+      </p:grpSpPr>
+      <p:sp>
+        <p:nvSpPr>
+          <p:cNvPr id="2" name="Text 0"/>
+          <p:cNvSpPr/>
+          <p:nvPr>
+            <p:ph idx="100" type="title" hasCustomPrompt="1"/>
+          </p:nvPr>
+        </p:nvSpPr>
+        <p:spPr>
+          <a:xfrm>
+            <a:off x="457200" y="274320"/>
+            <a:ext cx="8229600" cy="640080"/>
+          </a:xfrm>
+          <a:prstGeom prst="rect">
+            <a:avLst/>
+          </a:prstGeom>
+          <a:noFill/>
+          <a:ln/>
+        </p:spPr>
+        <p:txBody>
+          <a:bodyPr wrap="square" rtlCol="0" anchor="ctr"/>
+          <a:lstStyle/>
+          <a:p>
+            <a:pPr indent="0" marL="0">
+              <a:buNone/>
+            </a:pPr>
+            <a:r>
+              <a:rPr lang="en-US" sz="2600" b="1" dirty="0">
+                <a:solidFill>
+                  <a:schemeClr val="tx1"/>
+                </a:solidFill>
+              </a:rPr>
+              <a:t>Conclusiones</a:t>
+            </a:r>
+            <a:endParaRPr lang="en-US" sz="2600" dirty="0"/>
+          </a:p>
+        </p:txBody>
+      </p:sp>
+      <p:sp>
+        <p:nvSpPr>
+          <p:cNvPr id="3" name="Shape 1"/>
+          <p:cNvSpPr/>
+          <p:nvPr/>
+        </p:nvSpPr>
+        <p:spPr>
+          <a:xfrm>
+            <a:off x="457200" y="1069848"/>
+            <a:ext cx="411480" cy="411480"/>
+          </a:xfrm>
+          <a:prstGeom prst="ellipse">
+            <a:avLst/>
+          </a:prstGeom>
+          <a:solidFill>
+            <a:srgbClr val="0089C2"/>
+          </a:solidFill>
+          <a:ln w="12700">
+            <a:solidFill>
+              <a:srgbClr val="0089C2"/>
+            </a:solidFill>
+            <a:prstDash val="solid"/>
+          </a:ln>
+        </p:spPr>
+      </p:sp>
+      <p:sp>
+        <p:nvSpPr>
+          <p:cNvPr id="4" name="Text 2"/>
+          <p:cNvSpPr txBox="1"/>
+          <p:nvPr/>
+        </p:nvSpPr>
+        <p:spPr>
+          <a:xfrm>
+            <a:off x="457200" y="1069848"/>
+            <a:ext cx="411480" cy="411480"/>
+          </a:xfrm>
+          <a:prstGeom prst="rect">
+            <a:avLst/>
+          </a:prstGeom>
+          <a:noFill/>
+          <a:ln/>
+        </p:spPr>
+        <p:txBody>
+          <a:bodyPr wrap="square" lIns="0" tIns="0" rIns="0" bIns="0" rtlCol="0" anchor="ctr"/>
+          <a:lstStyle/>
+          <a:p>
+            <a:pPr algn="ctr" indent="0" marL="0">
+              <a:buNone/>
+            </a:pPr>
+            <a:r>
+              <a:rPr lang="en-US" sz="1300" b="1" dirty="0">
+                <a:solidFill>
+                  <a:srgbClr val="FFFFFF"/>
+                </a:solidFill>
+              </a:rPr>
+              <a:t>1</a:t>
+            </a:r>
+            <a:endParaRPr lang="en-US" sz="1300" dirty="0"/>
+          </a:p>
+        </p:txBody>
+      </p:sp>
+      <p:sp>
+        <p:nvSpPr>
+          <p:cNvPr id="5" name="Text 3"/>
+          <p:cNvSpPr txBox="1"/>
+          <p:nvPr/>
+        </p:nvSpPr>
+        <p:spPr>
+          <a:xfrm>
+            <a:off x="1051560" y="1005840"/>
+            <a:ext cx="7589520" cy="548640"/>
+          </a:xfrm>
+          <a:prstGeom prst="rect">
+            <a:avLst/>
+          </a:prstGeom>
+          <a:noFill/>
+          <a:ln/>
+        </p:spPr>
+        <p:txBody>
+          <a:bodyPr wrap="square" lIns="0" tIns="0" rIns="0" bIns="0" rtlCol="0" anchor="ctr"/>
+          <a:lstStyle/>
+          <a:p>
+            <a:pPr indent="0" marL="0">
+              <a:buNone/>
+            </a:pPr>
+            <a:r>
+              <a:rPr lang="en-US" sz="1400" dirty="0">
+                <a:solidFill>
+                  <a:schemeClr val="tx1"/>
+                </a:solidFill>
+              </a:rPr>
+              <a:t>La industria mexicana necesita diferenciarse frente a la importación: la impresión híbrida responde a esa necesidad.</a:t>
+            </a:r>
+            <a:endParaRPr lang="en-US" sz="1400" dirty="0"/>
+          </a:p>
+        </p:txBody>
+      </p:sp>
+      <p:sp>
+        <p:nvSpPr>
+          <p:cNvPr id="6" name="Shape 4"/>
+          <p:cNvSpPr/>
+          <p:nvPr/>
+        </p:nvSpPr>
+        <p:spPr>
+          <a:xfrm>
+            <a:off x="457200" y="1755648"/>
+            <a:ext cx="411480" cy="411480"/>
+          </a:xfrm>
+          <a:prstGeom prst="ellipse">
+            <a:avLst/>
+          </a:prstGeom>
+          <a:solidFill>
+            <a:srgbClr val="C2185B"/>
+          </a:solidFill>
+          <a:ln w="12700">
+            <a:solidFill>
+              <a:srgbClr val="C2185B"/>
+            </a:solidFill>
+            <a:prstDash val="solid"/>
+          </a:ln>
+        </p:spPr>
+      </p:sp>
+      <p:sp>
+        <p:nvSpPr>
+          <p:cNvPr id="7" name="Text 5"/>
+          <p:cNvSpPr txBox="1"/>
+          <p:nvPr/>
+        </p:nvSpPr>
+        <p:spPr>
+          <a:xfrm>
+            <a:off x="457200" y="1755648"/>
+            <a:ext cx="411480" cy="411480"/>
+          </a:xfrm>
+          <a:prstGeom prst="rect">
+            <a:avLst/>
+          </a:prstGeom>
+          <a:noFill/>
+          <a:ln/>
+        </p:spPr>
+        <p:txBody>
+          <a:bodyPr wrap="square" lIns="0" tIns="0" rIns="0" bIns="0" rtlCol="0" anchor="ctr"/>
+          <a:lstStyle/>
+          <a:p>
+            <a:pPr algn="ctr" indent="0" marL="0">
+              <a:buNone/>
+            </a:pPr>
+            <a:r>
+              <a:rPr lang="en-US" sz="1300" b="1" dirty="0">
+                <a:solidFill>
+                  <a:srgbClr val="FFFFFF"/>
+                </a:solidFill>
+              </a:rPr>
+              <a:t>2</a:t>
+            </a:r>
+            <a:endParaRPr lang="en-US" sz="1300" dirty="0"/>
+          </a:p>
+        </p:txBody>
+      </p:sp>
+      <p:sp>
+        <p:nvSpPr>
+          <p:cNvPr id="8" name="Text 6"/>
+          <p:cNvSpPr txBox="1"/>
+          <p:nvPr/>
+        </p:nvSpPr>
+        <p:spPr>
+          <a:xfrm>
+            <a:off x="1051560" y="1691640"/>
+            <a:ext cx="7589520" cy="548640"/>
+          </a:xfrm>
+          <a:prstGeom prst="rect">
+            <a:avLst/>
+          </a:prstGeom>
+          <a:noFill/>
+          <a:ln/>
+        </p:spPr>
+        <p:txBody>
+          <a:bodyPr wrap="square" lIns="0" tIns="0" rIns="0" bIns="0" rtlCol="0" anchor="ctr"/>
+          <a:lstStyle/>
+          <a:p>
+            <a:pPr indent="0" marL="0">
+              <a:buNone/>
+            </a:pPr>
+            <a:r>
+              <a:rPr lang="en-US" sz="1400" dirty="0">
+                <a:solidFill>
+                  <a:schemeClr val="tx1"/>
+                </a:solidFill>
+              </a:rPr>
+              <a:t>El mercado alcanzable es concentrado (~1,900 empresas): se gana con venta consultiva a pocas cuentas grandes.</a:t>
+            </a:r>
+            <a:endParaRPr lang="en-US" sz="1400" dirty="0"/>
+          </a:p>
+        </p:txBody>
+      </p:sp>
+      <p:sp>
+        <p:nvSpPr>
+          <p:cNvPr id="9" name="Shape 7"/>
+          <p:cNvSpPr/>
+          <p:nvPr/>
+        </p:nvSpPr>
+        <p:spPr>
+          <a:xfrm>
+            <a:off x="457200" y="2441448"/>
+            <a:ext cx="411480" cy="411480"/>
+          </a:xfrm>
+          <a:prstGeom prst="ellipse">
+            <a:avLst/>
+          </a:prstGeom>
+          <a:solidFill>
+            <a:srgbClr val="F2B705"/>
+          </a:solidFill>
+          <a:ln w="12700">
+            <a:solidFill>
+              <a:srgbClr val="F2B705"/>
+            </a:solidFill>
+            <a:prstDash val="solid"/>
+          </a:ln>
+        </p:spPr>
+      </p:sp>
+      <p:sp>
+        <p:nvSpPr>
+          <p:cNvPr id="10" name="Text 8"/>
+          <p:cNvSpPr txBox="1"/>
+          <p:nvPr/>
+        </p:nvSpPr>
+        <p:spPr>
+          <a:xfrm>
+            <a:off x="457200" y="2441448"/>
+            <a:ext cx="411480" cy="411480"/>
+          </a:xfrm>
+          <a:prstGeom prst="rect">
+            <a:avLst/>
+          </a:prstGeom>
+          <a:noFill/>
+          <a:ln/>
+        </p:spPr>
+        <p:txBody>
+          <a:bodyPr wrap="square" lIns="0" tIns="0" rIns="0" bIns="0" rtlCol="0" anchor="ctr"/>
+          <a:lstStyle/>
+          <a:p>
+            <a:pPr algn="ctr" indent="0" marL="0">
+              <a:buNone/>
+            </a:pPr>
+            <a:r>
+              <a:rPr lang="en-US" sz="1300" b="1" dirty="0">
+                <a:solidFill>
+                  <a:srgbClr val="1B1F3B"/>
+                </a:solidFill>
+              </a:rPr>
+              <a:t>3</a:t>
+            </a:r>
+            <a:endParaRPr lang="en-US" sz="1300" dirty="0"/>
+          </a:p>
+        </p:txBody>
+      </p:sp>
+      <p:sp>
+        <p:nvSpPr>
+          <p:cNvPr id="11" name="Text 9"/>
+          <p:cNvSpPr txBox="1"/>
+          <p:nvPr/>
+        </p:nvSpPr>
+        <p:spPr>
+          <a:xfrm>
+            <a:off x="1051560" y="2377440"/>
+            <a:ext cx="7589520" cy="548640"/>
+          </a:xfrm>
+          <a:prstGeom prst="rect">
+            <a:avLst/>
+          </a:prstGeom>
+          <a:noFill/>
+          <a:ln/>
+        </p:spPr>
+        <p:txBody>
+          <a:bodyPr wrap="square" lIns="0" tIns="0" rIns="0" bIns="0" rtlCol="0" anchor="ctr"/>
+          <a:lstStyle/>
+          <a:p>
+            <a:pPr indent="0" marL="0">
+              <a:buNone/>
+            </a:pPr>
+            <a:r>
+              <a:rPr lang="en-US" sz="1400" dirty="0">
+                <a:solidFill>
+                  <a:schemeClr val="tx1"/>
+                </a:solidFill>
+              </a:rPr>
+              <a:t>Nadie es dueño de la categoría: no hay distribuidor formal de híbridos chinos ni oferta llave en mano con servicio local.</a:t>
+            </a:r>
+            <a:endParaRPr lang="en-US" sz="1400" dirty="0"/>
+          </a:p>
+        </p:txBody>
+      </p:sp>
+      <p:sp>
+        <p:nvSpPr>
+          <p:cNvPr id="12" name="Shape 10"/>
+          <p:cNvSpPr/>
+          <p:nvPr/>
+        </p:nvSpPr>
+        <p:spPr>
+          <a:xfrm>
+            <a:off x="457200" y="3127248"/>
+            <a:ext cx="411480" cy="411480"/>
+          </a:xfrm>
+          <a:prstGeom prst="ellipse">
+            <a:avLst/>
+          </a:prstGeom>
+          <a:solidFill>
+            <a:srgbClr val="1B1F3B"/>
+          </a:solidFill>
+          <a:ln w="12700">
+            <a:solidFill>
+              <a:srgbClr val="1B1F3B"/>
+            </a:solidFill>
+            <a:prstDash val="solid"/>
+          </a:ln>
+        </p:spPr>
+      </p:sp>
+      <p:sp>
+        <p:nvSpPr>
+          <p:cNvPr id="13" name="Text 11"/>
+          <p:cNvSpPr txBox="1"/>
+          <p:nvPr/>
+        </p:nvSpPr>
+        <p:spPr>
+          <a:xfrm>
+            <a:off x="457200" y="3127248"/>
+            <a:ext cx="411480" cy="411480"/>
+          </a:xfrm>
+          <a:prstGeom prst="rect">
+            <a:avLst/>
+          </a:prstGeom>
+          <a:noFill/>
+          <a:ln/>
+        </p:spPr>
+        <p:txBody>
+          <a:bodyPr wrap="square" lIns="0" tIns="0" rIns="0" bIns="0" rtlCol="0" anchor="ctr"/>
+          <a:lstStyle/>
+          <a:p>
+            <a:pPr algn="ctr" indent="0" marL="0">
+              <a:buNone/>
+            </a:pPr>
+            <a:r>
+              <a:rPr lang="en-US" sz="1300" b="1" dirty="0">
+                <a:solidFill>
+                  <a:srgbClr val="FFFFFF"/>
+                </a:solidFill>
+              </a:rPr>
+              <a:t>4</a:t>
+            </a:r>
+            <a:endParaRPr lang="en-US" sz="1300" dirty="0"/>
+          </a:p>
+        </p:txBody>
+      </p:sp>
+      <p:sp>
+        <p:nvSpPr>
+          <p:cNvPr id="14" name="Text 12"/>
+          <p:cNvSpPr txBox="1"/>
+          <p:nvPr/>
+        </p:nvSpPr>
+        <p:spPr>
+          <a:xfrm>
+            <a:off x="1051560" y="3063240"/>
+            <a:ext cx="7589520" cy="548640"/>
+          </a:xfrm>
+          <a:prstGeom prst="rect">
+            <a:avLst/>
+          </a:prstGeom>
+          <a:noFill/>
+          <a:ln/>
+        </p:spPr>
+        <p:txBody>
+          <a:bodyPr wrap="square" lIns="0" tIns="0" rIns="0" bIns="0" rtlCol="0" anchor="ctr"/>
+          <a:lstStyle/>
+          <a:p>
+            <a:pPr indent="0" marL="0">
+              <a:buNone/>
+            </a:pPr>
+            <a:r>
+              <a:rPr lang="en-US" sz="1400" dirty="0">
+                <a:solidFill>
+                  <a:schemeClr val="tx1"/>
+                </a:solidFill>
+              </a:rPr>
+              <a:t>La competencia en tintas es premium (Avient, Matsui) o barata (ScreenTec, marcas nacionales): CLT compite con paquete y servicio.</a:t>
+            </a:r>
+            <a:endParaRPr lang="en-US" sz="1400" dirty="0"/>
+          </a:p>
+        </p:txBody>
+      </p:sp>
+      <p:sp>
+        <p:nvSpPr>
+          <p:cNvPr id="15" name="Shape 13"/>
+          <p:cNvSpPr/>
+          <p:nvPr/>
+        </p:nvSpPr>
+        <p:spPr>
+          <a:xfrm>
+            <a:off x="457200" y="3813048"/>
+            <a:ext cx="411480" cy="411480"/>
+          </a:xfrm>
+          <a:prstGeom prst="ellipse">
+            <a:avLst/>
+          </a:prstGeom>
+          <a:solidFill>
+            <a:srgbClr val="0089C2"/>
+          </a:solidFill>
+          <a:ln w="12700">
+            <a:solidFill>
+              <a:srgbClr val="0089C2"/>
+            </a:solidFill>
+            <a:prstDash val="solid"/>
+          </a:ln>
+        </p:spPr>
+      </p:sp>
+      <p:sp>
+        <p:nvSpPr>
+          <p:cNvPr id="16" name="Text 14"/>
+          <p:cNvSpPr txBox="1"/>
+          <p:nvPr/>
+        </p:nvSpPr>
+        <p:spPr>
+          <a:xfrm>
+            <a:off x="457200" y="3813048"/>
+            <a:ext cx="411480" cy="411480"/>
+          </a:xfrm>
+          <a:prstGeom prst="rect">
+            <a:avLst/>
+          </a:prstGeom>
+          <a:noFill/>
+          <a:ln/>
+        </p:spPr>
+        <p:txBody>
+          <a:bodyPr wrap="square" lIns="0" tIns="0" rIns="0" bIns="0" rtlCol="0" anchor="ctr"/>
+          <a:lstStyle/>
+          <a:p>
+            <a:pPr algn="ctr" indent="0" marL="0">
+              <a:buNone/>
+            </a:pPr>
+            <a:r>
+              <a:rPr lang="en-US" sz="1300" b="1" dirty="0">
+                <a:solidFill>
+                  <a:srgbClr val="FFFFFF"/>
+                </a:solidFill>
+              </a:rPr>
+              <a:t>5</a:t>
+            </a:r>
+            <a:endParaRPr lang="en-US" sz="1300" dirty="0"/>
+          </a:p>
+        </p:txBody>
+      </p:sp>
+      <p:sp>
+        <p:nvSpPr>
+          <p:cNvPr id="17" name="Text 15"/>
+          <p:cNvSpPr txBox="1"/>
+          <p:nvPr/>
+        </p:nvSpPr>
+        <p:spPr>
+          <a:xfrm>
+            <a:off x="1051560" y="3749040"/>
+            <a:ext cx="7589520" cy="548640"/>
+          </a:xfrm>
+          <a:prstGeom prst="rect">
+            <a:avLst/>
+          </a:prstGeom>
+          <a:noFill/>
+          <a:ln/>
+        </p:spPr>
+        <p:txBody>
+          <a:bodyPr wrap="square" lIns="0" tIns="0" rIns="0" bIns="0" rtlCol="0" anchor="ctr"/>
+          <a:lstStyle/>
+          <a:p>
+            <a:pPr indent="0" marL="0">
+              <a:buNone/>
+            </a:pPr>
+            <a:r>
+              <a:rPr lang="en-US" sz="1400" dirty="0">
+                <a:solidFill>
+                  <a:schemeClr val="tx1"/>
+                </a:solidFill>
+              </a:rPr>
+              <a:t>Los aranceles 2026 y el T-MEC favorecen producir en México; Centroamérica y Perú son la siguiente ola.</a:t>
+            </a:r>
+            <a:endParaRPr lang="en-US" sz="1400" dirty="0"/>
+          </a:p>
+        </p:txBody>
+      </p:sp>
+      <p:sp>
+        <p:nvSpPr>
+          <p:cNvPr id="25" name="Slide Number Placeholder 0"/>
+          <p:cNvSpPr>
+            <a:spLocks noGrp="1"/>
+          </p:cNvSpPr>
+          <p:nvPr>
+            <p:ph type="sldNum" sz="quarter" idx="4294967295"/>
+          </p:nvPr>
+        </p:nvSpPr>
+        <p:spPr>
+          <a:xfrm>
+            <a:off x="8229600" y="4800600"/>
+            <a:ext cx="457200" cy="228600"/>
+          </a:xfrm>
+          <a:prstGeom prst="rect">
+            <a:avLst/>
+          </a:prstGeom>
+          <a:extLst>
+            <a:ext uri="{C572A759-6A51-4108-AA02-DFA0A04FC94B}">
+              <ma14:wrappingTextBoxFlag xmlns:ma14="http://schemas.microsoft.com/office/mac/drawingml/2011/main" val="0"/>
+            </a:ext>
+          </a:extLst>
+        </p:spPr>
+        <p:txBody>
+          <a:bodyPr/>
+          <a:lstStyle>
+            <a:lvl1pPr>
+              <a:defRPr sz="900">
+                <a:solidFill>
+                  <a:srgbClr val="7A8299"/>
+                </a:solidFill>
+              </a:defRPr>
+            </a:lvl1pPr>
+          </a:lstStyle>
+          <a:p>
+            <a:pPr algn="r"/>
+            <a:fld id="{F7021451-1387-4CA6-816F-3879F97B5CBC}" type="slidenum">
+              <a:rPr b="0" lang="en-US"/>
+              <a:t>37</a:t>
+            </a:fld>
+            <a:endParaRPr lang="en-US"/>
+          </a:p>
+        </p:txBody>
+      </p:sp>
+    </p:spTree>
+  </p:cSld>
+  <p:clrMapOvr>
+    <a:masterClrMapping/>
+  </p:clrMapOvr>
+  <p:transition spd="med">
+    <p:fade/>
+  </p:transition>
+</p:sld>
+</file>
+
+<file path=ppt/slides/slide38.xml><?xml version="1.0" encoding="utf-8"?>
+<p:sld xmlns:a="http://schemas.openxmlformats.org/drawingml/2006/main" xmlns:r="http://schemas.openxmlformats.org/officeDocument/2006/relationships" xmlns:p="http://schemas.openxmlformats.org/presentationml/2006/main">
+  <p:cSld name="Slide 38">
+    <p:spTree>
+      <p:nvGrpSpPr>
+        <p:cNvPr id="1" name=""/>
+        <p:cNvGrpSpPr/>
+        <p:nvPr/>
+      </p:nvGrpSpPr>
+      <p:grpSpPr>
+        <a:xfrm>
+          <a:off x="0" y="0"/>
+          <a:ext cx="0" cy="0"/>
+          <a:chOff x="0" y="0"/>
+          <a:chExt cx="0" cy="0"/>
+        </a:xfrm>
+      </p:grpSpPr>
+      <p:sp>
+        <p:nvSpPr>
+          <p:cNvPr id="2" name="Text 0"/>
+          <p:cNvSpPr/>
+          <p:nvPr>
+            <p:ph idx="100" type="title" hasCustomPrompt="1"/>
+          </p:nvPr>
+        </p:nvSpPr>
+        <p:spPr>
+          <a:xfrm>
+            <a:off x="457200" y="274320"/>
+            <a:ext cx="8229600" cy="640080"/>
+          </a:xfrm>
+          <a:prstGeom prst="rect">
+            <a:avLst/>
+          </a:prstGeom>
+          <a:noFill/>
+          <a:ln/>
+        </p:spPr>
+        <p:txBody>
+          <a:bodyPr wrap="square" rtlCol="0" anchor="ctr"/>
+          <a:lstStyle/>
+          <a:p>
+            <a:pPr indent="0" marL="0">
+              <a:buNone/>
+            </a:pPr>
+            <a:r>
+              <a:rPr lang="en-US" sz="2600" b="1" dirty="0">
+                <a:solidFill>
+                  <a:schemeClr val="tx1"/>
+                </a:solidFill>
+              </a:rPr>
+              <a:t>Recomendaciones y próximos pasos</a:t>
+            </a:r>
+            <a:endParaRPr lang="en-US" sz="2600" dirty="0"/>
+          </a:p>
+        </p:txBody>
+      </p:sp>
+      <p:sp>
+        <p:nvSpPr>
+          <p:cNvPr id="3" name="Shape 1"/>
+          <p:cNvSpPr/>
+          <p:nvPr/>
+        </p:nvSpPr>
+        <p:spPr>
+          <a:xfrm>
+            <a:off x="457200" y="1097280"/>
+            <a:ext cx="411480" cy="411480"/>
+          </a:xfrm>
+          <a:prstGeom prst="ellipse">
+            <a:avLst/>
+          </a:prstGeom>
+          <a:solidFill>
+            <a:srgbClr val="0089C2"/>
+          </a:solidFill>
+          <a:ln w="12700">
+            <a:solidFill>
+              <a:srgbClr val="0089C2"/>
+            </a:solidFill>
+            <a:prstDash val="solid"/>
+          </a:ln>
+        </p:spPr>
+      </p:sp>
+      <p:sp>
+        <p:nvSpPr>
+          <p:cNvPr id="4" name="Text 2"/>
+          <p:cNvSpPr txBox="1"/>
+          <p:nvPr/>
+        </p:nvSpPr>
+        <p:spPr>
+          <a:xfrm>
+            <a:off x="457200" y="1097280"/>
+            <a:ext cx="411480" cy="411480"/>
+          </a:xfrm>
+          <a:prstGeom prst="rect">
+            <a:avLst/>
+          </a:prstGeom>
+          <a:noFill/>
+          <a:ln/>
+        </p:spPr>
+        <p:txBody>
+          <a:bodyPr wrap="square" lIns="0" tIns="0" rIns="0" bIns="0" rtlCol="0" anchor="ctr"/>
+          <a:lstStyle/>
+          <a:p>
+            <a:pPr algn="ctr" indent="0" marL="0">
+              <a:buNone/>
+            </a:pPr>
+            <a:r>
+              <a:rPr lang="en-US" sz="1300" b="1" dirty="0">
+                <a:solidFill>
+                  <a:srgbClr val="FFFFFF"/>
+                </a:solidFill>
+              </a:rPr>
+              <a:t>1</a:t>
+            </a:r>
+            <a:endParaRPr lang="en-US" sz="1300" dirty="0"/>
+          </a:p>
+        </p:txBody>
+      </p:sp>
+      <p:sp>
+        <p:nvSpPr>
+          <p:cNvPr id="5" name="Text 3"/>
+          <p:cNvSpPr txBox="1"/>
+          <p:nvPr/>
+        </p:nvSpPr>
+        <p:spPr>
+          <a:xfrm>
+            <a:off x="1051560" y="1051560"/>
+            <a:ext cx="7589520" cy="502920"/>
+          </a:xfrm>
+          <a:prstGeom prst="rect">
+            <a:avLst/>
+          </a:prstGeom>
+          <a:noFill/>
+          <a:ln/>
+        </p:spPr>
+        <p:txBody>
+          <a:bodyPr wrap="square" lIns="0" tIns="0" rIns="0" bIns="0" rtlCol="0" anchor="ctr"/>
+          <a:lstStyle/>
+          <a:p>
+            <a:pPr indent="0" marL="0">
+              <a:buNone/>
+            </a:pPr>
+            <a:r>
+              <a:rPr lang="en-US" sz="1500" dirty="0">
+                <a:solidFill>
+                  <a:schemeClr val="tx1"/>
+                </a:solidFill>
+              </a:rPr>
+              <a:t>Cotización formal de CLT para sustituir estimaciones</a:t>
+            </a:r>
+            <a:endParaRPr lang="en-US" sz="1500" dirty="0"/>
+          </a:p>
+        </p:txBody>
+      </p:sp>
+      <p:sp>
+        <p:nvSpPr>
+          <p:cNvPr id="6" name="Shape 4"/>
+          <p:cNvSpPr/>
+          <p:nvPr/>
+        </p:nvSpPr>
+        <p:spPr>
+          <a:xfrm>
+            <a:off x="457200" y="1737360"/>
+            <a:ext cx="411480" cy="411480"/>
+          </a:xfrm>
+          <a:prstGeom prst="ellipse">
+            <a:avLst/>
+          </a:prstGeom>
+          <a:solidFill>
+            <a:srgbClr val="C2185B"/>
+          </a:solidFill>
+          <a:ln w="12700">
+            <a:solidFill>
+              <a:srgbClr val="C2185B"/>
+            </a:solidFill>
+            <a:prstDash val="solid"/>
+          </a:ln>
+        </p:spPr>
+      </p:sp>
+      <p:sp>
+        <p:nvSpPr>
+          <p:cNvPr id="7" name="Text 5"/>
+          <p:cNvSpPr txBox="1"/>
+          <p:nvPr/>
+        </p:nvSpPr>
+        <p:spPr>
+          <a:xfrm>
+            <a:off x="457200" y="1737360"/>
+            <a:ext cx="411480" cy="411480"/>
+          </a:xfrm>
+          <a:prstGeom prst="rect">
+            <a:avLst/>
+          </a:prstGeom>
+          <a:noFill/>
+          <a:ln/>
+        </p:spPr>
+        <p:txBody>
+          <a:bodyPr wrap="square" lIns="0" tIns="0" rIns="0" bIns="0" rtlCol="0" anchor="ctr"/>
+          <a:lstStyle/>
+          <a:p>
+            <a:pPr algn="ctr" indent="0" marL="0">
+              <a:buNone/>
+            </a:pPr>
+            <a:r>
+              <a:rPr lang="en-US" sz="1300" b="1" dirty="0">
+                <a:solidFill>
+                  <a:srgbClr val="FFFFFF"/>
+                </a:solidFill>
+              </a:rPr>
+              <a:t>2</a:t>
+            </a:r>
+            <a:endParaRPr lang="en-US" sz="1300" dirty="0"/>
+          </a:p>
+        </p:txBody>
+      </p:sp>
+      <p:sp>
+        <p:nvSpPr>
+          <p:cNvPr id="8" name="Text 6"/>
+          <p:cNvSpPr txBox="1"/>
+          <p:nvPr/>
+        </p:nvSpPr>
+        <p:spPr>
+          <a:xfrm>
+            <a:off x="1051560" y="1691640"/>
+            <a:ext cx="7589520" cy="502920"/>
+          </a:xfrm>
+          <a:prstGeom prst="rect">
+            <a:avLst/>
+          </a:prstGeom>
+          <a:noFill/>
+          <a:ln/>
+        </p:spPr>
+        <p:txBody>
+          <a:bodyPr wrap="square" lIns="0" tIns="0" rIns="0" bIns="0" rtlCol="0" anchor="ctr"/>
+          <a:lstStyle/>
+          <a:p>
+            <a:pPr indent="0" marL="0">
+              <a:buNone/>
+            </a:pPr>
+            <a:r>
+              <a:rPr lang="en-US" sz="1500" dirty="0">
+                <a:solidFill>
+                  <a:schemeClr val="tx1"/>
+                </a:solidFill>
+              </a:rPr>
+              <a:t>Validar consumos y precios con 10–15 talleres</a:t>
+            </a:r>
+            <a:endParaRPr lang="en-US" sz="1500" dirty="0"/>
+          </a:p>
+        </p:txBody>
+      </p:sp>
+      <p:sp>
+        <p:nvSpPr>
+          <p:cNvPr id="9" name="Shape 7"/>
+          <p:cNvSpPr/>
+          <p:nvPr/>
+        </p:nvSpPr>
+        <p:spPr>
+          <a:xfrm>
+            <a:off x="457200" y="2377440"/>
+            <a:ext cx="411480" cy="411480"/>
+          </a:xfrm>
+          <a:prstGeom prst="ellipse">
+            <a:avLst/>
+          </a:prstGeom>
+          <a:solidFill>
+            <a:srgbClr val="F2B705"/>
+          </a:solidFill>
+          <a:ln w="12700">
+            <a:solidFill>
+              <a:srgbClr val="F2B705"/>
+            </a:solidFill>
+            <a:prstDash val="solid"/>
+          </a:ln>
+        </p:spPr>
+      </p:sp>
+      <p:sp>
+        <p:nvSpPr>
+          <p:cNvPr id="10" name="Text 8"/>
+          <p:cNvSpPr txBox="1"/>
+          <p:nvPr/>
+        </p:nvSpPr>
+        <p:spPr>
+          <a:xfrm>
+            <a:off x="457200" y="2377440"/>
+            <a:ext cx="411480" cy="411480"/>
+          </a:xfrm>
+          <a:prstGeom prst="rect">
+            <a:avLst/>
+          </a:prstGeom>
+          <a:noFill/>
+          <a:ln/>
+        </p:spPr>
+        <p:txBody>
+          <a:bodyPr wrap="square" lIns="0" tIns="0" rIns="0" bIns="0" rtlCol="0" anchor="ctr"/>
+          <a:lstStyle/>
+          <a:p>
+            <a:pPr algn="ctr" indent="0" marL="0">
+              <a:buNone/>
+            </a:pPr>
+            <a:r>
+              <a:rPr lang="en-US" sz="1300" b="1" dirty="0">
+                <a:solidFill>
+                  <a:srgbClr val="1B1F3B"/>
+                </a:solidFill>
+              </a:rPr>
+              <a:t>3</a:t>
+            </a:r>
+            <a:endParaRPr lang="en-US" sz="1300" dirty="0"/>
+          </a:p>
+        </p:txBody>
+      </p:sp>
+      <p:sp>
+        <p:nvSpPr>
+          <p:cNvPr id="11" name="Text 9"/>
+          <p:cNvSpPr txBox="1"/>
+          <p:nvPr/>
+        </p:nvSpPr>
+        <p:spPr>
+          <a:xfrm>
+            <a:off x="1051560" y="2331720"/>
+            <a:ext cx="7589520" cy="502920"/>
+          </a:xfrm>
+          <a:prstGeom prst="rect">
+            <a:avLst/>
+          </a:prstGeom>
+          <a:noFill/>
+          <a:ln/>
+        </p:spPr>
+        <p:txBody>
+          <a:bodyPr wrap="square" lIns="0" tIns="0" rIns="0" bIns="0" rtlCol="0" anchor="ctr"/>
+          <a:lstStyle/>
+          <a:p>
+            <a:pPr indent="0" marL="0">
+              <a:buNone/>
+            </a:pPr>
+            <a:r>
+              <a:rPr lang="en-US" sz="1500" dirty="0">
+                <a:solidFill>
+                  <a:schemeClr val="tx1"/>
+                </a:solidFill>
+              </a:rPr>
+              <a:t>Abrir la sala demo y trabajar las 17 cuentas 80/20</a:t>
+            </a:r>
+            <a:endParaRPr lang="en-US" sz="1500" dirty="0"/>
+          </a:p>
+        </p:txBody>
+      </p:sp>
+      <p:sp>
+        <p:nvSpPr>
+          <p:cNvPr id="12" name="Shape 10"/>
+          <p:cNvSpPr/>
+          <p:nvPr/>
+        </p:nvSpPr>
+        <p:spPr>
+          <a:xfrm>
+            <a:off x="457200" y="3017520"/>
+            <a:ext cx="411480" cy="411480"/>
+          </a:xfrm>
+          <a:prstGeom prst="ellipse">
+            <a:avLst/>
+          </a:prstGeom>
+          <a:solidFill>
+            <a:srgbClr val="1B1F3B"/>
+          </a:solidFill>
+          <a:ln w="12700">
+            <a:solidFill>
+              <a:srgbClr val="1B1F3B"/>
+            </a:solidFill>
+            <a:prstDash val="solid"/>
+          </a:ln>
+        </p:spPr>
+      </p:sp>
+      <p:sp>
+        <p:nvSpPr>
+          <p:cNvPr id="13" name="Text 11"/>
+          <p:cNvSpPr txBox="1"/>
+          <p:nvPr/>
+        </p:nvSpPr>
+        <p:spPr>
+          <a:xfrm>
+            <a:off x="457200" y="3017520"/>
+            <a:ext cx="411480" cy="411480"/>
+          </a:xfrm>
+          <a:prstGeom prst="rect">
+            <a:avLst/>
+          </a:prstGeom>
+          <a:noFill/>
+          <a:ln/>
+        </p:spPr>
+        <p:txBody>
+          <a:bodyPr wrap="square" lIns="0" tIns="0" rIns="0" bIns="0" rtlCol="0" anchor="ctr"/>
+          <a:lstStyle/>
+          <a:p>
+            <a:pPr algn="ctr" indent="0" marL="0">
+              <a:buNone/>
+            </a:pPr>
+            <a:r>
+              <a:rPr lang="en-US" sz="1300" b="1" dirty="0">
+                <a:solidFill>
+                  <a:srgbClr val="FFFFFF"/>
+                </a:solidFill>
+              </a:rPr>
+              <a:t>4</a:t>
+            </a:r>
+            <a:endParaRPr lang="en-US" sz="1300" dirty="0"/>
+          </a:p>
+        </p:txBody>
+      </p:sp>
+      <p:sp>
+        <p:nvSpPr>
+          <p:cNvPr id="14" name="Text 12"/>
+          <p:cNvSpPr txBox="1"/>
+          <p:nvPr/>
+        </p:nvSpPr>
+        <p:spPr>
+          <a:xfrm>
+            <a:off x="1051560" y="2971800"/>
+            <a:ext cx="7589520" cy="502920"/>
+          </a:xfrm>
+          <a:prstGeom prst="rect">
+            <a:avLst/>
+          </a:prstGeom>
+          <a:noFill/>
+          <a:ln/>
+        </p:spPr>
+        <p:txBody>
+          <a:bodyPr wrap="square" lIns="0" tIns="0" rIns="0" bIns="0" rtlCol="0" anchor="ctr"/>
+          <a:lstStyle/>
+          <a:p>
+            <a:pPr indent="0" marL="0">
+              <a:buNone/>
+            </a:pPr>
+            <a:r>
+              <a:rPr lang="en-US" sz="1500" dirty="0">
+                <a:solidFill>
+                  <a:schemeClr val="tx1"/>
+                </a:solidFill>
+              </a:rPr>
+              <a:t>Confirmar aranceles y fracciones con agente aduanal</a:t>
+            </a:r>
+            <a:endParaRPr lang="en-US" sz="1500" dirty="0"/>
+          </a:p>
+        </p:txBody>
+      </p:sp>
+      <p:sp>
+        <p:nvSpPr>
+          <p:cNvPr id="15" name="Shape 13"/>
+          <p:cNvSpPr/>
+          <p:nvPr/>
+        </p:nvSpPr>
+        <p:spPr>
+          <a:xfrm>
+            <a:off x="457200" y="3657600"/>
+            <a:ext cx="411480" cy="411480"/>
+          </a:xfrm>
+          <a:prstGeom prst="ellipse">
+            <a:avLst/>
+          </a:prstGeom>
+          <a:solidFill>
+            <a:srgbClr val="0089C2"/>
+          </a:solidFill>
+          <a:ln w="12700">
+            <a:solidFill>
+              <a:srgbClr val="0089C2"/>
+            </a:solidFill>
+            <a:prstDash val="solid"/>
+          </a:ln>
+        </p:spPr>
+      </p:sp>
+      <p:sp>
+        <p:nvSpPr>
+          <p:cNvPr id="16" name="Text 14"/>
+          <p:cNvSpPr txBox="1"/>
+          <p:nvPr/>
+        </p:nvSpPr>
+        <p:spPr>
+          <a:xfrm>
+            <a:off x="457200" y="3657600"/>
+            <a:ext cx="411480" cy="411480"/>
+          </a:xfrm>
+          <a:prstGeom prst="rect">
+            <a:avLst/>
+          </a:prstGeom>
+          <a:noFill/>
+          <a:ln/>
+        </p:spPr>
+        <p:txBody>
+          <a:bodyPr wrap="square" lIns="0" tIns="0" rIns="0" bIns="0" rtlCol="0" anchor="ctr"/>
+          <a:lstStyle/>
+          <a:p>
+            <a:pPr algn="ctr" indent="0" marL="0">
+              <a:buNone/>
+            </a:pPr>
+            <a:r>
+              <a:rPr lang="en-US" sz="1300" b="1" dirty="0">
+                <a:solidFill>
+                  <a:srgbClr val="FFFFFF"/>
+                </a:solidFill>
+              </a:rPr>
+              <a:t>5</a:t>
+            </a:r>
+            <a:endParaRPr lang="en-US" sz="1300" dirty="0"/>
+          </a:p>
+        </p:txBody>
+      </p:sp>
+      <p:sp>
+        <p:nvSpPr>
+          <p:cNvPr id="17" name="Text 15"/>
+          <p:cNvSpPr txBox="1"/>
+          <p:nvPr/>
+        </p:nvSpPr>
+        <p:spPr>
+          <a:xfrm>
+            <a:off x="1051560" y="3611880"/>
+            <a:ext cx="7589520" cy="502920"/>
+          </a:xfrm>
+          <a:prstGeom prst="rect">
+            <a:avLst/>
+          </a:prstGeom>
+          <a:noFill/>
+          <a:ln/>
+        </p:spPr>
+        <p:txBody>
+          <a:bodyPr wrap="square" lIns="0" tIns="0" rIns="0" bIns="0" rtlCol="0" anchor="ctr"/>
+          <a:lstStyle/>
+          <a:p>
+            <a:pPr indent="0" marL="0">
+              <a:buNone/>
+            </a:pPr>
+            <a:r>
+              <a:rPr lang="en-US" sz="1500" dirty="0">
+                <a:solidFill>
+                  <a:schemeClr val="tx1"/>
+                </a:solidFill>
+              </a:rPr>
+              <a:t>Preparar la entrada a Centroamérica (año 2)</a:t>
+            </a:r>
+            <a:endParaRPr lang="en-US" sz="1500" dirty="0"/>
+          </a:p>
+        </p:txBody>
+      </p:sp>
+      <p:sp>
+        <p:nvSpPr>
+          <p:cNvPr id="25" name="Slide Number Placeholder 0"/>
+          <p:cNvSpPr>
+            <a:spLocks noGrp="1"/>
+          </p:cNvSpPr>
+          <p:nvPr>
+            <p:ph type="sldNum" sz="quarter" idx="4294967295"/>
+          </p:nvPr>
+        </p:nvSpPr>
+        <p:spPr>
+          <a:xfrm>
+            <a:off x="8229600" y="4800600"/>
+            <a:ext cx="457200" cy="228600"/>
+          </a:xfrm>
+          <a:prstGeom prst="rect">
+            <a:avLst/>
+          </a:prstGeom>
+          <a:extLst>
+            <a:ext uri="{C572A759-6A51-4108-AA02-DFA0A04FC94B}">
+              <ma14:wrappingTextBoxFlag xmlns:ma14="http://schemas.microsoft.com/office/mac/drawingml/2011/main" val="0"/>
+            </a:ext>
+          </a:extLst>
+        </p:spPr>
+        <p:txBody>
+          <a:bodyPr/>
+          <a:lstStyle>
+            <a:lvl1pPr>
+              <a:defRPr sz="900">
+                <a:solidFill>
+                  <a:srgbClr val="7A8299"/>
+                </a:solidFill>
+              </a:defRPr>
+            </a:lvl1pPr>
+          </a:lstStyle>
+          <a:p>
+            <a:pPr algn="r"/>
+            <a:fld id="{F7021451-1387-4CA6-816F-3879F97B5CBC}" type="slidenum">
+              <a:rPr b="0" lang="en-US"/>
+              <a:t>38</a:t>
+            </a:fld>
+            <a:endParaRPr lang="en-US"/>
+          </a:p>
+        </p:txBody>
+      </p:sp>
+    </p:spTree>
+  </p:cSld>
+  <p:clrMapOvr>
+    <a:masterClrMapping/>
+  </p:clrMapOvr>
+  <p:transition spd="med">
+    <p:fade/>
+  </p:transition>
+</p:sld>
+</file>
+
+<file path=ppt/slides/slide39.xml><?xml version="1.0" encoding="utf-8"?>
+<p:sld xmlns:a="http://schemas.openxmlformats.org/drawingml/2006/main" xmlns:r="http://schemas.openxmlformats.org/officeDocument/2006/relationships" xmlns:p="http://schemas.openxmlformats.org/presentationml/2006/main">
+  <p:cSld name="Slide 39">
     <p:spTree>
       <p:nvGrpSpPr>
         <p:cNvPr id="1" name=""/>

--- a/propuesta-clt/Estudio_Mercado_CLT_Mexico_Latam_ES.pptx
+++ b/propuesta-clt/Estudio_Mercado_CLT_Mexico_Latam_ES.pptx
@@ -145,20 +145,20 @@
   <p:extLst>
     <p:ext uri="{521415D9-36F7-43E2-AB2F-B90AF26B5E84}">
       <p14:sectionLst xmlns:p14="http://schemas.microsoft.com/office/powerpoint/2010/main">
-        <p14:section name="Inicio" id="{bbda5e5d-13a2-5641-bdc0-f03de0b18bf8}">
+        <p14:section name="Inicio" id="{e6f8615f-a54b-9d36-9d24-b9c3e9416656}">
           <p14:sldIdLst>
             <p14:sldId id="256"/>
             <p14:sldId id="257"/>
             <p14:sldId id="258"/>
           </p14:sldIdLst>
         </p14:section>
-        <p14:section name="Alcance y metodología" id="{55f2b188-1219-26aa-7ac0-c0764e5f73e5}">
+        <p14:section name="Alcance y metodología" id="{c3389226-39e7-fb9d-8761-64ce0b856ab3}">
           <p14:sldIdLst>
             <p14:sldId id="259"/>
             <p14:sldId id="260"/>
           </p14:sldIdLst>
         </p14:section>
-        <p14:section name="El fabricante: CLT" id="{e69773a9-6532-1bc0-60d2-4e895f30590f}">
+        <p14:section name="El fabricante: CLT" id="{c98dbedf-b1d4-e8dd-58f0-deab32be9574}">
           <p14:sldIdLst>
             <p14:sldId id="261"/>
             <p14:sldId id="262"/>
@@ -170,7 +170,7 @@
             <p14:sldId id="268"/>
           </p14:sldIdLst>
         </p14:section>
-        <p14:section name="Mercado mexicano" id="{d6473e78-126b-56b4-5922-a0d346ded792}">
+        <p14:section name="Mercado mexicano" id="{37a3d02b-c56a-30d7-7748-24cb14d304db}">
           <p14:sldIdLst>
             <p14:sldId id="269"/>
             <p14:sldId id="270"/>
@@ -180,14 +180,14 @@
             <p14:sldId id="274"/>
           </p14:sldIdLst>
         </p14:section>
-        <p14:section name="Clientes prioritarios" id="{44b50488-f04b-1de5-fc77-7835aaf92606}">
+        <p14:section name="Clientes prioritarios" id="{48a557ec-27ec-14be-3062-468e482b1f08}">
           <p14:sldIdLst>
             <p14:sldId id="275"/>
             <p14:sldId id="276"/>
             <p14:sldId id="277"/>
           </p14:sldIdLst>
         </p14:section>
-        <p14:section name="Competencia" id="{1dabede5-628a-d221-4794-84cdc7998b4e}">
+        <p14:section name="Competencia" id="{3c651204-b956-31e0-7372-21385feb478a}">
           <p14:sldIdLst>
             <p14:sldId id="278"/>
             <p14:sldId id="279"/>
@@ -196,13 +196,13 @@
             <p14:sldId id="282"/>
           </p14:sldIdLst>
         </p14:section>
-        <p14:section name="Comercio exterior" id="{3bd79511-2901-a1ab-0a94-d8dd3fe7921d}">
+        <p14:section name="Comercio exterior" id="{cadc0225-da0b-1a3a-8677-499c7c02d65a}">
           <p14:sldIdLst>
             <p14:sldId id="283"/>
             <p14:sldId id="284"/>
           </p14:sldIdLst>
         </p14:section>
-        <p14:section name="Latinoamérica y EE. UU." id="{1b7210e7-144d-a513-ec60-7aef13a18394}">
+        <p14:section name="Latinoamérica y EE. UU." id="{1e4ee076-5b37-0706-a74e-8e62e15e65a7}">
           <p14:sldIdLst>
             <p14:sldId id="285"/>
             <p14:sldId id="286"/>
@@ -212,7 +212,7 @@
             <p14:sldId id="290"/>
           </p14:sldIdLst>
         </p14:section>
-        <p14:section name="Conclusiones" id="{fb6860f0-e751-07d0-7331-9009fb722274}">
+        <p14:section name="Conclusiones" id="{fa8a696c-4ba6-0435-29a7-cd1173110055}">
           <p14:sldIdLst>
             <p14:sldId id="291"/>
             <p14:sldId id="292"/>
@@ -28089,7 +28089,7 @@
                   <a:schemeClr val="accent5"/>
                 </a:solidFill>
               </a:rPr>
-              <a:t>Estrella dorada: cuenta 80/20 en México o prioridad A en el resto de LATAM. Lista numerada por cuenta en mapas/ y en el Excel de prospectos.</a:t>
+              <a:t>Estrella dorada: cuenta 80/20 en México o prioridad A en el resto de LATAM. Lista numerada por cuenta en la hoja Mapas del Excel del plan de marketing.</a:t>
             </a:r>
             <a:endParaRPr lang="en-US" sz="1000" dirty="0"/>
           </a:p>
@@ -28260,7 +28260,7 @@
                   <a:schemeClr val="accent5"/>
                 </a:solidFill>
               </a:rPr>
-              <a:t>Estrella dorada: cuenta 80/20 en México o prioridad A en el resto de LATAM. Lista numerada por cuenta en mapas/ y en el Excel de prospectos.</a:t>
+              <a:t>Estrella dorada: cuenta 80/20 en México o prioridad A en el resto de LATAM. Lista numerada por cuenta en la hoja Mapas del Excel del plan de marketing.</a:t>
             </a:r>
             <a:endParaRPr lang="en-US" sz="1000" dirty="0"/>
           </a:p>

--- a/propuesta-clt/Estudio_Mercado_CLT_Mexico_Latam_ES.pptx
+++ b/propuesta-clt/Estudio_Mercado_CLT_Mexico_Latam_ES.pptx
@@ -145,20 +145,20 @@
   <p:extLst>
     <p:ext uri="{521415D9-36F7-43E2-AB2F-B90AF26B5E84}">
       <p14:sectionLst xmlns:p14="http://schemas.microsoft.com/office/powerpoint/2010/main">
-        <p14:section name="Inicio" id="{e6f8615f-a54b-9d36-9d24-b9c3e9416656}">
+        <p14:section name="Inicio" id="{f3f3a4aa-e816-5f5e-71c1-e94cb46c16b2}">
           <p14:sldIdLst>
             <p14:sldId id="256"/>
             <p14:sldId id="257"/>
             <p14:sldId id="258"/>
           </p14:sldIdLst>
         </p14:section>
-        <p14:section name="Alcance y metodología" id="{c3389226-39e7-fb9d-8761-64ce0b856ab3}">
+        <p14:section name="Alcance y metodología" id="{73f5531f-4a9a-efbe-244b-4303f42eb494}">
           <p14:sldIdLst>
             <p14:sldId id="259"/>
             <p14:sldId id="260"/>
           </p14:sldIdLst>
         </p14:section>
-        <p14:section name="El fabricante: CLT" id="{c98dbedf-b1d4-e8dd-58f0-deab32be9574}">
+        <p14:section name="El fabricante: CLT" id="{cf7c00cf-574e-31dd-fb9e-b679195838c5}">
           <p14:sldIdLst>
             <p14:sldId id="261"/>
             <p14:sldId id="262"/>
@@ -170,7 +170,7 @@
             <p14:sldId id="268"/>
           </p14:sldIdLst>
         </p14:section>
-        <p14:section name="Mercado mexicano" id="{37a3d02b-c56a-30d7-7748-24cb14d304db}">
+        <p14:section name="Mercado mexicano" id="{1185463a-1c5f-d233-44e7-2f33c72f3154}">
           <p14:sldIdLst>
             <p14:sldId id="269"/>
             <p14:sldId id="270"/>
@@ -180,14 +180,14 @@
             <p14:sldId id="274"/>
           </p14:sldIdLst>
         </p14:section>
-        <p14:section name="Clientes prioritarios" id="{48a557ec-27ec-14be-3062-468e482b1f08}">
+        <p14:section name="Clientes prioritarios" id="{388f06f1-2dc7-d6ba-6a03-0cc9943657f3}">
           <p14:sldIdLst>
             <p14:sldId id="275"/>
             <p14:sldId id="276"/>
             <p14:sldId id="277"/>
           </p14:sldIdLst>
         </p14:section>
-        <p14:section name="Competencia" id="{3c651204-b956-31e0-7372-21385feb478a}">
+        <p14:section name="Competencia" id="{473530a1-620f-a8c6-4a58-0b59c85d7f43}">
           <p14:sldIdLst>
             <p14:sldId id="278"/>
             <p14:sldId id="279"/>
@@ -196,13 +196,13 @@
             <p14:sldId id="282"/>
           </p14:sldIdLst>
         </p14:section>
-        <p14:section name="Comercio exterior" id="{cadc0225-da0b-1a3a-8677-499c7c02d65a}">
+        <p14:section name="Comercio exterior" id="{109de3e7-be29-fb04-5242-59397f1e8b21}">
           <p14:sldIdLst>
             <p14:sldId id="283"/>
             <p14:sldId id="284"/>
           </p14:sldIdLst>
         </p14:section>
-        <p14:section name="Latinoamérica y EE. UU." id="{1e4ee076-5b37-0706-a74e-8e62e15e65a7}">
+        <p14:section name="Latinoamérica y EE. UU." id="{0b0710b3-016c-ecd8-4734-651bc9f46d6b}">
           <p14:sldIdLst>
             <p14:sldId id="285"/>
             <p14:sldId id="286"/>
@@ -212,7 +212,7 @@
             <p14:sldId id="290"/>
           </p14:sldIdLst>
         </p14:section>
-        <p14:section name="Conclusiones" id="{fa8a696c-4ba6-0435-29a7-cd1173110055}">
+        <p14:section name="Conclusiones" id="{4caeba76-ff40-ebd7-e3c0-7ac0217ce088}">
           <p14:sldIdLst>
             <p14:sldId id="291"/>
             <p14:sldId id="292"/>
@@ -5847,42 +5847,6 @@
       </p:sp>
       <p:sp>
         <p:nvSpPr>
-          <p:cNvPr id="3" name="Text 0"/>
-          <p:cNvSpPr/>
-          <p:nvPr/>
-        </p:nvSpPr>
-        <p:spPr>
-          <a:xfrm>
-            <a:off x="457200" y="4800600"/>
-            <a:ext cx="6858000" cy="228600"/>
-          </a:xfrm>
-          <a:prstGeom prst="rect">
-            <a:avLst/>
-          </a:prstGeom>
-          <a:noFill/>
-          <a:ln/>
-        </p:spPr>
-        <p:txBody>
-          <a:bodyPr wrap="square" rtlCol="0" anchor="ctr"/>
-          <a:lstStyle/>
-          <a:p>
-            <a:pPr indent="0" marL="0">
-              <a:buNone/>
-            </a:pPr>
-            <a:r>
-              <a:rPr lang="en-US" sz="900" dirty="0">
-                <a:solidFill>
-                  <a:srgbClr val="7A8299"/>
-                </a:solidFill>
-              </a:rPr>
-              <a:t>Estudio de mercado CLT — TID · VSP · CEB — Confidencial</a:t>
-            </a:r>
-            <a:endParaRPr lang="en-US" sz="900" dirty="0"/>
-          </a:p>
-        </p:txBody>
-      </p:sp>
-      <p:sp>
-        <p:nvSpPr>
           <p:cNvPr id="25" name="Slide Number Placeholder 0"/>
           <p:cNvSpPr>
             <a:spLocks noGrp="1"/>

--- a/propuesta-clt/Estudio_Mercado_CLT_Mexico_Latam_ES.pptx
+++ b/propuesta-clt/Estudio_Mercado_CLT_Mexico_Latam_ES.pptx
@@ -145,20 +145,20 @@
   <p:extLst>
     <p:ext uri="{521415D9-36F7-43E2-AB2F-B90AF26B5E84}">
       <p14:sectionLst xmlns:p14="http://schemas.microsoft.com/office/powerpoint/2010/main">
-        <p14:section name="Inicio" id="{f3f3a4aa-e816-5f5e-71c1-e94cb46c16b2}">
+        <p14:section name="Inicio" id="{4aef0922-06b8-970e-0f49-3bf2b57c06f8}">
           <p14:sldIdLst>
             <p14:sldId id="256"/>
             <p14:sldId id="257"/>
             <p14:sldId id="258"/>
           </p14:sldIdLst>
         </p14:section>
-        <p14:section name="Alcance y metodología" id="{73f5531f-4a9a-efbe-244b-4303f42eb494}">
+        <p14:section name="Alcance y metodología" id="{9be5a86d-b30d-3531-18e3-25fac95dc14c}">
           <p14:sldIdLst>
             <p14:sldId id="259"/>
             <p14:sldId id="260"/>
           </p14:sldIdLst>
         </p14:section>
-        <p14:section name="El fabricante: CLT" id="{cf7c00cf-574e-31dd-fb9e-b679195838c5}">
+        <p14:section name="El fabricante: CLT" id="{aab2ad3a-6584-f8b0-eb15-c1b97997a4a5}">
           <p14:sldIdLst>
             <p14:sldId id="261"/>
             <p14:sldId id="262"/>
@@ -170,7 +170,7 @@
             <p14:sldId id="268"/>
           </p14:sldIdLst>
         </p14:section>
-        <p14:section name="Mercado mexicano" id="{1185463a-1c5f-d233-44e7-2f33c72f3154}">
+        <p14:section name="Mercado mexicano" id="{18b9e84e-cdc0-6210-8607-656a298f90f0}">
           <p14:sldIdLst>
             <p14:sldId id="269"/>
             <p14:sldId id="270"/>
@@ -180,14 +180,14 @@
             <p14:sldId id="274"/>
           </p14:sldIdLst>
         </p14:section>
-        <p14:section name="Clientes prioritarios" id="{388f06f1-2dc7-d6ba-6a03-0cc9943657f3}">
+        <p14:section name="Clientes prioritarios" id="{23c4e660-fc42-b104-4b8b-63fd7de914d0}">
           <p14:sldIdLst>
             <p14:sldId id="275"/>
             <p14:sldId id="276"/>
             <p14:sldId id="277"/>
           </p14:sldIdLst>
         </p14:section>
-        <p14:section name="Competencia" id="{473530a1-620f-a8c6-4a58-0b59c85d7f43}">
+        <p14:section name="Competencia" id="{cf8e2276-659d-b24a-d060-d9375c00333d}">
           <p14:sldIdLst>
             <p14:sldId id="278"/>
             <p14:sldId id="279"/>
@@ -196,13 +196,13 @@
             <p14:sldId id="282"/>
           </p14:sldIdLst>
         </p14:section>
-        <p14:section name="Comercio exterior" id="{109de3e7-be29-fb04-5242-59397f1e8b21}">
+        <p14:section name="Comercio exterior" id="{22562d41-43c7-c7f1-e3a6-50499d404534}">
           <p14:sldIdLst>
             <p14:sldId id="283"/>
             <p14:sldId id="284"/>
           </p14:sldIdLst>
         </p14:section>
-        <p14:section name="Latinoamérica y EE. UU." id="{0b0710b3-016c-ecd8-4734-651bc9f46d6b}">
+        <p14:section name="Latinoamérica y EE. UU." id="{fe1bd0f4-c026-5fe5-3e45-a55a535347ae}">
           <p14:sldIdLst>
             <p14:sldId id="285"/>
             <p14:sldId id="286"/>
@@ -212,7 +212,7 @@
             <p14:sldId id="290"/>
           </p14:sldIdLst>
         </p14:section>
-        <p14:section name="Conclusiones" id="{4caeba76-ff40-ebd7-e3c0-7ac0217ce088}">
+        <p14:section name="Conclusiones" id="{0de104b7-6575-facb-c13c-21f22ab0eb01}">
           <p14:sldIdLst>
             <p14:sldId id="291"/>
             <p14:sldId id="292"/>
@@ -1456,7 +1456,7 @@
                   <c:v>6</c:v>
                 </c:pt>
                 <c:pt idx="2">
-                  <c:v>25</c:v>
+                  <c:v>30</c:v>
                 </c:pt>
               </c:numCache>
             </c:numRef>
@@ -1539,7 +1539,7 @@
                   <c:v>16</c:v>
                 </c:pt>
                 <c:pt idx="2">
-                  <c:v>40</c:v>
+                  <c:v>55</c:v>
                 </c:pt>
               </c:numCache>
             </c:numRef>
@@ -1622,7 +1622,7 @@
                   <c:v>11</c:v>
                 </c:pt>
                 <c:pt idx="2">
-                  <c:v>38</c:v>
+                  <c:v>55</c:v>
                 </c:pt>
               </c:numCache>
             </c:numRef>
@@ -12194,7 +12194,7 @@
                   <a:srgbClr val="B38600"/>
                 </a:solidFill>
               </a:rPr>
-              <a:t>180</a:t>
+              <a:t>217</a:t>
             </a:r>
             <a:endParaRPr lang="en-US" sz="3000" dirty="0"/>
           </a:p>
@@ -25067,7 +25067,7 @@
                   <a:schemeClr val="tx1"/>
                 </a:solidFill>
               </a:rPr>
-              <a:t>Latinoamérica: 180 prospectos en 16 países</a:t>
+              <a:t>Latinoamérica: 217 prospectos en 16 países</a:t>
             </a:r>
             <a:endParaRPr lang="en-US" sz="2600" dirty="0"/>
           </a:p>
@@ -25119,7 +25119,7 @@
                   <a:schemeClr val="accent1"/>
                 </a:solidFill>
               </a:rPr>
-              <a:t>42</a:t>
+              <a:t>47</a:t>
             </a:r>
             <a:endParaRPr lang="en-US" sz="3000" dirty="0"/>
           </a:p>
@@ -25263,7 +25263,7 @@
                   <a:schemeClr val="accent1"/>
                 </a:solidFill>
               </a:rPr>
-              <a:t>41 + 35</a:t>
+              <a:t>62 + 51</a:t>
             </a:r>
             <a:endParaRPr lang="en-US" sz="3000" dirty="0"/>
           </a:p>
